--- a/docs/FYP Presentation.pptx
+++ b/docs/FYP Presentation.pptx
@@ -1,31 +1,38 @@
 
 <file path=ppt/presentation.xml><?xml version="1.0" encoding="utf-8"?>
-<p:presentation xmlns:a="http://schemas.openxmlformats.org/drawingml/2006/main" xmlns:r="http://schemas.openxmlformats.org/officeDocument/2006/relationships" xmlns:p="http://schemas.openxmlformats.org/presentationml/2006/main" saveSubsetFonts="1" embedTrueTypeFonts="true">
+<p:presentation xmlns:a="http://schemas.openxmlformats.org/drawingml/2006/main" xmlns:r="http://schemas.openxmlformats.org/officeDocument/2006/relationships" xmlns:p="http://schemas.openxmlformats.org/presentationml/2006/main" embedTrueTypeFonts="1" saveSubsetFonts="1">
   <p:sldMasterIdLst>
     <p:sldMasterId id="2147483648" r:id="rId1"/>
   </p:sldMasterIdLst>
   <p:sldIdLst>
-    <p:sldId id="256" r:id="rId6"/>
-    <p:sldId id="257" r:id="rId7"/>
-    <p:sldId id="258" r:id="rId8"/>
-    <p:sldId id="259" r:id="rId9"/>
-    <p:sldId id="260" r:id="rId10"/>
-    <p:sldId id="261" r:id="rId11"/>
-    <p:sldId id="262" r:id="rId12"/>
-    <p:sldId id="263" r:id="rId13"/>
-    <p:sldId id="264" r:id="rId14"/>
-    <p:sldId id="265" r:id="rId15"/>
-    <p:sldId id="266" r:id="rId16"/>
+    <p:sldId id="256" r:id="rId2"/>
+    <p:sldId id="257" r:id="rId3"/>
+    <p:sldId id="258" r:id="rId4"/>
+    <p:sldId id="259" r:id="rId5"/>
+    <p:sldId id="260" r:id="rId6"/>
+    <p:sldId id="261" r:id="rId7"/>
+    <p:sldId id="262" r:id="rId8"/>
+    <p:sldId id="263" r:id="rId9"/>
+    <p:sldId id="264" r:id="rId10"/>
+    <p:sldId id="265" r:id="rId11"/>
+    <p:sldId id="266" r:id="rId12"/>
   </p:sldIdLst>
   <p:sldSz cx="18288000" cy="10287000"/>
   <p:notesSz cx="6858000" cy="9144000"/>
   <p:embeddedFontLst>
     <p:embeddedFont>
-      <p:font typeface="Clear Sans Bold" charset="1" panose="020B0803030202020304"/>
-      <p:regular r:id="rId17"/>
+      <p:font typeface="Aileron Bold" panose="020B0604020202020204" charset="0"/>
+      <p:regular r:id="rId13"/>
     </p:embeddedFont>
     <p:embeddedFont>
-      <p:font typeface="Aileron Bold" charset="1" panose="00000800000000000000"/>
+      <p:font typeface="Calibri" panose="020F0502020204030204" pitchFamily="34" charset="0"/>
+      <p:regular r:id="rId14"/>
+      <p:bold r:id="rId15"/>
+      <p:italic r:id="rId16"/>
+      <p:boldItalic r:id="rId17"/>
+    </p:embeddedFont>
+    <p:embeddedFont>
+      <p:font typeface="Clear Sans Bold" panose="020B0604020202020204" charset="0"/>
       <p:regular r:id="rId18"/>
     </p:embeddedFont>
   </p:embeddedFontLst>
@@ -124,6 +131,22 @@
       </a:defRPr>
     </a:lvl9pPr>
   </p:defaultTextStyle>
+  <p:extLst>
+    <p:ext uri="{EFAFB233-063F-42B5-8137-9DF3F51BA10A}">
+      <p15:sldGuideLst xmlns:p15="http://schemas.microsoft.com/office/powerpoint/2012/main">
+        <p15:guide id="1" orient="horz" pos="2160">
+          <p15:clr>
+            <a:srgbClr val="A4A3A4"/>
+          </p15:clr>
+        </p15:guide>
+        <p15:guide id="2" pos="2880">
+          <p15:clr>
+            <a:srgbClr val="A4A3A4"/>
+          </p15:clr>
+        </p15:guide>
+      </p15:sldGuideLst>
+    </p:ext>
+  </p:extLst>
 </p:presentation>
 </file>
 
@@ -165,10 +188,9 @@
           <a:lstStyle/>
           <a:p>
             <a:r>
-              <a:rPr lang="en-US" smtClean="0"/>
+              <a:rPr lang="en-US"/>
               <a:t>Click to edit Master title style</a:t>
             </a:r>
-            <a:endParaRPr lang="en-US"/>
           </a:p>
         </p:txBody>
       </p:sp>
@@ -284,10 +306,9 @@
           </a:lstStyle>
           <a:p>
             <a:r>
-              <a:rPr lang="en-US" smtClean="0"/>
+              <a:rPr lang="en-US"/>
               <a:t>Click to edit Master subtitle style</a:t>
             </a:r>
-            <a:endParaRPr lang="en-US"/>
           </a:p>
         </p:txBody>
       </p:sp>
@@ -309,7 +330,7 @@
             <a:fld id="{1D8BD707-D9CF-40AE-B4C6-C98DA3205C09}" type="datetimeFigureOut">
               <a:rPr lang="en-US" smtClean="0"/>
               <a:pPr/>
-              <a:t>8/1/2011</a:t>
+              <a:t>5/14/2026</a:t>
             </a:fld>
             <a:endParaRPr lang="en-US"/>
           </a:p>
@@ -399,10 +420,9 @@
           <a:lstStyle/>
           <a:p>
             <a:r>
-              <a:rPr lang="en-US" smtClean="0"/>
+              <a:rPr lang="en-US"/>
               <a:t>Click to edit Master title style</a:t>
             </a:r>
-            <a:endParaRPr lang="en-US"/>
           </a:p>
         </p:txBody>
       </p:sp>
@@ -423,38 +443,37 @@
           <a:p>
             <a:pPr lvl="0"/>
             <a:r>
-              <a:rPr lang="en-US" smtClean="0"/>
+              <a:rPr lang="en-US"/>
               <a:t>Click to edit Master text styles</a:t>
             </a:r>
           </a:p>
           <a:p>
             <a:pPr lvl="1"/>
             <a:r>
-              <a:rPr lang="en-US" smtClean="0"/>
+              <a:rPr lang="en-US"/>
               <a:t>Second level</a:t>
             </a:r>
           </a:p>
           <a:p>
             <a:pPr lvl="2"/>
             <a:r>
-              <a:rPr lang="en-US" smtClean="0"/>
+              <a:rPr lang="en-US"/>
               <a:t>Third level</a:t>
             </a:r>
           </a:p>
           <a:p>
             <a:pPr lvl="3"/>
             <a:r>
-              <a:rPr lang="en-US" smtClean="0"/>
+              <a:rPr lang="en-US"/>
               <a:t>Fourth level</a:t>
             </a:r>
           </a:p>
           <a:p>
             <a:pPr lvl="4"/>
             <a:r>
-              <a:rPr lang="en-US" smtClean="0"/>
+              <a:rPr lang="en-US"/>
               <a:t>Fifth level</a:t>
             </a:r>
-            <a:endParaRPr lang="en-US"/>
           </a:p>
         </p:txBody>
       </p:sp>
@@ -476,7 +495,7 @@
             <a:fld id="{1D8BD707-D9CF-40AE-B4C6-C98DA3205C09}" type="datetimeFigureOut">
               <a:rPr lang="en-US" smtClean="0"/>
               <a:pPr/>
-              <a:t>8/1/2011</a:t>
+              <a:t>5/14/2026</a:t>
             </a:fld>
             <a:endParaRPr lang="en-US"/>
           </a:p>
@@ -571,10 +590,9 @@
           <a:lstStyle/>
           <a:p>
             <a:r>
-              <a:rPr lang="en-US" smtClean="0"/>
+              <a:rPr lang="en-US"/>
               <a:t>Click to edit Master title style</a:t>
             </a:r>
-            <a:endParaRPr lang="en-US"/>
           </a:p>
         </p:txBody>
       </p:sp>
@@ -600,38 +618,37 @@
           <a:p>
             <a:pPr lvl="0"/>
             <a:r>
-              <a:rPr lang="en-US" smtClean="0"/>
+              <a:rPr lang="en-US"/>
               <a:t>Click to edit Master text styles</a:t>
             </a:r>
           </a:p>
           <a:p>
             <a:pPr lvl="1"/>
             <a:r>
-              <a:rPr lang="en-US" smtClean="0"/>
+              <a:rPr lang="en-US"/>
               <a:t>Second level</a:t>
             </a:r>
           </a:p>
           <a:p>
             <a:pPr lvl="2"/>
             <a:r>
-              <a:rPr lang="en-US" smtClean="0"/>
+              <a:rPr lang="en-US"/>
               <a:t>Third level</a:t>
             </a:r>
           </a:p>
           <a:p>
             <a:pPr lvl="3"/>
             <a:r>
-              <a:rPr lang="en-US" smtClean="0"/>
+              <a:rPr lang="en-US"/>
               <a:t>Fourth level</a:t>
             </a:r>
           </a:p>
           <a:p>
             <a:pPr lvl="4"/>
             <a:r>
-              <a:rPr lang="en-US" smtClean="0"/>
+              <a:rPr lang="en-US"/>
               <a:t>Fifth level</a:t>
             </a:r>
-            <a:endParaRPr lang="en-US"/>
           </a:p>
         </p:txBody>
       </p:sp>
@@ -653,7 +670,7 @@
             <a:fld id="{1D8BD707-D9CF-40AE-B4C6-C98DA3205C09}" type="datetimeFigureOut">
               <a:rPr lang="en-US" smtClean="0"/>
               <a:pPr/>
-              <a:t>8/1/2011</a:t>
+              <a:t>5/14/2026</a:t>
             </a:fld>
             <a:endParaRPr lang="en-US"/>
           </a:p>
@@ -743,10 +760,9 @@
           <a:lstStyle/>
           <a:p>
             <a:r>
-              <a:rPr lang="en-US" smtClean="0"/>
+              <a:rPr lang="en-US"/>
               <a:t>Click to edit Master title style</a:t>
             </a:r>
-            <a:endParaRPr lang="en-US"/>
           </a:p>
         </p:txBody>
       </p:sp>
@@ -767,38 +783,37 @@
           <a:p>
             <a:pPr lvl="0"/>
             <a:r>
-              <a:rPr lang="en-US" smtClean="0"/>
+              <a:rPr lang="en-US"/>
               <a:t>Click to edit Master text styles</a:t>
             </a:r>
           </a:p>
           <a:p>
             <a:pPr lvl="1"/>
             <a:r>
-              <a:rPr lang="en-US" smtClean="0"/>
+              <a:rPr lang="en-US"/>
               <a:t>Second level</a:t>
             </a:r>
           </a:p>
           <a:p>
             <a:pPr lvl="2"/>
             <a:r>
-              <a:rPr lang="en-US" smtClean="0"/>
+              <a:rPr lang="en-US"/>
               <a:t>Third level</a:t>
             </a:r>
           </a:p>
           <a:p>
             <a:pPr lvl="3"/>
             <a:r>
-              <a:rPr lang="en-US" smtClean="0"/>
+              <a:rPr lang="en-US"/>
               <a:t>Fourth level</a:t>
             </a:r>
           </a:p>
           <a:p>
             <a:pPr lvl="4"/>
             <a:r>
-              <a:rPr lang="en-US" smtClean="0"/>
+              <a:rPr lang="en-US"/>
               <a:t>Fifth level</a:t>
             </a:r>
-            <a:endParaRPr lang="en-US"/>
           </a:p>
         </p:txBody>
       </p:sp>
@@ -820,7 +835,7 @@
             <a:fld id="{1D8BD707-D9CF-40AE-B4C6-C98DA3205C09}" type="datetimeFigureOut">
               <a:rPr lang="en-US" smtClean="0"/>
               <a:pPr/>
-              <a:t>8/1/2011</a:t>
+              <a:t>5/14/2026</a:t>
             </a:fld>
             <a:endParaRPr lang="en-US"/>
           </a:p>
@@ -919,10 +934,9 @@
           </a:lstStyle>
           <a:p>
             <a:r>
-              <a:rPr lang="en-US" smtClean="0"/>
+              <a:rPr lang="en-US"/>
               <a:t>Click to edit Master title style</a:t>
             </a:r>
-            <a:endParaRPr lang="en-US"/>
           </a:p>
         </p:txBody>
       </p:sp>
@@ -1039,7 +1053,7 @@
           <a:p>
             <a:pPr lvl="0"/>
             <a:r>
-              <a:rPr lang="en-US" smtClean="0"/>
+              <a:rPr lang="en-US"/>
               <a:t>Click to edit Master text styles</a:t>
             </a:r>
           </a:p>
@@ -1063,7 +1077,7 @@
             <a:fld id="{1D8BD707-D9CF-40AE-B4C6-C98DA3205C09}" type="datetimeFigureOut">
               <a:rPr lang="en-US" smtClean="0"/>
               <a:pPr/>
-              <a:t>8/1/2011</a:t>
+              <a:t>5/14/2026</a:t>
             </a:fld>
             <a:endParaRPr lang="en-US"/>
           </a:p>
@@ -1153,10 +1167,9 @@
           <a:lstStyle/>
           <a:p>
             <a:r>
-              <a:rPr lang="en-US" smtClean="0"/>
+              <a:rPr lang="en-US"/>
               <a:t>Click to edit Master title style</a:t>
             </a:r>
-            <a:endParaRPr lang="en-US"/>
           </a:p>
         </p:txBody>
       </p:sp>
@@ -1210,38 +1223,37 @@
           <a:p>
             <a:pPr lvl="0"/>
             <a:r>
-              <a:rPr lang="en-US" smtClean="0"/>
+              <a:rPr lang="en-US"/>
               <a:t>Click to edit Master text styles</a:t>
             </a:r>
           </a:p>
           <a:p>
             <a:pPr lvl="1"/>
             <a:r>
-              <a:rPr lang="en-US" smtClean="0"/>
+              <a:rPr lang="en-US"/>
               <a:t>Second level</a:t>
             </a:r>
           </a:p>
           <a:p>
             <a:pPr lvl="2"/>
             <a:r>
-              <a:rPr lang="en-US" smtClean="0"/>
+              <a:rPr lang="en-US"/>
               <a:t>Third level</a:t>
             </a:r>
           </a:p>
           <a:p>
             <a:pPr lvl="3"/>
             <a:r>
-              <a:rPr lang="en-US" smtClean="0"/>
+              <a:rPr lang="en-US"/>
               <a:t>Fourth level</a:t>
             </a:r>
           </a:p>
           <a:p>
             <a:pPr lvl="4"/>
             <a:r>
-              <a:rPr lang="en-US" smtClean="0"/>
+              <a:rPr lang="en-US"/>
               <a:t>Fifth level</a:t>
             </a:r>
-            <a:endParaRPr lang="en-US"/>
           </a:p>
         </p:txBody>
       </p:sp>
@@ -1295,38 +1307,37 @@
           <a:p>
             <a:pPr lvl="0"/>
             <a:r>
-              <a:rPr lang="en-US" smtClean="0"/>
+              <a:rPr lang="en-US"/>
               <a:t>Click to edit Master text styles</a:t>
             </a:r>
           </a:p>
           <a:p>
             <a:pPr lvl="1"/>
             <a:r>
-              <a:rPr lang="en-US" smtClean="0"/>
+              <a:rPr lang="en-US"/>
               <a:t>Second level</a:t>
             </a:r>
           </a:p>
           <a:p>
             <a:pPr lvl="2"/>
             <a:r>
-              <a:rPr lang="en-US" smtClean="0"/>
+              <a:rPr lang="en-US"/>
               <a:t>Third level</a:t>
             </a:r>
           </a:p>
           <a:p>
             <a:pPr lvl="3"/>
             <a:r>
-              <a:rPr lang="en-US" smtClean="0"/>
+              <a:rPr lang="en-US"/>
               <a:t>Fourth level</a:t>
             </a:r>
           </a:p>
           <a:p>
             <a:pPr lvl="4"/>
             <a:r>
-              <a:rPr lang="en-US" smtClean="0"/>
+              <a:rPr lang="en-US"/>
               <a:t>Fifth level</a:t>
             </a:r>
-            <a:endParaRPr lang="en-US"/>
           </a:p>
         </p:txBody>
       </p:sp>
@@ -1348,7 +1359,7 @@
             <a:fld id="{1D8BD707-D9CF-40AE-B4C6-C98DA3205C09}" type="datetimeFigureOut">
               <a:rPr lang="en-US" smtClean="0"/>
               <a:pPr/>
-              <a:t>8/1/2011</a:t>
+              <a:t>5/14/2026</a:t>
             </a:fld>
             <a:endParaRPr lang="en-US"/>
           </a:p>
@@ -1442,10 +1453,9 @@
           </a:lstStyle>
           <a:p>
             <a:r>
-              <a:rPr lang="en-US" smtClean="0"/>
+              <a:rPr lang="en-US"/>
               <a:t>Click to edit Master title style</a:t>
             </a:r>
-            <a:endParaRPr lang="en-US"/>
           </a:p>
         </p:txBody>
       </p:sp>
@@ -1508,7 +1518,7 @@
           <a:p>
             <a:pPr lvl="0"/>
             <a:r>
-              <a:rPr lang="en-US" smtClean="0"/>
+              <a:rPr lang="en-US"/>
               <a:t>Click to edit Master text styles</a:t>
             </a:r>
           </a:p>
@@ -1564,38 +1574,37 @@
           <a:p>
             <a:pPr lvl="0"/>
             <a:r>
-              <a:rPr lang="en-US" smtClean="0"/>
+              <a:rPr lang="en-US"/>
               <a:t>Click to edit Master text styles</a:t>
             </a:r>
           </a:p>
           <a:p>
             <a:pPr lvl="1"/>
             <a:r>
-              <a:rPr lang="en-US" smtClean="0"/>
+              <a:rPr lang="en-US"/>
               <a:t>Second level</a:t>
             </a:r>
           </a:p>
           <a:p>
             <a:pPr lvl="2"/>
             <a:r>
-              <a:rPr lang="en-US" smtClean="0"/>
+              <a:rPr lang="en-US"/>
               <a:t>Third level</a:t>
             </a:r>
           </a:p>
           <a:p>
             <a:pPr lvl="3"/>
             <a:r>
-              <a:rPr lang="en-US" smtClean="0"/>
+              <a:rPr lang="en-US"/>
               <a:t>Fourth level</a:t>
             </a:r>
           </a:p>
           <a:p>
             <a:pPr lvl="4"/>
             <a:r>
-              <a:rPr lang="en-US" smtClean="0"/>
+              <a:rPr lang="en-US"/>
               <a:t>Fifth level</a:t>
             </a:r>
-            <a:endParaRPr lang="en-US"/>
           </a:p>
         </p:txBody>
       </p:sp>
@@ -1658,7 +1667,7 @@
           <a:p>
             <a:pPr lvl="0"/>
             <a:r>
-              <a:rPr lang="en-US" smtClean="0"/>
+              <a:rPr lang="en-US"/>
               <a:t>Click to edit Master text styles</a:t>
             </a:r>
           </a:p>
@@ -1714,38 +1723,37 @@
           <a:p>
             <a:pPr lvl="0"/>
             <a:r>
-              <a:rPr lang="en-US" smtClean="0"/>
+              <a:rPr lang="en-US"/>
               <a:t>Click to edit Master text styles</a:t>
             </a:r>
           </a:p>
           <a:p>
             <a:pPr lvl="1"/>
             <a:r>
-              <a:rPr lang="en-US" smtClean="0"/>
+              <a:rPr lang="en-US"/>
               <a:t>Second level</a:t>
             </a:r>
           </a:p>
           <a:p>
             <a:pPr lvl="2"/>
             <a:r>
-              <a:rPr lang="en-US" smtClean="0"/>
+              <a:rPr lang="en-US"/>
               <a:t>Third level</a:t>
             </a:r>
           </a:p>
           <a:p>
             <a:pPr lvl="3"/>
             <a:r>
-              <a:rPr lang="en-US" smtClean="0"/>
+              <a:rPr lang="en-US"/>
               <a:t>Fourth level</a:t>
             </a:r>
           </a:p>
           <a:p>
             <a:pPr lvl="4"/>
             <a:r>
-              <a:rPr lang="en-US" smtClean="0"/>
+              <a:rPr lang="en-US"/>
               <a:t>Fifth level</a:t>
             </a:r>
-            <a:endParaRPr lang="en-US"/>
           </a:p>
         </p:txBody>
       </p:sp>
@@ -1767,7 +1775,7 @@
             <a:fld id="{1D8BD707-D9CF-40AE-B4C6-C98DA3205C09}" type="datetimeFigureOut">
               <a:rPr lang="en-US" smtClean="0"/>
               <a:pPr/>
-              <a:t>8/1/2011</a:t>
+              <a:t>5/14/2026</a:t>
             </a:fld>
             <a:endParaRPr lang="en-US"/>
           </a:p>
@@ -1857,10 +1865,9 @@
           <a:lstStyle/>
           <a:p>
             <a:r>
-              <a:rPr lang="en-US" smtClean="0"/>
+              <a:rPr lang="en-US"/>
               <a:t>Click to edit Master title style</a:t>
             </a:r>
-            <a:endParaRPr lang="en-US"/>
           </a:p>
         </p:txBody>
       </p:sp>
@@ -1882,7 +1889,7 @@
             <a:fld id="{1D8BD707-D9CF-40AE-B4C6-C98DA3205C09}" type="datetimeFigureOut">
               <a:rPr lang="en-US" smtClean="0"/>
               <a:pPr/>
-              <a:t>8/1/2011</a:t>
+              <a:t>5/14/2026</a:t>
             </a:fld>
             <a:endParaRPr lang="en-US"/>
           </a:p>
@@ -1974,7 +1981,7 @@
             <a:fld id="{1D8BD707-D9CF-40AE-B4C6-C98DA3205C09}" type="datetimeFigureOut">
               <a:rPr lang="en-US" smtClean="0"/>
               <a:pPr/>
-              <a:t>8/1/2011</a:t>
+              <a:t>5/14/2026</a:t>
             </a:fld>
             <a:endParaRPr lang="en-US"/>
           </a:p>
@@ -2073,10 +2080,9 @@
           </a:lstStyle>
           <a:p>
             <a:r>
-              <a:rPr lang="en-US" smtClean="0"/>
+              <a:rPr lang="en-US"/>
               <a:t>Click to edit Master title style</a:t>
             </a:r>
-            <a:endParaRPr lang="en-US"/>
           </a:p>
         </p:txBody>
       </p:sp>
@@ -2130,38 +2136,37 @@
           <a:p>
             <a:pPr lvl="0"/>
             <a:r>
-              <a:rPr lang="en-US" smtClean="0"/>
+              <a:rPr lang="en-US"/>
               <a:t>Click to edit Master text styles</a:t>
             </a:r>
           </a:p>
           <a:p>
             <a:pPr lvl="1"/>
             <a:r>
-              <a:rPr lang="en-US" smtClean="0"/>
+              <a:rPr lang="en-US"/>
               <a:t>Second level</a:t>
             </a:r>
           </a:p>
           <a:p>
             <a:pPr lvl="2"/>
             <a:r>
-              <a:rPr lang="en-US" smtClean="0"/>
+              <a:rPr lang="en-US"/>
               <a:t>Third level</a:t>
             </a:r>
           </a:p>
           <a:p>
             <a:pPr lvl="3"/>
             <a:r>
-              <a:rPr lang="en-US" smtClean="0"/>
+              <a:rPr lang="en-US"/>
               <a:t>Fourth level</a:t>
             </a:r>
           </a:p>
           <a:p>
             <a:pPr lvl="4"/>
             <a:r>
-              <a:rPr lang="en-US" smtClean="0"/>
+              <a:rPr lang="en-US"/>
               <a:t>Fifth level</a:t>
             </a:r>
-            <a:endParaRPr lang="en-US"/>
           </a:p>
         </p:txBody>
       </p:sp>
@@ -2224,7 +2229,7 @@
           <a:p>
             <a:pPr lvl="0"/>
             <a:r>
-              <a:rPr lang="en-US" smtClean="0"/>
+              <a:rPr lang="en-US"/>
               <a:t>Click to edit Master text styles</a:t>
             </a:r>
           </a:p>
@@ -2248,7 +2253,7 @@
             <a:fld id="{1D8BD707-D9CF-40AE-B4C6-C98DA3205C09}" type="datetimeFigureOut">
               <a:rPr lang="en-US" smtClean="0"/>
               <a:pPr/>
-              <a:t>8/1/2011</a:t>
+              <a:t>5/14/2026</a:t>
             </a:fld>
             <a:endParaRPr lang="en-US"/>
           </a:p>
@@ -2347,10 +2352,9 @@
           </a:lstStyle>
           <a:p>
             <a:r>
-              <a:rPr lang="en-US" smtClean="0"/>
+              <a:rPr lang="en-US"/>
               <a:t>Click to edit Master title style</a:t>
             </a:r>
-            <a:endParaRPr lang="en-US"/>
           </a:p>
         </p:txBody>
       </p:sp>
@@ -2474,7 +2478,7 @@
           <a:p>
             <a:pPr lvl="0"/>
             <a:r>
-              <a:rPr lang="en-US" smtClean="0"/>
+              <a:rPr lang="en-US"/>
               <a:t>Click to edit Master text styles</a:t>
             </a:r>
           </a:p>
@@ -2498,7 +2502,7 @@
             <a:fld id="{1D8BD707-D9CF-40AE-B4C6-C98DA3205C09}" type="datetimeFigureOut">
               <a:rPr lang="en-US" smtClean="0"/>
               <a:pPr/>
-              <a:t>8/1/2011</a:t>
+              <a:t>5/14/2026</a:t>
             </a:fld>
             <a:endParaRPr lang="en-US"/>
           </a:p>
@@ -2603,10 +2607,9 @@
           <a:lstStyle/>
           <a:p>
             <a:r>
-              <a:rPr lang="en-US" smtClean="0"/>
+              <a:rPr lang="en-US"/>
               <a:t>Click to edit Master title style</a:t>
             </a:r>
-            <a:endParaRPr lang="en-US"/>
           </a:p>
         </p:txBody>
       </p:sp>
@@ -2637,38 +2640,37 @@
           <a:p>
             <a:pPr lvl="0"/>
             <a:r>
-              <a:rPr lang="en-US" smtClean="0"/>
+              <a:rPr lang="en-US"/>
               <a:t>Click to edit Master text styles</a:t>
             </a:r>
           </a:p>
           <a:p>
             <a:pPr lvl="1"/>
             <a:r>
-              <a:rPr lang="en-US" smtClean="0"/>
+              <a:rPr lang="en-US"/>
               <a:t>Second level</a:t>
             </a:r>
           </a:p>
           <a:p>
             <a:pPr lvl="2"/>
             <a:r>
-              <a:rPr lang="en-US" smtClean="0"/>
+              <a:rPr lang="en-US"/>
               <a:t>Third level</a:t>
             </a:r>
           </a:p>
           <a:p>
             <a:pPr lvl="3"/>
             <a:r>
-              <a:rPr lang="en-US" smtClean="0"/>
+              <a:rPr lang="en-US"/>
               <a:t>Fourth level</a:t>
             </a:r>
           </a:p>
           <a:p>
             <a:pPr lvl="4"/>
             <a:r>
-              <a:rPr lang="en-US" smtClean="0"/>
+              <a:rPr lang="en-US"/>
               <a:t>Fifth level</a:t>
             </a:r>
-            <a:endParaRPr lang="en-US"/>
           </a:p>
         </p:txBody>
       </p:sp>
@@ -2708,7 +2710,7 @@
             <a:fld id="{1D8BD707-D9CF-40AE-B4C6-C98DA3205C09}" type="datetimeFigureOut">
               <a:rPr lang="en-US" smtClean="0"/>
               <a:pPr/>
-              <a:t>8/1/2011</a:t>
+              <a:t>5/14/2026</a:t>
             </a:fld>
             <a:endParaRPr lang="en-US"/>
           </a:p>
@@ -3063,13 +3065,14 @@
 </file>
 
 <file path=ppt/slides/slide1.xml><?xml version="1.0" encoding="utf-8"?>
-<p:sld xmlns:p="http://schemas.openxmlformats.org/presentationml/2006/main" xmlns:a="http://schemas.openxmlformats.org/drawingml/2006/main" xmlns:r="http://schemas.openxmlformats.org/officeDocument/2006/relationships">
+<p:sld xmlns:a="http://schemas.openxmlformats.org/drawingml/2006/main" xmlns:r="http://schemas.openxmlformats.org/officeDocument/2006/relationships" xmlns:p="http://schemas.openxmlformats.org/presentationml/2006/main">
   <p:cSld>
     <p:bg>
       <p:bgPr>
         <a:solidFill>
           <a:srgbClr val="26272B"/>
         </a:solidFill>
+        <a:effectLst/>
       </p:bgPr>
     </p:bg>
     <p:spTree>
@@ -3088,12 +3091,12 @@
       </p:grpSpPr>
       <p:sp>
         <p:nvSpPr>
-          <p:cNvPr name="Freeform 2" id="2"/>
+          <p:cNvPr id="2" name="Freeform 2"/>
           <p:cNvSpPr/>
           <p:nvPr/>
         </p:nvSpPr>
         <p:spPr>
-          <a:xfrm flipH="false" flipV="false" rot="-5400000">
+          <a:xfrm rot="-5400000">
             <a:off x="-3649725" y="7788149"/>
             <a:ext cx="7315200" cy="2025901"/>
           </a:xfrm>
@@ -3102,9 +3105,9 @@
             <a:gdLst/>
             <a:ahLst/>
             <a:cxnLst/>
-            <a:rect r="r" b="b" t="t" l="l"/>
+            <a:rect l="l" t="t" r="r" b="b"/>
             <a:pathLst>
-              <a:path h="2025901" w="7315200">
+              <a:path w="7315200" h="2025901">
                 <a:moveTo>
                   <a:pt x="0" y="0"/>
                 </a:moveTo>
@@ -3133,19 +3136,19 @@
               </a:extLst>
             </a:blip>
             <a:stretch>
-              <a:fillRect l="0" t="0" r="0" b="0"/>
+              <a:fillRect/>
             </a:stretch>
           </a:blipFill>
         </p:spPr>
       </p:sp>
       <p:sp>
         <p:nvSpPr>
-          <p:cNvPr name="Freeform 3" id="3"/>
+          <p:cNvPr id="3" name="Freeform 3"/>
           <p:cNvSpPr/>
           <p:nvPr/>
         </p:nvSpPr>
         <p:spPr>
-          <a:xfrm flipH="false" flipV="false" rot="-5400000">
+          <a:xfrm rot="-5400000">
             <a:off x="14622525" y="472949"/>
             <a:ext cx="7315200" cy="2025901"/>
           </a:xfrm>
@@ -3154,9 +3157,9 @@
             <a:gdLst/>
             <a:ahLst/>
             <a:cxnLst/>
-            <a:rect r="r" b="b" t="t" l="l"/>
+            <a:rect l="l" t="t" r="r" b="b"/>
             <a:pathLst>
-              <a:path h="2025901" w="7315200">
+              <a:path w="7315200" h="2025901">
                 <a:moveTo>
                   <a:pt x="0" y="0"/>
                 </a:moveTo>
@@ -3185,19 +3188,19 @@
               </a:extLst>
             </a:blip>
             <a:stretch>
-              <a:fillRect l="0" t="0" r="0" b="0"/>
+              <a:fillRect/>
             </a:stretch>
           </a:blipFill>
         </p:spPr>
       </p:sp>
       <p:sp>
         <p:nvSpPr>
-          <p:cNvPr name="Freeform 4" id="4"/>
+          <p:cNvPr id="4" name="Freeform 4"/>
           <p:cNvSpPr/>
           <p:nvPr/>
         </p:nvSpPr>
         <p:spPr>
-          <a:xfrm flipH="true" flipV="false" rot="0">
+          <a:xfrm flipH="1">
             <a:off x="-1590281" y="9258300"/>
             <a:ext cx="7315200" cy="3195406"/>
           </a:xfrm>
@@ -3206,9 +3209,9 @@
             <a:gdLst/>
             <a:ahLst/>
             <a:cxnLst/>
-            <a:rect r="r" b="b" t="t" l="l"/>
+            <a:rect l="l" t="t" r="r" b="b"/>
             <a:pathLst>
-              <a:path h="3195406" w="7315200">
+              <a:path w="7315200" h="3195406">
                 <a:moveTo>
                   <a:pt x="7315200" y="0"/>
                 </a:moveTo>
@@ -3237,19 +3240,19 @@
               </a:extLst>
             </a:blip>
             <a:stretch>
-              <a:fillRect l="0" t="0" r="0" b="0"/>
+              <a:fillRect/>
             </a:stretch>
           </a:blipFill>
         </p:spPr>
       </p:sp>
       <p:sp>
         <p:nvSpPr>
-          <p:cNvPr name="Freeform 5" id="5"/>
+          <p:cNvPr id="5" name="Freeform 5"/>
           <p:cNvSpPr/>
           <p:nvPr/>
         </p:nvSpPr>
         <p:spPr>
-          <a:xfrm flipH="false" flipV="true" rot="0">
+          <a:xfrm flipV="1">
             <a:off x="12563081" y="-2166706"/>
             <a:ext cx="7315200" cy="3195406"/>
           </a:xfrm>
@@ -3258,9 +3261,9 @@
             <a:gdLst/>
             <a:ahLst/>
             <a:cxnLst/>
-            <a:rect r="r" b="b" t="t" l="l"/>
+            <a:rect l="l" t="t" r="r" b="b"/>
             <a:pathLst>
-              <a:path h="3195406" w="7315200">
+              <a:path w="7315200" h="3195406">
                 <a:moveTo>
                   <a:pt x="0" y="3195406"/>
                 </a:moveTo>
@@ -3289,19 +3292,19 @@
               </a:extLst>
             </a:blip>
             <a:stretch>
-              <a:fillRect l="0" t="0" r="0" b="0"/>
+              <a:fillRect/>
             </a:stretch>
           </a:blipFill>
         </p:spPr>
       </p:sp>
       <p:sp>
         <p:nvSpPr>
-          <p:cNvPr name="Freeform 6" id="6"/>
+          <p:cNvPr id="6" name="Freeform 6"/>
           <p:cNvSpPr/>
           <p:nvPr/>
         </p:nvSpPr>
         <p:spPr>
-          <a:xfrm flipH="false" flipV="true" rot="0">
+          <a:xfrm flipV="1">
             <a:off x="-1590281" y="-2166706"/>
             <a:ext cx="7315200" cy="3195406"/>
           </a:xfrm>
@@ -3310,9 +3313,9 @@
             <a:gdLst/>
             <a:ahLst/>
             <a:cxnLst/>
-            <a:rect r="r" b="b" t="t" l="l"/>
+            <a:rect l="l" t="t" r="r" b="b"/>
             <a:pathLst>
-              <a:path h="3195406" w="7315200">
+              <a:path w="7315200" h="3195406">
                 <a:moveTo>
                   <a:pt x="0" y="3195406"/>
                 </a:moveTo>
@@ -3341,19 +3344,19 @@
               </a:extLst>
             </a:blip>
             <a:stretch>
-              <a:fillRect l="0" t="0" r="0" b="0"/>
+              <a:fillRect/>
             </a:stretch>
           </a:blipFill>
         </p:spPr>
       </p:sp>
       <p:sp>
         <p:nvSpPr>
-          <p:cNvPr name="Freeform 7" id="7"/>
+          <p:cNvPr id="7" name="Freeform 7"/>
           <p:cNvSpPr/>
           <p:nvPr/>
         </p:nvSpPr>
         <p:spPr>
-          <a:xfrm flipH="true" flipV="false" rot="0">
+          <a:xfrm flipH="1">
             <a:off x="12563081" y="9263294"/>
             <a:ext cx="7315200" cy="3195406"/>
           </a:xfrm>
@@ -3362,9 +3365,9 @@
             <a:gdLst/>
             <a:ahLst/>
             <a:cxnLst/>
-            <a:rect r="r" b="b" t="t" l="l"/>
+            <a:rect l="l" t="t" r="r" b="b"/>
             <a:pathLst>
-              <a:path h="3195406" w="7315200">
+              <a:path w="7315200" h="3195406">
                 <a:moveTo>
                   <a:pt x="7315200" y="0"/>
                 </a:moveTo>
@@ -3393,19 +3396,19 @@
               </a:extLst>
             </a:blip>
             <a:stretch>
-              <a:fillRect l="0" t="0" r="0" b="0"/>
+              <a:fillRect/>
             </a:stretch>
           </a:blipFill>
         </p:spPr>
       </p:sp>
       <p:sp>
         <p:nvSpPr>
-          <p:cNvPr name="TextBox 8" id="8"/>
-          <p:cNvSpPr txBox="true"/>
-          <p:nvPr/>
-        </p:nvSpPr>
-        <p:spPr>
-          <a:xfrm rot="0">
+          <p:cNvPr id="8" name="TextBox 8"/>
+          <p:cNvSpPr txBox="1"/>
+          <p:nvPr/>
+        </p:nvSpPr>
+        <p:spPr>
+          <a:xfrm>
             <a:off x="2596732" y="3624625"/>
             <a:ext cx="13094536" cy="1384933"/>
           </a:xfrm>
@@ -3414,18 +3417,18 @@
           </a:prstGeom>
         </p:spPr>
         <p:txBody>
-          <a:bodyPr anchor="t" rtlCol="false" tIns="0" lIns="0" bIns="0" rIns="0">
+          <a:bodyPr lIns="0" tIns="0" rIns="0" bIns="0" rtlCol="0" anchor="t">
             <a:spAutoFit/>
           </a:bodyPr>
           <a:lstStyle/>
           <a:p>
-            <a:pPr algn="ctr" marL="0" indent="0" lvl="0">
+            <a:pPr marL="0" lvl="0" indent="0" algn="ctr">
               <a:lnSpc>
                 <a:spcPts val="11340"/>
               </a:lnSpc>
             </a:pPr>
             <a:r>
-              <a:rPr lang="en-US" b="true" sz="8100">
+              <a:rPr lang="en-US" sz="8100" b="1" dirty="0" err="1">
                 <a:solidFill>
                   <a:srgbClr val="FFFFFF"/>
                 </a:solidFill>
@@ -3434,19 +3437,31 @@
                 <a:cs typeface="Clear Sans Bold"/>
                 <a:sym typeface="Clear Sans Bold"/>
               </a:rPr>
-              <a:t>CHIZEL – THE GIT WE NEED</a:t>
-            </a:r>
-          </a:p>
-        </p:txBody>
-      </p:sp>
-      <p:sp>
-        <p:nvSpPr>
-          <p:cNvPr name="TextBox 9" id="9"/>
-          <p:cNvSpPr txBox="true"/>
-          <p:nvPr/>
-        </p:nvSpPr>
-        <p:spPr>
-          <a:xfrm rot="0">
+              <a:t>Chizel</a:t>
+            </a:r>
+            <a:r>
+              <a:rPr lang="en-US" sz="8100" b="1" dirty="0">
+                <a:solidFill>
+                  <a:srgbClr val="FFFFFF"/>
+                </a:solidFill>
+                <a:latin typeface="Clear Sans Bold"/>
+                <a:ea typeface="Clear Sans Bold"/>
+                <a:cs typeface="Clear Sans Bold"/>
+                <a:sym typeface="Clear Sans Bold"/>
+              </a:rPr>
+              <a:t> – Source Control</a:t>
+            </a:r>
+          </a:p>
+        </p:txBody>
+      </p:sp>
+      <p:sp>
+        <p:nvSpPr>
+          <p:cNvPr id="9" name="TextBox 9"/>
+          <p:cNvSpPr txBox="1"/>
+          <p:nvPr/>
+        </p:nvSpPr>
+        <p:spPr>
+          <a:xfrm>
             <a:off x="4409760" y="5394066"/>
             <a:ext cx="9468479" cy="688193"/>
           </a:xfrm>
@@ -3455,18 +3470,18 @@
           </a:prstGeom>
         </p:spPr>
         <p:txBody>
-          <a:bodyPr anchor="t" rtlCol="false" tIns="0" lIns="0" bIns="0" rIns="0">
+          <a:bodyPr lIns="0" tIns="0" rIns="0" bIns="0" rtlCol="0" anchor="t">
             <a:spAutoFit/>
           </a:bodyPr>
           <a:lstStyle/>
           <a:p>
-            <a:pPr algn="ctr" marL="0" indent="0" lvl="0">
+            <a:pPr marL="0" lvl="0" indent="0" algn="ctr">
               <a:lnSpc>
                 <a:spcPts val="5643"/>
               </a:lnSpc>
             </a:pPr>
             <a:r>
-              <a:rPr lang="en-US" b="true" sz="4030">
+              <a:rPr lang="en-US" sz="4030" b="1">
                 <a:solidFill>
                   <a:srgbClr val="FFFFFF"/>
                 </a:solidFill>
@@ -3482,12 +3497,12 @@
       </p:sp>
       <p:sp>
         <p:nvSpPr>
-          <p:cNvPr name="TextBox 10" id="10"/>
-          <p:cNvSpPr txBox="true"/>
-          <p:nvPr/>
-        </p:nvSpPr>
-        <p:spPr>
-          <a:xfrm rot="0">
+          <p:cNvPr id="10" name="TextBox 10"/>
+          <p:cNvSpPr txBox="1"/>
+          <p:nvPr/>
+        </p:nvSpPr>
+        <p:spPr>
+          <a:xfrm>
             <a:off x="7251939" y="6341069"/>
             <a:ext cx="3784122" cy="1929757"/>
           </a:xfrm>
@@ -3496,7 +3511,7 @@
           </a:prstGeom>
         </p:spPr>
         <p:txBody>
-          <a:bodyPr anchor="t" rtlCol="false" tIns="0" lIns="0" bIns="0" rIns="0">
+          <a:bodyPr lIns="0" tIns="0" rIns="0" bIns="0" rtlCol="0" anchor="t">
             <a:spAutoFit/>
           </a:bodyPr>
           <a:lstStyle/>
@@ -3507,7 +3522,7 @@
               </a:lnSpc>
             </a:pPr>
             <a:r>
-              <a:rPr lang="en-US" b="true" sz="2775">
+              <a:rPr lang="en-US" sz="2775" b="1">
                 <a:solidFill>
                   <a:srgbClr val="FFFFFF"/>
                 </a:solidFill>
@@ -3526,7 +3541,7 @@
               </a:lnSpc>
             </a:pPr>
             <a:r>
-              <a:rPr lang="en-US" b="true" sz="2775">
+              <a:rPr lang="en-US" sz="2775" b="1">
                 <a:solidFill>
                   <a:srgbClr val="FFFFFF"/>
                 </a:solidFill>
@@ -3545,7 +3560,7 @@
               </a:lnSpc>
             </a:pPr>
             <a:r>
-              <a:rPr lang="en-US" b="true" sz="2775">
+              <a:rPr lang="en-US" sz="2775" b="1">
                 <a:solidFill>
                   <a:srgbClr val="FFFFFF"/>
                 </a:solidFill>
@@ -3558,13 +3573,13 @@
             </a:r>
           </a:p>
           <a:p>
-            <a:pPr algn="ctr" marL="0" indent="0" lvl="0">
+            <a:pPr marL="0" lvl="0" indent="0" algn="ctr">
               <a:lnSpc>
                 <a:spcPts val="3885"/>
               </a:lnSpc>
             </a:pPr>
             <a:r>
-              <a:rPr lang="en-US" b="true" sz="2775">
+              <a:rPr lang="en-US" sz="2775" b="1">
                 <a:solidFill>
                   <a:srgbClr val="FFFFFF"/>
                 </a:solidFill>
@@ -3587,13 +3602,14 @@
 </file>
 
 <file path=ppt/slides/slide10.xml><?xml version="1.0" encoding="utf-8"?>
-<p:sld xmlns:p="http://schemas.openxmlformats.org/presentationml/2006/main" xmlns:a="http://schemas.openxmlformats.org/drawingml/2006/main" xmlns:r="http://schemas.openxmlformats.org/officeDocument/2006/relationships">
+<p:sld xmlns:a="http://schemas.openxmlformats.org/drawingml/2006/main" xmlns:r="http://schemas.openxmlformats.org/officeDocument/2006/relationships" xmlns:p="http://schemas.openxmlformats.org/presentationml/2006/main">
   <p:cSld>
     <p:bg>
       <p:bgPr>
         <a:solidFill>
           <a:srgbClr val="26272B"/>
         </a:solidFill>
+        <a:effectLst/>
       </p:bgPr>
     </p:bg>
     <p:spTree>
@@ -3612,12 +3628,12 @@
       </p:grpSpPr>
       <p:sp>
         <p:nvSpPr>
-          <p:cNvPr name="Freeform 2" id="2"/>
+          <p:cNvPr id="2" name="Freeform 2"/>
           <p:cNvSpPr/>
           <p:nvPr/>
         </p:nvSpPr>
         <p:spPr>
-          <a:xfrm flipH="false" flipV="false" rot="-5400000">
+          <a:xfrm rot="-5400000">
             <a:off x="-3649725" y="8834213"/>
             <a:ext cx="7315200" cy="2025901"/>
           </a:xfrm>
@@ -3626,9 +3642,9 @@
             <a:gdLst/>
             <a:ahLst/>
             <a:cxnLst/>
-            <a:rect r="r" b="b" t="t" l="l"/>
+            <a:rect l="l" t="t" r="r" b="b"/>
             <a:pathLst>
-              <a:path h="2025901" w="7315200">
+              <a:path w="7315200" h="2025901">
                 <a:moveTo>
                   <a:pt x="0" y="0"/>
                 </a:moveTo>
@@ -3657,19 +3673,19 @@
               </a:extLst>
             </a:blip>
             <a:stretch>
-              <a:fillRect l="0" t="0" r="0" b="0"/>
+              <a:fillRect/>
             </a:stretch>
           </a:blipFill>
         </p:spPr>
       </p:sp>
       <p:sp>
         <p:nvSpPr>
-          <p:cNvPr name="Freeform 3" id="3"/>
+          <p:cNvPr id="3" name="Freeform 3"/>
           <p:cNvSpPr/>
           <p:nvPr/>
         </p:nvSpPr>
         <p:spPr>
-          <a:xfrm flipH="false" flipV="false" rot="-5400000">
+          <a:xfrm rot="-5400000">
             <a:off x="-3657600" y="-573114"/>
             <a:ext cx="7315200" cy="2025901"/>
           </a:xfrm>
@@ -3678,9 +3694,9 @@
             <a:gdLst/>
             <a:ahLst/>
             <a:cxnLst/>
-            <a:rect r="r" b="b" t="t" l="l"/>
+            <a:rect l="l" t="t" r="r" b="b"/>
             <a:pathLst>
-              <a:path h="2025901" w="7315200">
+              <a:path w="7315200" h="2025901">
                 <a:moveTo>
                   <a:pt x="0" y="0"/>
                 </a:moveTo>
@@ -3709,19 +3725,19 @@
               </a:extLst>
             </a:blip>
             <a:stretch>
-              <a:fillRect l="0" t="0" r="0" b="0"/>
+              <a:fillRect/>
             </a:stretch>
           </a:blipFill>
         </p:spPr>
       </p:sp>
       <p:sp>
         <p:nvSpPr>
-          <p:cNvPr name="Freeform 4" id="4"/>
+          <p:cNvPr id="4" name="Freeform 4"/>
           <p:cNvSpPr/>
           <p:nvPr/>
         </p:nvSpPr>
         <p:spPr>
-          <a:xfrm flipH="true" flipV="false" rot="0">
+          <a:xfrm flipH="1">
             <a:off x="-1590281" y="9258300"/>
             <a:ext cx="7315200" cy="3195406"/>
           </a:xfrm>
@@ -3730,9 +3746,9 @@
             <a:gdLst/>
             <a:ahLst/>
             <a:cxnLst/>
-            <a:rect r="r" b="b" t="t" l="l"/>
+            <a:rect l="l" t="t" r="r" b="b"/>
             <a:pathLst>
-              <a:path h="3195406" w="7315200">
+              <a:path w="7315200" h="3195406">
                 <a:moveTo>
                   <a:pt x="7315200" y="0"/>
                 </a:moveTo>
@@ -3761,19 +3777,19 @@
               </a:extLst>
             </a:blip>
             <a:stretch>
-              <a:fillRect l="0" t="0" r="0" b="0"/>
+              <a:fillRect/>
             </a:stretch>
           </a:blipFill>
         </p:spPr>
       </p:sp>
       <p:sp>
         <p:nvSpPr>
-          <p:cNvPr name="Freeform 5" id="5"/>
+          <p:cNvPr id="5" name="Freeform 5"/>
           <p:cNvSpPr/>
           <p:nvPr/>
         </p:nvSpPr>
         <p:spPr>
-          <a:xfrm flipH="false" flipV="false" rot="-5400000">
+          <a:xfrm rot="-5400000">
             <a:off x="14634337" y="8834213"/>
             <a:ext cx="7315200" cy="2025901"/>
           </a:xfrm>
@@ -3782,9 +3798,9 @@
             <a:gdLst/>
             <a:ahLst/>
             <a:cxnLst/>
-            <a:rect r="r" b="b" t="t" l="l"/>
+            <a:rect l="l" t="t" r="r" b="b"/>
             <a:pathLst>
-              <a:path h="2025901" w="7315200">
+              <a:path w="7315200" h="2025901">
                 <a:moveTo>
                   <a:pt x="0" y="0"/>
                 </a:moveTo>
@@ -3813,19 +3829,19 @@
               </a:extLst>
             </a:blip>
             <a:stretch>
-              <a:fillRect l="0" t="0" r="0" b="0"/>
+              <a:fillRect/>
             </a:stretch>
           </a:blipFill>
         </p:spPr>
       </p:sp>
       <p:sp>
         <p:nvSpPr>
-          <p:cNvPr name="Freeform 6" id="6"/>
+          <p:cNvPr id="6" name="Freeform 6"/>
           <p:cNvSpPr/>
           <p:nvPr/>
         </p:nvSpPr>
         <p:spPr>
-          <a:xfrm flipH="false" flipV="false" rot="-5400000">
+          <a:xfrm rot="-5400000">
             <a:off x="14626463" y="-573114"/>
             <a:ext cx="7315200" cy="2025901"/>
           </a:xfrm>
@@ -3834,9 +3850,9 @@
             <a:gdLst/>
             <a:ahLst/>
             <a:cxnLst/>
-            <a:rect r="r" b="b" t="t" l="l"/>
+            <a:rect l="l" t="t" r="r" b="b"/>
             <a:pathLst>
-              <a:path h="2025901" w="7315200">
+              <a:path w="7315200" h="2025901">
                 <a:moveTo>
                   <a:pt x="0" y="0"/>
                 </a:moveTo>
@@ -3865,19 +3881,19 @@
               </a:extLst>
             </a:blip>
             <a:stretch>
-              <a:fillRect l="0" t="0" r="0" b="0"/>
+              <a:fillRect/>
             </a:stretch>
           </a:blipFill>
         </p:spPr>
       </p:sp>
       <p:sp>
         <p:nvSpPr>
-          <p:cNvPr name="Freeform 7" id="7"/>
+          <p:cNvPr id="7" name="Freeform 7"/>
           <p:cNvSpPr/>
           <p:nvPr/>
         </p:nvSpPr>
         <p:spPr>
-          <a:xfrm flipH="false" flipV="true" rot="0">
+          <a:xfrm flipV="1">
             <a:off x="12563081" y="-2166706"/>
             <a:ext cx="7315200" cy="3195406"/>
           </a:xfrm>
@@ -3886,9 +3902,9 @@
             <a:gdLst/>
             <a:ahLst/>
             <a:cxnLst/>
-            <a:rect r="r" b="b" t="t" l="l"/>
+            <a:rect l="l" t="t" r="r" b="b"/>
             <a:pathLst>
-              <a:path h="3195406" w="7315200">
+              <a:path w="7315200" h="3195406">
                 <a:moveTo>
                   <a:pt x="0" y="3195406"/>
                 </a:moveTo>
@@ -3917,19 +3933,19 @@
               </a:extLst>
             </a:blip>
             <a:stretch>
-              <a:fillRect l="0" t="0" r="0" b="0"/>
+              <a:fillRect/>
             </a:stretch>
           </a:blipFill>
         </p:spPr>
       </p:sp>
       <p:sp>
         <p:nvSpPr>
-          <p:cNvPr name="TextBox 8" id="8"/>
-          <p:cNvSpPr txBox="true"/>
-          <p:nvPr/>
-        </p:nvSpPr>
-        <p:spPr>
-          <a:xfrm rot="0">
+          <p:cNvPr id="8" name="TextBox 8"/>
+          <p:cNvSpPr txBox="1"/>
+          <p:nvPr/>
+        </p:nvSpPr>
+        <p:spPr>
+          <a:xfrm>
             <a:off x="15481814" y="8756615"/>
             <a:ext cx="1477734" cy="506138"/>
           </a:xfrm>
@@ -3938,18 +3954,18 @@
           </a:prstGeom>
         </p:spPr>
         <p:txBody>
-          <a:bodyPr anchor="t" rtlCol="false" tIns="0" lIns="0" bIns="0" rIns="0">
+          <a:bodyPr lIns="0" tIns="0" rIns="0" bIns="0" rtlCol="0" anchor="t">
             <a:spAutoFit/>
           </a:bodyPr>
           <a:lstStyle/>
           <a:p>
-            <a:pPr algn="ctr" marL="0" indent="0" lvl="0">
+            <a:pPr marL="0" lvl="0" indent="0" algn="ctr">
               <a:lnSpc>
                 <a:spcPts val="4127"/>
               </a:lnSpc>
             </a:pPr>
             <a:r>
-              <a:rPr lang="en-US" b="true" sz="2948">
+              <a:rPr lang="en-US" sz="2948" b="1">
                 <a:solidFill>
                   <a:srgbClr val="26272B"/>
                 </a:solidFill>
@@ -3965,12 +3981,12 @@
       </p:sp>
       <p:sp>
         <p:nvSpPr>
-          <p:cNvPr name="TextBox 9" id="9"/>
-          <p:cNvSpPr txBox="true"/>
-          <p:nvPr/>
-        </p:nvSpPr>
-        <p:spPr>
-          <a:xfrm rot="0">
+          <p:cNvPr id="9" name="TextBox 9"/>
+          <p:cNvSpPr txBox="1"/>
+          <p:nvPr/>
+        </p:nvSpPr>
+        <p:spPr>
+          <a:xfrm>
             <a:off x="1502914" y="1604634"/>
             <a:ext cx="11132328" cy="845635"/>
           </a:xfrm>
@@ -3979,18 +3995,18 @@
           </a:prstGeom>
         </p:spPr>
         <p:txBody>
-          <a:bodyPr anchor="t" rtlCol="false" tIns="0" lIns="0" bIns="0" rIns="0">
+          <a:bodyPr lIns="0" tIns="0" rIns="0" bIns="0" rtlCol="0" anchor="t">
             <a:spAutoFit/>
           </a:bodyPr>
           <a:lstStyle/>
           <a:p>
-            <a:pPr algn="l" marL="0" indent="0" lvl="0">
+            <a:pPr marL="0" lvl="0" indent="0" algn="l">
               <a:lnSpc>
                 <a:spcPts val="6940"/>
               </a:lnSpc>
             </a:pPr>
             <a:r>
-              <a:rPr lang="en-US" b="true" sz="4957">
+              <a:rPr lang="en-US" sz="4957" b="1">
                 <a:solidFill>
                   <a:srgbClr val="FFFFFF"/>
                 </a:solidFill>
@@ -4006,26 +4022,26 @@
       </p:sp>
       <p:sp>
         <p:nvSpPr>
-          <p:cNvPr name="TextBox 10" id="10"/>
-          <p:cNvSpPr txBox="true"/>
-          <p:nvPr/>
-        </p:nvSpPr>
-        <p:spPr>
-          <a:xfrm rot="0">
+          <p:cNvPr id="10" name="TextBox 10"/>
+          <p:cNvSpPr txBox="1"/>
+          <p:nvPr/>
+        </p:nvSpPr>
+        <p:spPr>
+          <a:xfrm>
             <a:off x="1502914" y="2624988"/>
-            <a:ext cx="13455389" cy="1809796"/>
+            <a:ext cx="13455389" cy="1856727"/>
           </a:xfrm>
           <a:prstGeom prst="rect">
             <a:avLst/>
           </a:prstGeom>
         </p:spPr>
         <p:txBody>
-          <a:bodyPr anchor="t" rtlCol="false" tIns="0" lIns="0" bIns="0" rIns="0">
+          <a:bodyPr lIns="0" tIns="0" rIns="0" bIns="0" rtlCol="0" anchor="t">
             <a:spAutoFit/>
           </a:bodyPr>
           <a:lstStyle/>
           <a:p>
-            <a:pPr algn="l" marL="566349" indent="-283174" lvl="1">
+            <a:pPr marL="566349" lvl="1" indent="-283174" algn="l">
               <a:lnSpc>
                 <a:spcPts val="3672"/>
               </a:lnSpc>
@@ -4033,7 +4049,7 @@
               <a:buChar char="•"/>
             </a:pPr>
             <a:r>
-              <a:rPr lang="en-US" b="true" sz="2623">
+              <a:rPr lang="en-US" sz="2623" b="1" dirty="0">
                 <a:solidFill>
                   <a:srgbClr val="FFFFFF"/>
                 </a:solidFill>
@@ -4046,7 +4062,7 @@
             </a:r>
           </a:p>
           <a:p>
-            <a:pPr algn="l" marL="566349" indent="-283174" lvl="1">
+            <a:pPr marL="566349" lvl="1" indent="-283174" algn="l">
               <a:lnSpc>
                 <a:spcPts val="3672"/>
               </a:lnSpc>
@@ -4054,7 +4070,7 @@
               <a:buChar char="•"/>
             </a:pPr>
             <a:r>
-              <a:rPr lang="en-US" b="true" sz="2623">
+              <a:rPr lang="en-US" sz="2623" b="1" dirty="0">
                 <a:solidFill>
                   <a:srgbClr val="FFFFFF"/>
                 </a:solidFill>
@@ -4067,7 +4083,7 @@
             </a:r>
           </a:p>
           <a:p>
-            <a:pPr algn="l" marL="566349" indent="-283174" lvl="1">
+            <a:pPr marL="566349" lvl="1" indent="-283174" algn="l">
               <a:lnSpc>
                 <a:spcPts val="3672"/>
               </a:lnSpc>
@@ -4075,7 +4091,7 @@
               <a:buChar char="•"/>
             </a:pPr>
             <a:r>
-              <a:rPr lang="en-US" b="true" sz="2623">
+              <a:rPr lang="en-US" sz="2623" b="1" dirty="0">
                 <a:solidFill>
                   <a:srgbClr val="FFFFFF"/>
                 </a:solidFill>
@@ -4088,7 +4104,7 @@
             </a:r>
           </a:p>
           <a:p>
-            <a:pPr algn="l" marL="566349" indent="-283174" lvl="1">
+            <a:pPr marL="566349" lvl="1" indent="-283174" algn="l">
               <a:lnSpc>
                 <a:spcPts val="3672"/>
               </a:lnSpc>
@@ -4096,7 +4112,7 @@
               <a:buChar char="•"/>
             </a:pPr>
             <a:r>
-              <a:rPr lang="en-US" b="true" sz="2623">
+              <a:rPr lang="en-US" sz="2623" b="1" dirty="0">
                 <a:solidFill>
                   <a:srgbClr val="FFFFFF"/>
                 </a:solidFill>
@@ -4105,19 +4121,19 @@
                 <a:cs typeface="Aileron Bold"/>
                 <a:sym typeface="Aileron Bold"/>
               </a:rPr>
-              <a:t>Features postponed: grep, describe</a:t>
-            </a:r>
-          </a:p>
-        </p:txBody>
-      </p:sp>
-      <p:sp>
-        <p:nvSpPr>
-          <p:cNvPr name="TextBox 11" id="11"/>
-          <p:cNvSpPr txBox="true"/>
-          <p:nvPr/>
-        </p:nvSpPr>
-        <p:spPr>
-          <a:xfrm rot="0">
+              <a:t>Features postponed: grep, describe, proper pull requests</a:t>
+            </a:r>
+          </a:p>
+        </p:txBody>
+      </p:sp>
+      <p:sp>
+        <p:nvSpPr>
+          <p:cNvPr id="11" name="TextBox 11"/>
+          <p:cNvSpPr txBox="1"/>
+          <p:nvPr/>
+        </p:nvSpPr>
+        <p:spPr>
+          <a:xfrm>
             <a:off x="1502914" y="5566132"/>
             <a:ext cx="11132328" cy="845635"/>
           </a:xfrm>
@@ -4126,18 +4142,18 @@
           </a:prstGeom>
         </p:spPr>
         <p:txBody>
-          <a:bodyPr anchor="t" rtlCol="false" tIns="0" lIns="0" bIns="0" rIns="0">
+          <a:bodyPr lIns="0" tIns="0" rIns="0" bIns="0" rtlCol="0" anchor="t">
             <a:spAutoFit/>
           </a:bodyPr>
           <a:lstStyle/>
           <a:p>
-            <a:pPr algn="l" marL="0" indent="0" lvl="0">
+            <a:pPr marL="0" lvl="0" indent="0" algn="l">
               <a:lnSpc>
                 <a:spcPts val="6940"/>
               </a:lnSpc>
             </a:pPr>
             <a:r>
-              <a:rPr lang="en-US" b="true" sz="4957">
+              <a:rPr lang="en-US" sz="4957" b="1">
                 <a:solidFill>
                   <a:srgbClr val="FFFFFF"/>
                 </a:solidFill>
@@ -4153,26 +4169,26 @@
       </p:sp>
       <p:sp>
         <p:nvSpPr>
-          <p:cNvPr name="TextBox 12" id="12"/>
-          <p:cNvSpPr txBox="true"/>
-          <p:nvPr/>
-        </p:nvSpPr>
-        <p:spPr>
-          <a:xfrm rot="0">
+          <p:cNvPr id="12" name="TextBox 12"/>
+          <p:cNvSpPr txBox="1"/>
+          <p:nvPr/>
+        </p:nvSpPr>
+        <p:spPr>
+          <a:xfrm>
             <a:off x="1502914" y="6583217"/>
-            <a:ext cx="13455389" cy="1352596"/>
+            <a:ext cx="13455389" cy="2331216"/>
           </a:xfrm>
           <a:prstGeom prst="rect">
             <a:avLst/>
           </a:prstGeom>
         </p:spPr>
         <p:txBody>
-          <a:bodyPr anchor="t" rtlCol="false" tIns="0" lIns="0" bIns="0" rIns="0">
+          <a:bodyPr lIns="0" tIns="0" rIns="0" bIns="0" rtlCol="0" anchor="t">
             <a:spAutoFit/>
           </a:bodyPr>
           <a:lstStyle/>
           <a:p>
-            <a:pPr algn="l" marL="566349" indent="-283174" lvl="1">
+            <a:pPr marL="566349" lvl="1" indent="-283174" algn="l">
               <a:lnSpc>
                 <a:spcPts val="3672"/>
               </a:lnSpc>
@@ -4180,7 +4196,7 @@
               <a:buChar char="•"/>
             </a:pPr>
             <a:r>
-              <a:rPr lang="en-US" b="true" sz="2623">
+              <a:rPr lang="en-US" sz="2623" b="1" dirty="0">
                 <a:solidFill>
                   <a:srgbClr val="FFFFFF"/>
                 </a:solidFill>
@@ -4193,7 +4209,7 @@
             </a:r>
           </a:p>
           <a:p>
-            <a:pPr algn="l" marL="566349" indent="-283174" lvl="1">
+            <a:pPr marL="566349" lvl="1" indent="-283174" algn="l">
               <a:lnSpc>
                 <a:spcPts val="3672"/>
               </a:lnSpc>
@@ -4201,7 +4217,7 @@
               <a:buChar char="•"/>
             </a:pPr>
             <a:r>
-              <a:rPr lang="en-US" b="true" sz="2623">
+              <a:rPr lang="en-US" sz="2623" b="1" dirty="0">
                 <a:solidFill>
                   <a:srgbClr val="FFFFFF"/>
                 </a:solidFill>
@@ -4214,7 +4230,7 @@
             </a:r>
           </a:p>
           <a:p>
-            <a:pPr algn="l" marL="566349" indent="-283174" lvl="1">
+            <a:pPr marL="566349" lvl="1" indent="-283174" algn="l">
               <a:lnSpc>
                 <a:spcPts val="3672"/>
               </a:lnSpc>
@@ -4222,7 +4238,49 @@
               <a:buChar char="•"/>
             </a:pPr>
             <a:r>
-              <a:rPr lang="en-US" b="true" sz="2623">
+              <a:rPr lang="en-US" sz="2623" b="1" dirty="0">
+                <a:solidFill>
+                  <a:srgbClr val="FFFFFF"/>
+                </a:solidFill>
+                <a:latin typeface="Aileron Bold"/>
+                <a:ea typeface="Aileron Bold"/>
+                <a:cs typeface="Aileron Bold"/>
+                <a:sym typeface="Aileron Bold"/>
+              </a:rPr>
+              <a:t>Recode backend in Rust</a:t>
+            </a:r>
+          </a:p>
+          <a:p>
+            <a:pPr marL="566349" lvl="1" indent="-283174" algn="l">
+              <a:lnSpc>
+                <a:spcPts val="3672"/>
+              </a:lnSpc>
+              <a:buFont typeface="Arial"/>
+              <a:buChar char="•"/>
+            </a:pPr>
+            <a:r>
+              <a:rPr lang="en-US" sz="2623" b="1" dirty="0">
+                <a:solidFill>
+                  <a:srgbClr val="FFFFFF"/>
+                </a:solidFill>
+                <a:latin typeface="Aileron Bold"/>
+                <a:ea typeface="Aileron Bold"/>
+                <a:cs typeface="Aileron Bold"/>
+                <a:sym typeface="Aileron Bold"/>
+              </a:rPr>
+              <a:t>Proper repository data handling</a:t>
+            </a:r>
+          </a:p>
+          <a:p>
+            <a:pPr marL="566349" lvl="1" indent="-283174" algn="l">
+              <a:lnSpc>
+                <a:spcPts val="3672"/>
+              </a:lnSpc>
+              <a:buFont typeface="Arial"/>
+              <a:buChar char="•"/>
+            </a:pPr>
+            <a:r>
+              <a:rPr lang="en-US" sz="2623" b="1" dirty="0">
                 <a:solidFill>
                   <a:srgbClr val="FFFFFF"/>
                 </a:solidFill>
@@ -4245,13 +4303,14 @@
 </file>
 
 <file path=ppt/slides/slide11.xml><?xml version="1.0" encoding="utf-8"?>
-<p:sld xmlns:p="http://schemas.openxmlformats.org/presentationml/2006/main" xmlns:a="http://schemas.openxmlformats.org/drawingml/2006/main" xmlns:r="http://schemas.openxmlformats.org/officeDocument/2006/relationships">
+<p:sld xmlns:a="http://schemas.openxmlformats.org/drawingml/2006/main" xmlns:r="http://schemas.openxmlformats.org/officeDocument/2006/relationships" xmlns:p="http://schemas.openxmlformats.org/presentationml/2006/main">
   <p:cSld>
     <p:bg>
       <p:bgPr>
         <a:solidFill>
           <a:srgbClr val="26272B"/>
         </a:solidFill>
+        <a:effectLst/>
       </p:bgPr>
     </p:bg>
     <p:spTree>
@@ -4270,12 +4329,12 @@
       </p:grpSpPr>
       <p:sp>
         <p:nvSpPr>
-          <p:cNvPr name="Freeform 2" id="2"/>
+          <p:cNvPr id="2" name="Freeform 2"/>
           <p:cNvSpPr/>
           <p:nvPr/>
         </p:nvSpPr>
         <p:spPr>
-          <a:xfrm flipH="false" flipV="false" rot="-5400000">
+          <a:xfrm rot="-5400000">
             <a:off x="-3649725" y="7788149"/>
             <a:ext cx="7315200" cy="2025901"/>
           </a:xfrm>
@@ -4284,9 +4343,9 @@
             <a:gdLst/>
             <a:ahLst/>
             <a:cxnLst/>
-            <a:rect r="r" b="b" t="t" l="l"/>
+            <a:rect l="l" t="t" r="r" b="b"/>
             <a:pathLst>
-              <a:path h="2025901" w="7315200">
+              <a:path w="7315200" h="2025901">
                 <a:moveTo>
                   <a:pt x="0" y="0"/>
                 </a:moveTo>
@@ -4315,19 +4374,19 @@
               </a:extLst>
             </a:blip>
             <a:stretch>
-              <a:fillRect l="0" t="0" r="0" b="0"/>
+              <a:fillRect/>
             </a:stretch>
           </a:blipFill>
         </p:spPr>
       </p:sp>
       <p:sp>
         <p:nvSpPr>
-          <p:cNvPr name="Freeform 3" id="3"/>
+          <p:cNvPr id="3" name="Freeform 3"/>
           <p:cNvSpPr/>
           <p:nvPr/>
         </p:nvSpPr>
         <p:spPr>
-          <a:xfrm flipH="false" flipV="false" rot="-5400000">
+          <a:xfrm rot="-5400000">
             <a:off x="14622525" y="472949"/>
             <a:ext cx="7315200" cy="2025901"/>
           </a:xfrm>
@@ -4336,9 +4395,9 @@
             <a:gdLst/>
             <a:ahLst/>
             <a:cxnLst/>
-            <a:rect r="r" b="b" t="t" l="l"/>
+            <a:rect l="l" t="t" r="r" b="b"/>
             <a:pathLst>
-              <a:path h="2025901" w="7315200">
+              <a:path w="7315200" h="2025901">
                 <a:moveTo>
                   <a:pt x="0" y="0"/>
                 </a:moveTo>
@@ -4367,19 +4426,19 @@
               </a:extLst>
             </a:blip>
             <a:stretch>
-              <a:fillRect l="0" t="0" r="0" b="0"/>
+              <a:fillRect/>
             </a:stretch>
           </a:blipFill>
         </p:spPr>
       </p:sp>
       <p:sp>
         <p:nvSpPr>
-          <p:cNvPr name="Freeform 4" id="4"/>
+          <p:cNvPr id="4" name="Freeform 4"/>
           <p:cNvSpPr/>
           <p:nvPr/>
         </p:nvSpPr>
         <p:spPr>
-          <a:xfrm flipH="true" flipV="false" rot="0">
+          <a:xfrm flipH="1">
             <a:off x="-1590281" y="9258300"/>
             <a:ext cx="7315200" cy="3195406"/>
           </a:xfrm>
@@ -4388,9 +4447,9 @@
             <a:gdLst/>
             <a:ahLst/>
             <a:cxnLst/>
-            <a:rect r="r" b="b" t="t" l="l"/>
+            <a:rect l="l" t="t" r="r" b="b"/>
             <a:pathLst>
-              <a:path h="3195406" w="7315200">
+              <a:path w="7315200" h="3195406">
                 <a:moveTo>
                   <a:pt x="7315200" y="0"/>
                 </a:moveTo>
@@ -4419,19 +4478,19 @@
               </a:extLst>
             </a:blip>
             <a:stretch>
-              <a:fillRect l="0" t="0" r="0" b="0"/>
+              <a:fillRect/>
             </a:stretch>
           </a:blipFill>
         </p:spPr>
       </p:sp>
       <p:sp>
         <p:nvSpPr>
-          <p:cNvPr name="Freeform 5" id="5"/>
+          <p:cNvPr id="5" name="Freeform 5"/>
           <p:cNvSpPr/>
           <p:nvPr/>
         </p:nvSpPr>
         <p:spPr>
-          <a:xfrm flipH="false" flipV="true" rot="0">
+          <a:xfrm flipV="1">
             <a:off x="12563081" y="-2166706"/>
             <a:ext cx="7315200" cy="3195406"/>
           </a:xfrm>
@@ -4440,9 +4499,9 @@
             <a:gdLst/>
             <a:ahLst/>
             <a:cxnLst/>
-            <a:rect r="r" b="b" t="t" l="l"/>
+            <a:rect l="l" t="t" r="r" b="b"/>
             <a:pathLst>
-              <a:path h="3195406" w="7315200">
+              <a:path w="7315200" h="3195406">
                 <a:moveTo>
                   <a:pt x="0" y="3195406"/>
                 </a:moveTo>
@@ -4471,19 +4530,19 @@
               </a:extLst>
             </a:blip>
             <a:stretch>
-              <a:fillRect l="0" t="0" r="0" b="0"/>
+              <a:fillRect/>
             </a:stretch>
           </a:blipFill>
         </p:spPr>
       </p:sp>
       <p:sp>
         <p:nvSpPr>
-          <p:cNvPr name="Freeform 6" id="6"/>
+          <p:cNvPr id="6" name="Freeform 6"/>
           <p:cNvSpPr/>
           <p:nvPr/>
         </p:nvSpPr>
         <p:spPr>
-          <a:xfrm flipH="false" flipV="true" rot="0">
+          <a:xfrm flipV="1">
             <a:off x="-1590281" y="-2166706"/>
             <a:ext cx="7315200" cy="3195406"/>
           </a:xfrm>
@@ -4492,9 +4551,9 @@
             <a:gdLst/>
             <a:ahLst/>
             <a:cxnLst/>
-            <a:rect r="r" b="b" t="t" l="l"/>
+            <a:rect l="l" t="t" r="r" b="b"/>
             <a:pathLst>
-              <a:path h="3195406" w="7315200">
+              <a:path w="7315200" h="3195406">
                 <a:moveTo>
                   <a:pt x="0" y="3195406"/>
                 </a:moveTo>
@@ -4523,19 +4582,19 @@
               </a:extLst>
             </a:blip>
             <a:stretch>
-              <a:fillRect l="0" t="0" r="0" b="0"/>
+              <a:fillRect/>
             </a:stretch>
           </a:blipFill>
         </p:spPr>
       </p:sp>
       <p:sp>
         <p:nvSpPr>
-          <p:cNvPr name="Freeform 7" id="7"/>
+          <p:cNvPr id="7" name="Freeform 7"/>
           <p:cNvSpPr/>
           <p:nvPr/>
         </p:nvSpPr>
         <p:spPr>
-          <a:xfrm flipH="true" flipV="false" rot="0">
+          <a:xfrm flipH="1">
             <a:off x="12563081" y="9263294"/>
             <a:ext cx="7315200" cy="3195406"/>
           </a:xfrm>
@@ -4544,9 +4603,9 @@
             <a:gdLst/>
             <a:ahLst/>
             <a:cxnLst/>
-            <a:rect r="r" b="b" t="t" l="l"/>
+            <a:rect l="l" t="t" r="r" b="b"/>
             <a:pathLst>
-              <a:path h="3195406" w="7315200">
+              <a:path w="7315200" h="3195406">
                 <a:moveTo>
                   <a:pt x="7315200" y="0"/>
                 </a:moveTo>
@@ -4575,19 +4634,19 @@
               </a:extLst>
             </a:blip>
             <a:stretch>
-              <a:fillRect l="0" t="0" r="0" b="0"/>
+              <a:fillRect/>
             </a:stretch>
           </a:blipFill>
         </p:spPr>
       </p:sp>
       <p:sp>
         <p:nvSpPr>
-          <p:cNvPr name="TextBox 8" id="8"/>
-          <p:cNvSpPr txBox="true"/>
-          <p:nvPr/>
-        </p:nvSpPr>
-        <p:spPr>
-          <a:xfrm rot="0">
+          <p:cNvPr id="8" name="TextBox 8"/>
+          <p:cNvSpPr txBox="1"/>
+          <p:nvPr/>
+        </p:nvSpPr>
+        <p:spPr>
+          <a:xfrm>
             <a:off x="2596732" y="3079069"/>
             <a:ext cx="13094536" cy="2064431"/>
           </a:xfrm>
@@ -4596,18 +4655,18 @@
           </a:prstGeom>
         </p:spPr>
         <p:txBody>
-          <a:bodyPr anchor="t" rtlCol="false" tIns="0" lIns="0" bIns="0" rIns="0">
+          <a:bodyPr lIns="0" tIns="0" rIns="0" bIns="0" rtlCol="0" anchor="t">
             <a:spAutoFit/>
           </a:bodyPr>
           <a:lstStyle/>
           <a:p>
-            <a:pPr algn="ctr" marL="0" indent="0" lvl="0">
+            <a:pPr marL="0" lvl="0" indent="0" algn="ctr">
               <a:lnSpc>
                 <a:spcPts val="16937"/>
               </a:lnSpc>
             </a:pPr>
             <a:r>
-              <a:rPr lang="en-US" b="true" sz="12098">
+              <a:rPr lang="en-US" sz="12098" b="1">
                 <a:solidFill>
                   <a:srgbClr val="FFFFFF"/>
                 </a:solidFill>
@@ -4623,12 +4682,12 @@
       </p:sp>
       <p:sp>
         <p:nvSpPr>
-          <p:cNvPr name="TextBox 9" id="9"/>
-          <p:cNvSpPr txBox="true"/>
-          <p:nvPr/>
-        </p:nvSpPr>
-        <p:spPr>
-          <a:xfrm rot="0">
+          <p:cNvPr id="9" name="TextBox 9"/>
+          <p:cNvSpPr txBox="1"/>
+          <p:nvPr/>
+        </p:nvSpPr>
+        <p:spPr>
+          <a:xfrm>
             <a:off x="2596732" y="5360691"/>
             <a:ext cx="13094536" cy="1111267"/>
           </a:xfrm>
@@ -4637,18 +4696,18 @@
           </a:prstGeom>
         </p:spPr>
         <p:txBody>
-          <a:bodyPr anchor="t" rtlCol="false" tIns="0" lIns="0" bIns="0" rIns="0">
+          <a:bodyPr lIns="0" tIns="0" rIns="0" bIns="0" rtlCol="0" anchor="t">
             <a:spAutoFit/>
           </a:bodyPr>
           <a:lstStyle/>
           <a:p>
-            <a:pPr algn="ctr" marL="0" indent="0" lvl="0">
+            <a:pPr marL="0" lvl="0" indent="0" algn="ctr">
               <a:lnSpc>
                 <a:spcPts val="9099"/>
               </a:lnSpc>
             </a:pPr>
             <a:r>
-              <a:rPr lang="en-US" b="true" sz="6499" u="sng">
+              <a:rPr lang="en-US" sz="6499" b="1" u="sng">
                 <a:solidFill>
                   <a:srgbClr val="FDA410"/>
                 </a:solidFill>
@@ -4671,13 +4730,14 @@
 </file>
 
 <file path=ppt/slides/slide2.xml><?xml version="1.0" encoding="utf-8"?>
-<p:sld xmlns:p="http://schemas.openxmlformats.org/presentationml/2006/main" xmlns:a="http://schemas.openxmlformats.org/drawingml/2006/main" xmlns:r="http://schemas.openxmlformats.org/officeDocument/2006/relationships">
+<p:sld xmlns:a="http://schemas.openxmlformats.org/drawingml/2006/main" xmlns:r="http://schemas.openxmlformats.org/officeDocument/2006/relationships" xmlns:p="http://schemas.openxmlformats.org/presentationml/2006/main">
   <p:cSld>
     <p:bg>
       <p:bgPr>
         <a:solidFill>
           <a:srgbClr val="26272B"/>
         </a:solidFill>
+        <a:effectLst/>
       </p:bgPr>
     </p:bg>
     <p:spTree>
@@ -4696,12 +4756,12 @@
       </p:grpSpPr>
       <p:sp>
         <p:nvSpPr>
-          <p:cNvPr name="Freeform 2" id="2"/>
+          <p:cNvPr id="2" name="Freeform 2"/>
           <p:cNvSpPr/>
           <p:nvPr/>
         </p:nvSpPr>
         <p:spPr>
-          <a:xfrm flipH="false" flipV="false" rot="-5400000">
+          <a:xfrm rot="-5400000">
             <a:off x="-3649725" y="8834213"/>
             <a:ext cx="7315200" cy="2025901"/>
           </a:xfrm>
@@ -4710,9 +4770,9 @@
             <a:gdLst/>
             <a:ahLst/>
             <a:cxnLst/>
-            <a:rect r="r" b="b" t="t" l="l"/>
+            <a:rect l="l" t="t" r="r" b="b"/>
             <a:pathLst>
-              <a:path h="2025901" w="7315200">
+              <a:path w="7315200" h="2025901">
                 <a:moveTo>
                   <a:pt x="0" y="0"/>
                 </a:moveTo>
@@ -4741,19 +4801,19 @@
               </a:extLst>
             </a:blip>
             <a:stretch>
-              <a:fillRect l="0" t="0" r="0" b="0"/>
+              <a:fillRect/>
             </a:stretch>
           </a:blipFill>
         </p:spPr>
       </p:sp>
       <p:sp>
         <p:nvSpPr>
-          <p:cNvPr name="Freeform 3" id="3"/>
+          <p:cNvPr id="3" name="Freeform 3"/>
           <p:cNvSpPr/>
           <p:nvPr/>
         </p:nvSpPr>
         <p:spPr>
-          <a:xfrm flipH="false" flipV="false" rot="-5400000">
+          <a:xfrm rot="-5400000">
             <a:off x="-3657600" y="-573114"/>
             <a:ext cx="7315200" cy="2025901"/>
           </a:xfrm>
@@ -4762,9 +4822,9 @@
             <a:gdLst/>
             <a:ahLst/>
             <a:cxnLst/>
-            <a:rect r="r" b="b" t="t" l="l"/>
+            <a:rect l="l" t="t" r="r" b="b"/>
             <a:pathLst>
-              <a:path h="2025901" w="7315200">
+              <a:path w="7315200" h="2025901">
                 <a:moveTo>
                   <a:pt x="0" y="0"/>
                 </a:moveTo>
@@ -4793,19 +4853,19 @@
               </a:extLst>
             </a:blip>
             <a:stretch>
-              <a:fillRect l="0" t="0" r="0" b="0"/>
+              <a:fillRect/>
             </a:stretch>
           </a:blipFill>
         </p:spPr>
       </p:sp>
       <p:sp>
         <p:nvSpPr>
-          <p:cNvPr name="Freeform 4" id="4"/>
+          <p:cNvPr id="4" name="Freeform 4"/>
           <p:cNvSpPr/>
           <p:nvPr/>
         </p:nvSpPr>
         <p:spPr>
-          <a:xfrm flipH="true" flipV="false" rot="0">
+          <a:xfrm flipH="1">
             <a:off x="-1590281" y="9258300"/>
             <a:ext cx="7315200" cy="3195406"/>
           </a:xfrm>
@@ -4814,9 +4874,9 @@
             <a:gdLst/>
             <a:ahLst/>
             <a:cxnLst/>
-            <a:rect r="r" b="b" t="t" l="l"/>
+            <a:rect l="l" t="t" r="r" b="b"/>
             <a:pathLst>
-              <a:path h="3195406" w="7315200">
+              <a:path w="7315200" h="3195406">
                 <a:moveTo>
                   <a:pt x="7315200" y="0"/>
                 </a:moveTo>
@@ -4845,19 +4905,19 @@
               </a:extLst>
             </a:blip>
             <a:stretch>
-              <a:fillRect l="0" t="0" r="0" b="0"/>
+              <a:fillRect/>
             </a:stretch>
           </a:blipFill>
         </p:spPr>
       </p:sp>
       <p:sp>
         <p:nvSpPr>
-          <p:cNvPr name="Freeform 5" id="5"/>
+          <p:cNvPr id="5" name="Freeform 5"/>
           <p:cNvSpPr/>
           <p:nvPr/>
         </p:nvSpPr>
         <p:spPr>
-          <a:xfrm flipH="false" flipV="false" rot="-5400000">
+          <a:xfrm rot="-5400000">
             <a:off x="14634337" y="8834213"/>
             <a:ext cx="7315200" cy="2025901"/>
           </a:xfrm>
@@ -4866,9 +4926,9 @@
             <a:gdLst/>
             <a:ahLst/>
             <a:cxnLst/>
-            <a:rect r="r" b="b" t="t" l="l"/>
+            <a:rect l="l" t="t" r="r" b="b"/>
             <a:pathLst>
-              <a:path h="2025901" w="7315200">
+              <a:path w="7315200" h="2025901">
                 <a:moveTo>
                   <a:pt x="0" y="0"/>
                 </a:moveTo>
@@ -4897,19 +4957,19 @@
               </a:extLst>
             </a:blip>
             <a:stretch>
-              <a:fillRect l="0" t="0" r="0" b="0"/>
+              <a:fillRect/>
             </a:stretch>
           </a:blipFill>
         </p:spPr>
       </p:sp>
       <p:sp>
         <p:nvSpPr>
-          <p:cNvPr name="Freeform 6" id="6"/>
+          <p:cNvPr id="6" name="Freeform 6"/>
           <p:cNvSpPr/>
           <p:nvPr/>
         </p:nvSpPr>
         <p:spPr>
-          <a:xfrm flipH="false" flipV="false" rot="-5400000">
+          <a:xfrm rot="-5400000">
             <a:off x="14626463" y="-573114"/>
             <a:ext cx="7315200" cy="2025901"/>
           </a:xfrm>
@@ -4918,9 +4978,9 @@
             <a:gdLst/>
             <a:ahLst/>
             <a:cxnLst/>
-            <a:rect r="r" b="b" t="t" l="l"/>
+            <a:rect l="l" t="t" r="r" b="b"/>
             <a:pathLst>
-              <a:path h="2025901" w="7315200">
+              <a:path w="7315200" h="2025901">
                 <a:moveTo>
                   <a:pt x="0" y="0"/>
                 </a:moveTo>
@@ -4949,19 +5009,19 @@
               </a:extLst>
             </a:blip>
             <a:stretch>
-              <a:fillRect l="0" t="0" r="0" b="0"/>
+              <a:fillRect/>
             </a:stretch>
           </a:blipFill>
         </p:spPr>
       </p:sp>
       <p:sp>
         <p:nvSpPr>
-          <p:cNvPr name="Freeform 7" id="7"/>
+          <p:cNvPr id="7" name="Freeform 7"/>
           <p:cNvSpPr/>
           <p:nvPr/>
         </p:nvSpPr>
         <p:spPr>
-          <a:xfrm flipH="false" flipV="true" rot="0">
+          <a:xfrm flipV="1">
             <a:off x="12563081" y="-2166706"/>
             <a:ext cx="7315200" cy="3195406"/>
           </a:xfrm>
@@ -4970,9 +5030,9 @@
             <a:gdLst/>
             <a:ahLst/>
             <a:cxnLst/>
-            <a:rect r="r" b="b" t="t" l="l"/>
+            <a:rect l="l" t="t" r="r" b="b"/>
             <a:pathLst>
-              <a:path h="3195406" w="7315200">
+              <a:path w="7315200" h="3195406">
                 <a:moveTo>
                   <a:pt x="0" y="3195406"/>
                 </a:moveTo>
@@ -5001,39 +5061,39 @@
               </a:extLst>
             </a:blip>
             <a:stretch>
-              <a:fillRect l="0" t="0" r="0" b="0"/>
+              <a:fillRect/>
             </a:stretch>
           </a:blipFill>
         </p:spPr>
       </p:sp>
       <p:sp>
         <p:nvSpPr>
-          <p:cNvPr name="TextBox 8" id="8"/>
-          <p:cNvSpPr txBox="true"/>
-          <p:nvPr/>
-        </p:nvSpPr>
-        <p:spPr>
-          <a:xfrm rot="0">
+          <p:cNvPr id="8" name="TextBox 8"/>
+          <p:cNvSpPr txBox="1"/>
+          <p:nvPr/>
+        </p:nvSpPr>
+        <p:spPr>
+          <a:xfrm>
             <a:off x="1558745" y="3473994"/>
-            <a:ext cx="15170510" cy="4812975"/>
+            <a:ext cx="15170510" cy="4899162"/>
           </a:xfrm>
           <a:prstGeom prst="rect">
             <a:avLst/>
           </a:prstGeom>
         </p:spPr>
         <p:txBody>
-          <a:bodyPr anchor="t" rtlCol="false" tIns="0" lIns="0" bIns="0" rIns="0">
+          <a:bodyPr lIns="0" tIns="0" rIns="0" bIns="0" rtlCol="0" anchor="t">
             <a:spAutoFit/>
           </a:bodyPr>
           <a:lstStyle/>
           <a:p>
-            <a:pPr algn="just" marL="0" indent="0" lvl="0">
+            <a:pPr marL="0" lvl="0" indent="0" algn="just">
               <a:lnSpc>
                 <a:spcPts val="3517"/>
               </a:lnSpc>
             </a:pPr>
             <a:r>
-              <a:rPr lang="en-US" b="true" sz="2512">
+              <a:rPr lang="en-US" sz="2512" b="1" dirty="0" err="1">
                 <a:solidFill>
                   <a:srgbClr val="FFFFFF"/>
                 </a:solidFill>
@@ -5042,24 +5102,45 @@
                 <a:cs typeface="Aileron Bold"/>
                 <a:sym typeface="Aileron Bold"/>
               </a:rPr>
-              <a:t>Chizel is a lightweight, open-source alternative to GitHub — built to provide essential version control and collaboration features without AI integration or corporate complexity.</a:t>
-            </a:r>
-          </a:p>
-          <a:p>
-            <a:pPr algn="just" marL="0" indent="0" lvl="0">
+              <a:t>Chizel</a:t>
+            </a:r>
+            <a:r>
+              <a:rPr lang="en-US" sz="2512" b="1" dirty="0">
+                <a:solidFill>
+                  <a:srgbClr val="FFFFFF"/>
+                </a:solidFill>
+                <a:latin typeface="Aileron Bold"/>
+                <a:ea typeface="Aileron Bold"/>
+                <a:cs typeface="Aileron Bold"/>
+                <a:sym typeface="Aileron Bold"/>
+              </a:rPr>
+              <a:t> is a lightweight, open-source alternative to GitHub, built to provide essential version control and collaboration features without AI integration or corporate complexity.</a:t>
+            </a:r>
+          </a:p>
+          <a:p>
+            <a:pPr marL="0" lvl="0" indent="0" algn="just">
               <a:lnSpc>
                 <a:spcPts val="3517"/>
               </a:lnSpc>
             </a:pPr>
-          </a:p>
-          <a:p>
-            <a:pPr algn="just" marL="0" indent="0" lvl="0">
+            <a:endParaRPr lang="en-US" sz="2512" b="1" dirty="0">
+              <a:solidFill>
+                <a:srgbClr val="FFFFFF"/>
+              </a:solidFill>
+              <a:latin typeface="Aileron Bold"/>
+              <a:ea typeface="Aileron Bold"/>
+              <a:cs typeface="Aileron Bold"/>
+              <a:sym typeface="Aileron Bold"/>
+            </a:endParaRPr>
+          </a:p>
+          <a:p>
+            <a:pPr marL="0" lvl="0" indent="0" algn="just">
               <a:lnSpc>
                 <a:spcPts val="3517"/>
               </a:lnSpc>
             </a:pPr>
             <a:r>
-              <a:rPr lang="en-US" b="true" sz="2512">
+              <a:rPr lang="en-US" sz="2512" b="1" dirty="0">
                 <a:solidFill>
                   <a:srgbClr val="FFFFFF"/>
                 </a:solidFill>
@@ -5072,20 +5153,29 @@
             </a:r>
           </a:p>
           <a:p>
-            <a:pPr algn="just" marL="0" indent="0" lvl="0">
+            <a:pPr marL="0" lvl="0" indent="0" algn="just">
               <a:lnSpc>
                 <a:spcPts val="3517"/>
               </a:lnSpc>
             </a:pPr>
-          </a:p>
-          <a:p>
-            <a:pPr algn="just" marL="0" indent="0" lvl="0">
+            <a:endParaRPr lang="en-US" sz="2512" b="1" dirty="0">
+              <a:solidFill>
+                <a:srgbClr val="FFFFFF"/>
+              </a:solidFill>
+              <a:latin typeface="Aileron Bold"/>
+              <a:ea typeface="Aileron Bold"/>
+              <a:cs typeface="Aileron Bold"/>
+              <a:sym typeface="Aileron Bold"/>
+            </a:endParaRPr>
+          </a:p>
+          <a:p>
+            <a:pPr marL="0" lvl="0" indent="0" algn="just">
               <a:lnSpc>
                 <a:spcPts val="3517"/>
               </a:lnSpc>
             </a:pPr>
             <a:r>
-              <a:rPr lang="en-US" b="true" sz="2512">
+              <a:rPr lang="en-US" sz="2512" b="1" dirty="0">
                 <a:solidFill>
                   <a:srgbClr val="FFFFFF"/>
                 </a:solidFill>
@@ -5098,13 +5188,13 @@
             </a:r>
           </a:p>
           <a:p>
-            <a:pPr algn="just" marL="0" indent="0" lvl="0">
+            <a:pPr marL="0" lvl="0" indent="0" algn="just">
               <a:lnSpc>
                 <a:spcPts val="3517"/>
               </a:lnSpc>
             </a:pPr>
             <a:r>
-              <a:rPr lang="en-US" b="true" sz="2512">
+              <a:rPr lang="en-US" sz="2512" b="1" dirty="0">
                 <a:solidFill>
                   <a:srgbClr val="FFFFFF"/>
                 </a:solidFill>
@@ -5117,13 +5207,13 @@
             </a:r>
           </a:p>
           <a:p>
-            <a:pPr algn="just" marL="0" indent="0" lvl="0">
+            <a:pPr marL="0" lvl="0" indent="0" algn="just">
               <a:lnSpc>
                 <a:spcPts val="3517"/>
               </a:lnSpc>
             </a:pPr>
             <a:r>
-              <a:rPr lang="en-US" b="true" sz="2512">
+              <a:rPr lang="en-US" sz="2512" b="1" dirty="0">
                 <a:solidFill>
                   <a:srgbClr val="FFFFFF"/>
                 </a:solidFill>
@@ -5136,13 +5226,13 @@
             </a:r>
           </a:p>
           <a:p>
-            <a:pPr algn="just" marL="0" indent="0" lvl="0">
+            <a:pPr marL="0" lvl="0" indent="0" algn="just">
               <a:lnSpc>
                 <a:spcPts val="3517"/>
               </a:lnSpc>
             </a:pPr>
             <a:r>
-              <a:rPr lang="en-US" b="true" sz="2512">
+              <a:rPr lang="en-US" sz="2512" b="1" dirty="0">
                 <a:solidFill>
                   <a:srgbClr val="FFFFFF"/>
                 </a:solidFill>
@@ -5155,13 +5245,13 @@
             </a:r>
           </a:p>
           <a:p>
-            <a:pPr algn="just" marL="0" indent="0" lvl="0">
+            <a:pPr marL="0" lvl="0" indent="0" algn="just">
               <a:lnSpc>
                 <a:spcPts val="3517"/>
               </a:lnSpc>
             </a:pPr>
             <a:r>
-              <a:rPr lang="en-US" b="true" sz="2512">
+              <a:rPr lang="en-US" sz="2512" b="1" dirty="0">
                 <a:solidFill>
                   <a:srgbClr val="FFFFFF"/>
                 </a:solidFill>
@@ -5177,12 +5267,12 @@
       </p:sp>
       <p:sp>
         <p:nvSpPr>
-          <p:cNvPr name="TextBox 9" id="9"/>
-          <p:cNvSpPr txBox="true"/>
-          <p:nvPr/>
-        </p:nvSpPr>
-        <p:spPr>
-          <a:xfrm rot="0">
+          <p:cNvPr id="9" name="TextBox 9"/>
+          <p:cNvSpPr txBox="1"/>
+          <p:nvPr/>
+        </p:nvSpPr>
+        <p:spPr>
+          <a:xfrm>
             <a:off x="4554750" y="2322242"/>
             <a:ext cx="9178501" cy="806423"/>
           </a:xfrm>
@@ -5191,18 +5281,18 @@
           </a:prstGeom>
         </p:spPr>
         <p:txBody>
-          <a:bodyPr anchor="t" rtlCol="false" tIns="0" lIns="0" bIns="0" rIns="0">
+          <a:bodyPr lIns="0" tIns="0" rIns="0" bIns="0" rtlCol="0" anchor="t">
             <a:spAutoFit/>
           </a:bodyPr>
           <a:lstStyle/>
           <a:p>
-            <a:pPr algn="ctr" marL="0" indent="0" lvl="0">
+            <a:pPr marL="0" lvl="0" indent="0" algn="ctr">
               <a:lnSpc>
                 <a:spcPts val="6643"/>
               </a:lnSpc>
             </a:pPr>
             <a:r>
-              <a:rPr lang="en-US" b="true" sz="4745">
+              <a:rPr lang="en-US" sz="4745" b="1">
                 <a:solidFill>
                   <a:srgbClr val="FFFFFF"/>
                 </a:solidFill>
@@ -5225,13 +5315,14 @@
 </file>
 
 <file path=ppt/slides/slide3.xml><?xml version="1.0" encoding="utf-8"?>
-<p:sld xmlns:p="http://schemas.openxmlformats.org/presentationml/2006/main" xmlns:a="http://schemas.openxmlformats.org/drawingml/2006/main" xmlns:r="http://schemas.openxmlformats.org/officeDocument/2006/relationships">
+<p:sld xmlns:a="http://schemas.openxmlformats.org/drawingml/2006/main" xmlns:r="http://schemas.openxmlformats.org/officeDocument/2006/relationships" xmlns:p="http://schemas.openxmlformats.org/presentationml/2006/main">
   <p:cSld>
     <p:bg>
       <p:bgPr>
         <a:solidFill>
           <a:srgbClr val="26272B"/>
         </a:solidFill>
+        <a:effectLst/>
       </p:bgPr>
     </p:bg>
     <p:spTree>
@@ -5250,12 +5341,12 @@
       </p:grpSpPr>
       <p:sp>
         <p:nvSpPr>
-          <p:cNvPr name="Freeform 2" id="2"/>
+          <p:cNvPr id="2" name="Freeform 2"/>
           <p:cNvSpPr/>
           <p:nvPr/>
         </p:nvSpPr>
         <p:spPr>
-          <a:xfrm flipH="false" flipV="false" rot="-5400000">
+          <a:xfrm rot="-5400000">
             <a:off x="-3649725" y="8834213"/>
             <a:ext cx="7315200" cy="2025901"/>
           </a:xfrm>
@@ -5264,9 +5355,9 @@
             <a:gdLst/>
             <a:ahLst/>
             <a:cxnLst/>
-            <a:rect r="r" b="b" t="t" l="l"/>
+            <a:rect l="l" t="t" r="r" b="b"/>
             <a:pathLst>
-              <a:path h="2025901" w="7315200">
+              <a:path w="7315200" h="2025901">
                 <a:moveTo>
                   <a:pt x="0" y="0"/>
                 </a:moveTo>
@@ -5295,19 +5386,19 @@
               </a:extLst>
             </a:blip>
             <a:stretch>
-              <a:fillRect l="0" t="0" r="0" b="0"/>
+              <a:fillRect/>
             </a:stretch>
           </a:blipFill>
         </p:spPr>
       </p:sp>
       <p:sp>
         <p:nvSpPr>
-          <p:cNvPr name="Freeform 3" id="3"/>
+          <p:cNvPr id="3" name="Freeform 3"/>
           <p:cNvSpPr/>
           <p:nvPr/>
         </p:nvSpPr>
         <p:spPr>
-          <a:xfrm flipH="false" flipV="false" rot="-5400000">
+          <a:xfrm rot="-5400000">
             <a:off x="-3657600" y="-573114"/>
             <a:ext cx="7315200" cy="2025901"/>
           </a:xfrm>
@@ -5316,9 +5407,9 @@
             <a:gdLst/>
             <a:ahLst/>
             <a:cxnLst/>
-            <a:rect r="r" b="b" t="t" l="l"/>
+            <a:rect l="l" t="t" r="r" b="b"/>
             <a:pathLst>
-              <a:path h="2025901" w="7315200">
+              <a:path w="7315200" h="2025901">
                 <a:moveTo>
                   <a:pt x="0" y="0"/>
                 </a:moveTo>
@@ -5347,19 +5438,19 @@
               </a:extLst>
             </a:blip>
             <a:stretch>
-              <a:fillRect l="0" t="0" r="0" b="0"/>
+              <a:fillRect/>
             </a:stretch>
           </a:blipFill>
         </p:spPr>
       </p:sp>
       <p:sp>
         <p:nvSpPr>
-          <p:cNvPr name="Freeform 4" id="4"/>
+          <p:cNvPr id="4" name="Freeform 4"/>
           <p:cNvSpPr/>
           <p:nvPr/>
         </p:nvSpPr>
         <p:spPr>
-          <a:xfrm flipH="true" flipV="false" rot="0">
+          <a:xfrm flipH="1">
             <a:off x="-1590281" y="9258300"/>
             <a:ext cx="7315200" cy="3195406"/>
           </a:xfrm>
@@ -5368,9 +5459,9 @@
             <a:gdLst/>
             <a:ahLst/>
             <a:cxnLst/>
-            <a:rect r="r" b="b" t="t" l="l"/>
+            <a:rect l="l" t="t" r="r" b="b"/>
             <a:pathLst>
-              <a:path h="3195406" w="7315200">
+              <a:path w="7315200" h="3195406">
                 <a:moveTo>
                   <a:pt x="7315200" y="0"/>
                 </a:moveTo>
@@ -5399,19 +5490,19 @@
               </a:extLst>
             </a:blip>
             <a:stretch>
-              <a:fillRect l="0" t="0" r="0" b="0"/>
+              <a:fillRect/>
             </a:stretch>
           </a:blipFill>
         </p:spPr>
       </p:sp>
       <p:sp>
         <p:nvSpPr>
-          <p:cNvPr name="Freeform 5" id="5"/>
+          <p:cNvPr id="5" name="Freeform 5"/>
           <p:cNvSpPr/>
           <p:nvPr/>
         </p:nvSpPr>
         <p:spPr>
-          <a:xfrm flipH="false" flipV="false" rot="-5400000">
+          <a:xfrm rot="-5400000">
             <a:off x="14634337" y="8834213"/>
             <a:ext cx="7315200" cy="2025901"/>
           </a:xfrm>
@@ -5420,9 +5511,9 @@
             <a:gdLst/>
             <a:ahLst/>
             <a:cxnLst/>
-            <a:rect r="r" b="b" t="t" l="l"/>
+            <a:rect l="l" t="t" r="r" b="b"/>
             <a:pathLst>
-              <a:path h="2025901" w="7315200">
+              <a:path w="7315200" h="2025901">
                 <a:moveTo>
                   <a:pt x="0" y="0"/>
                 </a:moveTo>
@@ -5451,19 +5542,19 @@
               </a:extLst>
             </a:blip>
             <a:stretch>
-              <a:fillRect l="0" t="0" r="0" b="0"/>
+              <a:fillRect/>
             </a:stretch>
           </a:blipFill>
         </p:spPr>
       </p:sp>
       <p:sp>
         <p:nvSpPr>
-          <p:cNvPr name="Freeform 6" id="6"/>
+          <p:cNvPr id="6" name="Freeform 6"/>
           <p:cNvSpPr/>
           <p:nvPr/>
         </p:nvSpPr>
         <p:spPr>
-          <a:xfrm flipH="false" flipV="false" rot="-5400000">
+          <a:xfrm rot="-5400000">
             <a:off x="14626463" y="-573114"/>
             <a:ext cx="7315200" cy="2025901"/>
           </a:xfrm>
@@ -5472,9 +5563,9 @@
             <a:gdLst/>
             <a:ahLst/>
             <a:cxnLst/>
-            <a:rect r="r" b="b" t="t" l="l"/>
+            <a:rect l="l" t="t" r="r" b="b"/>
             <a:pathLst>
-              <a:path h="2025901" w="7315200">
+              <a:path w="7315200" h="2025901">
                 <a:moveTo>
                   <a:pt x="0" y="0"/>
                 </a:moveTo>
@@ -5503,19 +5594,19 @@
               </a:extLst>
             </a:blip>
             <a:stretch>
-              <a:fillRect l="0" t="0" r="0" b="0"/>
+              <a:fillRect/>
             </a:stretch>
           </a:blipFill>
         </p:spPr>
       </p:sp>
       <p:sp>
         <p:nvSpPr>
-          <p:cNvPr name="Freeform 7" id="7"/>
+          <p:cNvPr id="7" name="Freeform 7"/>
           <p:cNvSpPr/>
           <p:nvPr/>
         </p:nvSpPr>
         <p:spPr>
-          <a:xfrm flipH="false" flipV="true" rot="0">
+          <a:xfrm flipV="1">
             <a:off x="12563081" y="-2166706"/>
             <a:ext cx="7315200" cy="3195406"/>
           </a:xfrm>
@@ -5524,9 +5615,9 @@
             <a:gdLst/>
             <a:ahLst/>
             <a:cxnLst/>
-            <a:rect r="r" b="b" t="t" l="l"/>
+            <a:rect l="l" t="t" r="r" b="b"/>
             <a:pathLst>
-              <a:path h="3195406" w="7315200">
+              <a:path w="7315200" h="3195406">
                 <a:moveTo>
                   <a:pt x="0" y="3195406"/>
                 </a:moveTo>
@@ -5555,19 +5646,19 @@
               </a:extLst>
             </a:blip>
             <a:stretch>
-              <a:fillRect l="0" t="0" r="0" b="0"/>
+              <a:fillRect/>
             </a:stretch>
           </a:blipFill>
         </p:spPr>
       </p:sp>
       <p:sp>
         <p:nvSpPr>
-          <p:cNvPr name="TextBox 8" id="8"/>
-          <p:cNvSpPr txBox="true"/>
-          <p:nvPr/>
-        </p:nvSpPr>
-        <p:spPr>
-          <a:xfrm rot="0">
+          <p:cNvPr id="8" name="TextBox 8"/>
+          <p:cNvSpPr txBox="1"/>
+          <p:nvPr/>
+        </p:nvSpPr>
+        <p:spPr>
+          <a:xfrm>
             <a:off x="15664505" y="8541547"/>
             <a:ext cx="1932408" cy="2663287"/>
           </a:xfrm>
@@ -5576,7 +5667,7 @@
           </a:prstGeom>
         </p:spPr>
         <p:txBody>
-          <a:bodyPr anchor="t" rtlCol="false" tIns="0" lIns="0" bIns="0" rIns="0">
+          <a:bodyPr lIns="0" tIns="0" rIns="0" bIns="0" rtlCol="0" anchor="t">
             <a:spAutoFit/>
           </a:bodyPr>
           <a:lstStyle/>
@@ -5587,7 +5678,7 @@
               </a:lnSpc>
             </a:pPr>
             <a:r>
-              <a:rPr lang="en-US" b="true" sz="7674">
+              <a:rPr lang="en-US" sz="7674" b="1">
                 <a:solidFill>
                   <a:srgbClr val="26272B"/>
                 </a:solidFill>
@@ -5600,22 +5691,31 @@
             </a:r>
           </a:p>
           <a:p>
-            <a:pPr algn="ctr" marL="0" indent="0" lvl="0">
+            <a:pPr marL="0" lvl="0" indent="0" algn="ctr">
               <a:lnSpc>
                 <a:spcPts val="10744"/>
               </a:lnSpc>
             </a:pPr>
+            <a:endParaRPr lang="en-US" sz="7674" b="1">
+              <a:solidFill>
+                <a:srgbClr val="26272B"/>
+              </a:solidFill>
+              <a:latin typeface="Clear Sans Bold"/>
+              <a:ea typeface="Clear Sans Bold"/>
+              <a:cs typeface="Clear Sans Bold"/>
+              <a:sym typeface="Clear Sans Bold"/>
+            </a:endParaRPr>
           </a:p>
         </p:txBody>
       </p:sp>
       <p:grpSp>
         <p:nvGrpSpPr>
-          <p:cNvPr name="Group 9" id="9"/>
+          <p:cNvPr id="9" name="Group 9"/>
           <p:cNvGrpSpPr/>
           <p:nvPr/>
         </p:nvGrpSpPr>
         <p:grpSpPr>
-          <a:xfrm rot="0">
+          <a:xfrm>
             <a:off x="3325325" y="3819693"/>
             <a:ext cx="496986" cy="496986"/>
             <a:chOff x="0" y="0"/>
@@ -5624,12 +5724,12 @@
         </p:grpSpPr>
         <p:sp>
           <p:nvSpPr>
-            <p:cNvPr name="Freeform 10" id="10"/>
+            <p:cNvPr id="10" name="Freeform 10"/>
             <p:cNvSpPr/>
             <p:nvPr/>
           </p:nvSpPr>
           <p:spPr>
-            <a:xfrm flipH="false" flipV="false" rot="0">
+            <a:xfrm>
               <a:off x="0" y="0"/>
               <a:ext cx="812800" cy="812800"/>
             </a:xfrm>
@@ -5638,9 +5738,9 @@
               <a:gdLst/>
               <a:ahLst/>
               <a:cxnLst/>
-              <a:rect r="r" b="b" t="t" l="l"/>
+              <a:rect l="l" t="t" r="r" b="b"/>
               <a:pathLst>
-                <a:path h="812800" w="812800">
+                <a:path w="812800" h="812800">
                   <a:moveTo>
                     <a:pt x="406400" y="0"/>
                   </a:moveTo>
@@ -5675,8 +5775,8 @@
         </p:sp>
         <p:sp>
           <p:nvSpPr>
-            <p:cNvPr name="TextBox 11" id="11"/>
-            <p:cNvSpPr txBox="true"/>
+            <p:cNvPr id="11" name="TextBox 11"/>
+            <p:cNvSpPr txBox="1"/>
             <p:nvPr/>
           </p:nvSpPr>
           <p:spPr>
@@ -5689,26 +5789,27 @@
             </a:prstGeom>
           </p:spPr>
           <p:txBody>
-            <a:bodyPr anchor="ctr" rtlCol="false" tIns="50800" lIns="50800" bIns="50800" rIns="50800"/>
+            <a:bodyPr lIns="50800" tIns="50800" rIns="50800" bIns="50800" rtlCol="0" anchor="ctr"/>
             <a:lstStyle/>
             <a:p>
-              <a:pPr algn="ctr" marL="0" indent="0" lvl="0">
+              <a:pPr marL="0" lvl="0" indent="0" algn="ctr">
                 <a:lnSpc>
                   <a:spcPts val="2659"/>
                 </a:lnSpc>
               </a:pPr>
+              <a:endParaRPr/>
             </a:p>
           </p:txBody>
         </p:sp>
       </p:grpSp>
       <p:sp>
         <p:nvSpPr>
-          <p:cNvPr name="TextBox 12" id="12"/>
-          <p:cNvSpPr txBox="true"/>
-          <p:nvPr/>
-        </p:nvSpPr>
-        <p:spPr>
-          <a:xfrm rot="0">
+          <p:cNvPr id="12" name="TextBox 12"/>
+          <p:cNvSpPr txBox="1"/>
+          <p:nvPr/>
+        </p:nvSpPr>
+        <p:spPr>
+          <a:xfrm>
             <a:off x="4206302" y="3753018"/>
             <a:ext cx="10756372" cy="1589808"/>
           </a:xfrm>
@@ -5717,18 +5818,18 @@
           </a:prstGeom>
         </p:spPr>
         <p:txBody>
-          <a:bodyPr anchor="t" rtlCol="false" tIns="0" lIns="0" bIns="0" rIns="0">
+          <a:bodyPr lIns="0" tIns="0" rIns="0" bIns="0" rtlCol="0" anchor="t">
             <a:spAutoFit/>
           </a:bodyPr>
           <a:lstStyle/>
           <a:p>
-            <a:pPr algn="just" marL="0" indent="0" lvl="0">
+            <a:pPr marL="0" lvl="0" indent="0" algn="just">
               <a:lnSpc>
                 <a:spcPts val="4247"/>
               </a:lnSpc>
             </a:pPr>
             <a:r>
-              <a:rPr lang="en-US" b="true" sz="3034">
+              <a:rPr lang="en-US" sz="3034" b="1">
                 <a:solidFill>
                   <a:srgbClr val="FFFFFF"/>
                 </a:solidFill>
@@ -5744,12 +5845,12 @@
       </p:sp>
       <p:sp>
         <p:nvSpPr>
-          <p:cNvPr name="TextBox 13" id="13"/>
-          <p:cNvSpPr txBox="true"/>
-          <p:nvPr/>
-        </p:nvSpPr>
-        <p:spPr>
-          <a:xfrm rot="0">
+          <p:cNvPr id="13" name="TextBox 13"/>
+          <p:cNvSpPr txBox="1"/>
+          <p:nvPr/>
+        </p:nvSpPr>
+        <p:spPr>
+          <a:xfrm>
             <a:off x="4554750" y="1890973"/>
             <a:ext cx="9178501" cy="1058173"/>
           </a:xfrm>
@@ -5758,18 +5859,18 @@
           </a:prstGeom>
         </p:spPr>
         <p:txBody>
-          <a:bodyPr anchor="t" rtlCol="false" tIns="0" lIns="0" bIns="0" rIns="0">
+          <a:bodyPr lIns="0" tIns="0" rIns="0" bIns="0" rtlCol="0" anchor="t">
             <a:spAutoFit/>
           </a:bodyPr>
           <a:lstStyle/>
           <a:p>
-            <a:pPr algn="ctr" marL="0" indent="0" lvl="0">
+            <a:pPr marL="0" lvl="0" indent="0" algn="ctr">
               <a:lnSpc>
                 <a:spcPts val="8694"/>
               </a:lnSpc>
             </a:pPr>
             <a:r>
-              <a:rPr lang="en-US" b="true" sz="6210">
+              <a:rPr lang="en-US" sz="6210" b="1">
                 <a:solidFill>
                   <a:srgbClr val="FFFFFF"/>
                 </a:solidFill>
@@ -5785,12 +5886,12 @@
       </p:sp>
       <p:grpSp>
         <p:nvGrpSpPr>
-          <p:cNvPr name="Group 14" id="14"/>
+          <p:cNvPr id="14" name="Group 14"/>
           <p:cNvGrpSpPr/>
           <p:nvPr/>
         </p:nvGrpSpPr>
         <p:grpSpPr>
-          <a:xfrm rot="0">
+          <a:xfrm>
             <a:off x="3325325" y="6225244"/>
             <a:ext cx="496986" cy="496986"/>
             <a:chOff x="0" y="0"/>
@@ -5799,12 +5900,12 @@
         </p:grpSpPr>
         <p:sp>
           <p:nvSpPr>
-            <p:cNvPr name="Freeform 15" id="15"/>
+            <p:cNvPr id="15" name="Freeform 15"/>
             <p:cNvSpPr/>
             <p:nvPr/>
           </p:nvSpPr>
           <p:spPr>
-            <a:xfrm flipH="false" flipV="false" rot="0">
+            <a:xfrm>
               <a:off x="0" y="0"/>
               <a:ext cx="812800" cy="812800"/>
             </a:xfrm>
@@ -5813,9 +5914,9 @@
               <a:gdLst/>
               <a:ahLst/>
               <a:cxnLst/>
-              <a:rect r="r" b="b" t="t" l="l"/>
+              <a:rect l="l" t="t" r="r" b="b"/>
               <a:pathLst>
-                <a:path h="812800" w="812800">
+                <a:path w="812800" h="812800">
                   <a:moveTo>
                     <a:pt x="406400" y="0"/>
                   </a:moveTo>
@@ -5850,8 +5951,8 @@
         </p:sp>
         <p:sp>
           <p:nvSpPr>
-            <p:cNvPr name="TextBox 16" id="16"/>
-            <p:cNvSpPr txBox="true"/>
+            <p:cNvPr id="16" name="TextBox 16"/>
+            <p:cNvSpPr txBox="1"/>
             <p:nvPr/>
           </p:nvSpPr>
           <p:spPr>
@@ -5864,46 +5965,47 @@
             </a:prstGeom>
           </p:spPr>
           <p:txBody>
-            <a:bodyPr anchor="ctr" rtlCol="false" tIns="50800" lIns="50800" bIns="50800" rIns="50800"/>
+            <a:bodyPr lIns="50800" tIns="50800" rIns="50800" bIns="50800" rtlCol="0" anchor="ctr"/>
             <a:lstStyle/>
             <a:p>
-              <a:pPr algn="ctr" marL="0" indent="0" lvl="0">
+              <a:pPr marL="0" lvl="0" indent="0" algn="ctr">
                 <a:lnSpc>
                   <a:spcPts val="2659"/>
                 </a:lnSpc>
               </a:pPr>
+              <a:endParaRPr/>
             </a:p>
           </p:txBody>
         </p:sp>
       </p:grpSp>
       <p:sp>
         <p:nvSpPr>
-          <p:cNvPr name="TextBox 17" id="17"/>
-          <p:cNvSpPr txBox="true"/>
-          <p:nvPr/>
-        </p:nvSpPr>
-        <p:spPr>
-          <a:xfrm rot="0">
+          <p:cNvPr id="17" name="TextBox 17"/>
+          <p:cNvSpPr txBox="1"/>
+          <p:nvPr/>
+        </p:nvSpPr>
+        <p:spPr>
+          <a:xfrm>
             <a:off x="4206302" y="6158569"/>
-            <a:ext cx="10756372" cy="2123208"/>
+            <a:ext cx="10756372" cy="1570686"/>
           </a:xfrm>
           <a:prstGeom prst="rect">
             <a:avLst/>
           </a:prstGeom>
         </p:spPr>
         <p:txBody>
-          <a:bodyPr anchor="t" rtlCol="false" tIns="0" lIns="0" bIns="0" rIns="0">
+          <a:bodyPr lIns="0" tIns="0" rIns="0" bIns="0" rtlCol="0" anchor="t">
             <a:spAutoFit/>
           </a:bodyPr>
           <a:lstStyle/>
           <a:p>
-            <a:pPr algn="just" marL="0" indent="0" lvl="0">
+            <a:pPr marL="0" lvl="0" indent="0" algn="just">
               <a:lnSpc>
                 <a:spcPts val="4247"/>
               </a:lnSpc>
             </a:pPr>
             <a:r>
-              <a:rPr lang="en-US" b="true" sz="3034">
+              <a:rPr lang="en-US" sz="3034" b="1" dirty="0">
                 <a:solidFill>
                   <a:srgbClr val="FFFFFF"/>
                 </a:solidFill>
@@ -5912,7 +6014,7 @@
                 <a:cs typeface="Aileron Bold"/>
                 <a:sym typeface="Aileron Bold"/>
               </a:rPr>
-              <a:t>Developers need a clean, independent, and efficient environment for collaboration and version control — one that prioritizes speed, privacy, and open-source transparency.</a:t>
+              <a:t>Developers need a clean, independent, and efficient environment for collaboration and version control; One that prioritizes speed, privacy, and transparency.</a:t>
             </a:r>
           </a:p>
         </p:txBody>
@@ -5926,13 +6028,14 @@
 </file>
 
 <file path=ppt/slides/slide4.xml><?xml version="1.0" encoding="utf-8"?>
-<p:sld xmlns:p="http://schemas.openxmlformats.org/presentationml/2006/main" xmlns:a="http://schemas.openxmlformats.org/drawingml/2006/main" xmlns:r="http://schemas.openxmlformats.org/officeDocument/2006/relationships">
+<p:sld xmlns:a="http://schemas.openxmlformats.org/drawingml/2006/main" xmlns:r="http://schemas.openxmlformats.org/officeDocument/2006/relationships" xmlns:p="http://schemas.openxmlformats.org/presentationml/2006/main">
   <p:cSld>
     <p:bg>
       <p:bgPr>
         <a:solidFill>
           <a:srgbClr val="26272B"/>
         </a:solidFill>
+        <a:effectLst/>
       </p:bgPr>
     </p:bg>
     <p:spTree>
@@ -5951,12 +6054,12 @@
       </p:grpSpPr>
       <p:sp>
         <p:nvSpPr>
-          <p:cNvPr name="Freeform 2" id="2"/>
+          <p:cNvPr id="2" name="Freeform 2"/>
           <p:cNvSpPr/>
           <p:nvPr/>
         </p:nvSpPr>
         <p:spPr>
-          <a:xfrm flipH="false" flipV="false" rot="-5400000">
+          <a:xfrm rot="-5400000">
             <a:off x="-3649725" y="8834213"/>
             <a:ext cx="7315200" cy="2025901"/>
           </a:xfrm>
@@ -5965,9 +6068,9 @@
             <a:gdLst/>
             <a:ahLst/>
             <a:cxnLst/>
-            <a:rect r="r" b="b" t="t" l="l"/>
+            <a:rect l="l" t="t" r="r" b="b"/>
             <a:pathLst>
-              <a:path h="2025901" w="7315200">
+              <a:path w="7315200" h="2025901">
                 <a:moveTo>
                   <a:pt x="0" y="0"/>
                 </a:moveTo>
@@ -5996,19 +6099,19 @@
               </a:extLst>
             </a:blip>
             <a:stretch>
-              <a:fillRect l="0" t="0" r="0" b="0"/>
+              <a:fillRect/>
             </a:stretch>
           </a:blipFill>
         </p:spPr>
       </p:sp>
       <p:sp>
         <p:nvSpPr>
-          <p:cNvPr name="Freeform 3" id="3"/>
+          <p:cNvPr id="3" name="Freeform 3"/>
           <p:cNvSpPr/>
           <p:nvPr/>
         </p:nvSpPr>
         <p:spPr>
-          <a:xfrm flipH="false" flipV="false" rot="-5400000">
+          <a:xfrm rot="-5400000">
             <a:off x="-3657600" y="-573114"/>
             <a:ext cx="7315200" cy="2025901"/>
           </a:xfrm>
@@ -6017,9 +6120,9 @@
             <a:gdLst/>
             <a:ahLst/>
             <a:cxnLst/>
-            <a:rect r="r" b="b" t="t" l="l"/>
+            <a:rect l="l" t="t" r="r" b="b"/>
             <a:pathLst>
-              <a:path h="2025901" w="7315200">
+              <a:path w="7315200" h="2025901">
                 <a:moveTo>
                   <a:pt x="0" y="0"/>
                 </a:moveTo>
@@ -6048,19 +6151,19 @@
               </a:extLst>
             </a:blip>
             <a:stretch>
-              <a:fillRect l="0" t="0" r="0" b="0"/>
+              <a:fillRect/>
             </a:stretch>
           </a:blipFill>
         </p:spPr>
       </p:sp>
       <p:sp>
         <p:nvSpPr>
-          <p:cNvPr name="Freeform 4" id="4"/>
+          <p:cNvPr id="4" name="Freeform 4"/>
           <p:cNvSpPr/>
           <p:nvPr/>
         </p:nvSpPr>
         <p:spPr>
-          <a:xfrm flipH="true" flipV="false" rot="0">
+          <a:xfrm flipH="1">
             <a:off x="-1590281" y="9258300"/>
             <a:ext cx="7315200" cy="3195406"/>
           </a:xfrm>
@@ -6069,9 +6172,9 @@
             <a:gdLst/>
             <a:ahLst/>
             <a:cxnLst/>
-            <a:rect r="r" b="b" t="t" l="l"/>
+            <a:rect l="l" t="t" r="r" b="b"/>
             <a:pathLst>
-              <a:path h="3195406" w="7315200">
+              <a:path w="7315200" h="3195406">
                 <a:moveTo>
                   <a:pt x="7315200" y="0"/>
                 </a:moveTo>
@@ -6100,19 +6203,19 @@
               </a:extLst>
             </a:blip>
             <a:stretch>
-              <a:fillRect l="0" t="0" r="0" b="0"/>
+              <a:fillRect/>
             </a:stretch>
           </a:blipFill>
         </p:spPr>
       </p:sp>
       <p:sp>
         <p:nvSpPr>
-          <p:cNvPr name="Freeform 5" id="5"/>
+          <p:cNvPr id="5" name="Freeform 5"/>
           <p:cNvSpPr/>
           <p:nvPr/>
         </p:nvSpPr>
         <p:spPr>
-          <a:xfrm flipH="false" flipV="false" rot="-5400000">
+          <a:xfrm rot="-5400000">
             <a:off x="14634337" y="8834213"/>
             <a:ext cx="7315200" cy="2025901"/>
           </a:xfrm>
@@ -6121,9 +6224,9 @@
             <a:gdLst/>
             <a:ahLst/>
             <a:cxnLst/>
-            <a:rect r="r" b="b" t="t" l="l"/>
+            <a:rect l="l" t="t" r="r" b="b"/>
             <a:pathLst>
-              <a:path h="2025901" w="7315200">
+              <a:path w="7315200" h="2025901">
                 <a:moveTo>
                   <a:pt x="0" y="0"/>
                 </a:moveTo>
@@ -6152,19 +6255,19 @@
               </a:extLst>
             </a:blip>
             <a:stretch>
-              <a:fillRect l="0" t="0" r="0" b="0"/>
+              <a:fillRect/>
             </a:stretch>
           </a:blipFill>
         </p:spPr>
       </p:sp>
       <p:sp>
         <p:nvSpPr>
-          <p:cNvPr name="Freeform 6" id="6"/>
+          <p:cNvPr id="6" name="Freeform 6"/>
           <p:cNvSpPr/>
           <p:nvPr/>
         </p:nvSpPr>
         <p:spPr>
-          <a:xfrm flipH="false" flipV="false" rot="-5400000">
+          <a:xfrm rot="-5400000">
             <a:off x="14626463" y="-573114"/>
             <a:ext cx="7315200" cy="2025901"/>
           </a:xfrm>
@@ -6173,9 +6276,9 @@
             <a:gdLst/>
             <a:ahLst/>
             <a:cxnLst/>
-            <a:rect r="r" b="b" t="t" l="l"/>
+            <a:rect l="l" t="t" r="r" b="b"/>
             <a:pathLst>
-              <a:path h="2025901" w="7315200">
+              <a:path w="7315200" h="2025901">
                 <a:moveTo>
                   <a:pt x="0" y="0"/>
                 </a:moveTo>
@@ -6204,19 +6307,19 @@
               </a:extLst>
             </a:blip>
             <a:stretch>
-              <a:fillRect l="0" t="0" r="0" b="0"/>
+              <a:fillRect/>
             </a:stretch>
           </a:blipFill>
         </p:spPr>
       </p:sp>
       <p:sp>
         <p:nvSpPr>
-          <p:cNvPr name="Freeform 7" id="7"/>
+          <p:cNvPr id="7" name="Freeform 7"/>
           <p:cNvSpPr/>
           <p:nvPr/>
         </p:nvSpPr>
         <p:spPr>
-          <a:xfrm flipH="false" flipV="true" rot="0">
+          <a:xfrm flipV="1">
             <a:off x="12563081" y="-2166706"/>
             <a:ext cx="7315200" cy="3195406"/>
           </a:xfrm>
@@ -6225,9 +6328,9 @@
             <a:gdLst/>
             <a:ahLst/>
             <a:cxnLst/>
-            <a:rect r="r" b="b" t="t" l="l"/>
+            <a:rect l="l" t="t" r="r" b="b"/>
             <a:pathLst>
-              <a:path h="3195406" w="7315200">
+              <a:path w="7315200" h="3195406">
                 <a:moveTo>
                   <a:pt x="0" y="3195406"/>
                 </a:moveTo>
@@ -6256,19 +6359,19 @@
               </a:extLst>
             </a:blip>
             <a:stretch>
-              <a:fillRect l="0" t="0" r="0" b="0"/>
+              <a:fillRect/>
             </a:stretch>
           </a:blipFill>
         </p:spPr>
       </p:sp>
       <p:sp>
         <p:nvSpPr>
-          <p:cNvPr name="TextBox 8" id="8"/>
-          <p:cNvSpPr txBox="true"/>
-          <p:nvPr/>
-        </p:nvSpPr>
-        <p:spPr>
-          <a:xfrm rot="0">
+          <p:cNvPr id="8" name="TextBox 8"/>
+          <p:cNvSpPr txBox="1"/>
+          <p:nvPr/>
+        </p:nvSpPr>
+        <p:spPr>
+          <a:xfrm>
             <a:off x="15481814" y="8728040"/>
             <a:ext cx="1477734" cy="860276"/>
           </a:xfrm>
@@ -6277,18 +6380,18 @@
           </a:prstGeom>
         </p:spPr>
         <p:txBody>
-          <a:bodyPr anchor="t" rtlCol="false" tIns="0" lIns="0" bIns="0" rIns="0">
+          <a:bodyPr lIns="0" tIns="0" rIns="0" bIns="0" rtlCol="0" anchor="t">
             <a:spAutoFit/>
           </a:bodyPr>
           <a:lstStyle/>
           <a:p>
-            <a:pPr algn="ctr" marL="0" indent="0" lvl="0">
+            <a:pPr marL="0" lvl="0" indent="0" algn="ctr">
               <a:lnSpc>
                 <a:spcPts val="7183"/>
               </a:lnSpc>
             </a:pPr>
             <a:r>
-              <a:rPr lang="en-US" b="true" sz="5130">
+              <a:rPr lang="en-US" sz="5130" b="1">
                 <a:solidFill>
                   <a:srgbClr val="26272B"/>
                 </a:solidFill>
@@ -6304,12 +6407,12 @@
       </p:sp>
       <p:sp>
         <p:nvSpPr>
-          <p:cNvPr name="TextBox 9" id="9"/>
-          <p:cNvSpPr txBox="true"/>
-          <p:nvPr/>
-        </p:nvSpPr>
-        <p:spPr>
-          <a:xfrm rot="0">
+          <p:cNvPr id="9" name="TextBox 9"/>
+          <p:cNvSpPr txBox="1"/>
+          <p:nvPr/>
+        </p:nvSpPr>
+        <p:spPr>
+          <a:xfrm>
             <a:off x="4554750" y="2243819"/>
             <a:ext cx="9178501" cy="1062150"/>
           </a:xfrm>
@@ -6318,18 +6421,18 @@
           </a:prstGeom>
         </p:spPr>
         <p:txBody>
-          <a:bodyPr anchor="t" rtlCol="false" tIns="0" lIns="0" bIns="0" rIns="0">
+          <a:bodyPr lIns="0" tIns="0" rIns="0" bIns="0" rtlCol="0" anchor="t">
             <a:spAutoFit/>
           </a:bodyPr>
           <a:lstStyle/>
           <a:p>
-            <a:pPr algn="ctr" marL="0" indent="0" lvl="0">
+            <a:pPr marL="0" lvl="0" indent="0" algn="ctr">
               <a:lnSpc>
                 <a:spcPts val="8632"/>
               </a:lnSpc>
             </a:pPr>
             <a:r>
-              <a:rPr lang="en-US" b="true" sz="6165">
+              <a:rPr lang="en-US" sz="6165" b="1">
                 <a:solidFill>
                   <a:srgbClr val="FFFFFF"/>
                 </a:solidFill>
@@ -6345,12 +6448,12 @@
       </p:sp>
       <p:sp>
         <p:nvSpPr>
-          <p:cNvPr name="TextBox 10" id="10"/>
-          <p:cNvSpPr txBox="true"/>
-          <p:nvPr/>
-        </p:nvSpPr>
-        <p:spPr>
-          <a:xfrm rot="0">
+          <p:cNvPr id="10" name="TextBox 10"/>
+          <p:cNvSpPr txBox="1"/>
+          <p:nvPr/>
+        </p:nvSpPr>
+        <p:spPr>
+          <a:xfrm>
             <a:off x="1849124" y="5272336"/>
             <a:ext cx="6909113" cy="2461882"/>
           </a:xfrm>
@@ -6359,12 +6462,12 @@
           </a:prstGeom>
         </p:spPr>
         <p:txBody>
-          <a:bodyPr anchor="t" rtlCol="false" tIns="0" lIns="0" bIns="0" rIns="0">
+          <a:bodyPr lIns="0" tIns="0" rIns="0" bIns="0" rtlCol="0" anchor="t">
             <a:spAutoFit/>
           </a:bodyPr>
           <a:lstStyle/>
           <a:p>
-            <a:pPr algn="l" marL="610031" indent="-305016" lvl="1">
+            <a:pPr marL="610031" lvl="1" indent="-305016" algn="l">
               <a:lnSpc>
                 <a:spcPts val="3955"/>
               </a:lnSpc>
@@ -6372,7 +6475,7 @@
               <a:buChar char="•"/>
             </a:pPr>
             <a:r>
-              <a:rPr lang="en-US" b="true" sz="2825">
+              <a:rPr lang="en-US" sz="2825" b="1">
                 <a:solidFill>
                   <a:srgbClr val="FFFFFF"/>
                 </a:solidFill>
@@ -6385,7 +6488,7 @@
             </a:r>
           </a:p>
           <a:p>
-            <a:pPr algn="l" marL="610031" indent="-305016" lvl="1">
+            <a:pPr marL="610031" lvl="1" indent="-305016" algn="l">
               <a:lnSpc>
                 <a:spcPts val="3955"/>
               </a:lnSpc>
@@ -6393,7 +6496,7 @@
               <a:buChar char="•"/>
             </a:pPr>
             <a:r>
-              <a:rPr lang="en-US" b="true" sz="2825">
+              <a:rPr lang="en-US" sz="2825" b="1">
                 <a:solidFill>
                   <a:srgbClr val="FFFFFF"/>
                 </a:solidFill>
@@ -6406,7 +6509,7 @@
             </a:r>
           </a:p>
           <a:p>
-            <a:pPr algn="l" marL="610031" indent="-305016" lvl="1">
+            <a:pPr marL="610031" lvl="1" indent="-305016" algn="l">
               <a:lnSpc>
                 <a:spcPts val="3955"/>
               </a:lnSpc>
@@ -6414,7 +6517,7 @@
               <a:buChar char="•"/>
             </a:pPr>
             <a:r>
-              <a:rPr lang="en-US" b="true" sz="2825">
+              <a:rPr lang="en-US" sz="2825" b="1">
                 <a:solidFill>
                   <a:srgbClr val="FFFFFF"/>
                 </a:solidFill>
@@ -6427,7 +6530,7 @@
             </a:r>
           </a:p>
           <a:p>
-            <a:pPr algn="l" marL="610031" indent="-305016" lvl="1">
+            <a:pPr marL="610031" lvl="1" indent="-305016" algn="l">
               <a:lnSpc>
                 <a:spcPts val="3955"/>
               </a:lnSpc>
@@ -6435,7 +6538,7 @@
               <a:buChar char="•"/>
             </a:pPr>
             <a:r>
-              <a:rPr lang="en-US" b="true" sz="2825">
+              <a:rPr lang="en-US" sz="2825" b="1">
                 <a:solidFill>
                   <a:srgbClr val="FFFFFF"/>
                 </a:solidFill>
@@ -6451,12 +6554,12 @@
       </p:sp>
       <p:sp>
         <p:nvSpPr>
-          <p:cNvPr name="TextBox 11" id="11"/>
-          <p:cNvSpPr txBox="true"/>
-          <p:nvPr/>
-        </p:nvSpPr>
-        <p:spPr>
-          <a:xfrm rot="0">
+          <p:cNvPr id="11" name="TextBox 11"/>
+          <p:cNvSpPr txBox="1"/>
+          <p:nvPr/>
+        </p:nvSpPr>
+        <p:spPr>
+          <a:xfrm>
             <a:off x="2112417" y="3961862"/>
             <a:ext cx="4884666" cy="862322"/>
           </a:xfrm>
@@ -6465,18 +6568,18 @@
           </a:prstGeom>
         </p:spPr>
         <p:txBody>
-          <a:bodyPr anchor="t" rtlCol="false" tIns="0" lIns="0" bIns="0" rIns="0">
+          <a:bodyPr lIns="0" tIns="0" rIns="0" bIns="0" rtlCol="0" anchor="t">
             <a:spAutoFit/>
           </a:bodyPr>
           <a:lstStyle/>
           <a:p>
-            <a:pPr algn="l" marL="0" indent="0" lvl="0">
+            <a:pPr marL="0" lvl="0" indent="0" algn="l">
               <a:lnSpc>
                 <a:spcPts val="7070"/>
               </a:lnSpc>
             </a:pPr>
             <a:r>
-              <a:rPr lang="en-US" b="true" sz="5050">
+              <a:rPr lang="en-US" sz="5050" b="1">
                 <a:solidFill>
                   <a:srgbClr val="FFFFFF"/>
                 </a:solidFill>
@@ -6492,12 +6595,12 @@
       </p:sp>
       <p:sp>
         <p:nvSpPr>
-          <p:cNvPr name="TextBox 12" id="12"/>
-          <p:cNvSpPr txBox="true"/>
-          <p:nvPr/>
-        </p:nvSpPr>
-        <p:spPr>
-          <a:xfrm rot="0">
+          <p:cNvPr id="12" name="TextBox 12"/>
+          <p:cNvSpPr txBox="1"/>
+          <p:nvPr/>
+        </p:nvSpPr>
+        <p:spPr>
+          <a:xfrm>
             <a:off x="2581662" y="3961862"/>
             <a:ext cx="1049196" cy="862322"/>
           </a:xfrm>
@@ -6506,41 +6609,42 @@
           </a:prstGeom>
         </p:spPr>
         <p:txBody>
-          <a:bodyPr anchor="t" rtlCol="false" tIns="0" lIns="0" bIns="0" rIns="0">
+          <a:bodyPr lIns="0" tIns="0" rIns="0" bIns="0" rtlCol="0" anchor="t">
             <a:spAutoFit/>
           </a:bodyPr>
           <a:lstStyle/>
           <a:p>
-            <a:pPr algn="ctr" marL="0" indent="0" lvl="0">
+            <a:pPr marL="0" lvl="0" indent="0" algn="ctr">
               <a:lnSpc>
                 <a:spcPts val="7070"/>
               </a:lnSpc>
             </a:pPr>
-          </a:p>
-        </p:txBody>
-      </p:sp>
-      <p:sp>
-        <p:nvSpPr>
-          <p:cNvPr name="TextBox 13" id="13"/>
-          <p:cNvSpPr txBox="true"/>
-          <p:nvPr/>
-        </p:nvSpPr>
-        <p:spPr>
-          <a:xfrm rot="0">
-            <a:off x="9529762" y="5272336"/>
-            <a:ext cx="7429785" cy="2461882"/>
+            <a:endParaRPr/>
+          </a:p>
+        </p:txBody>
+      </p:sp>
+      <p:sp>
+        <p:nvSpPr>
+          <p:cNvPr id="13" name="TextBox 13"/>
+          <p:cNvSpPr txBox="1"/>
+          <p:nvPr/>
+        </p:nvSpPr>
+        <p:spPr>
+          <a:xfrm>
+            <a:off x="9562586" y="4863728"/>
+            <a:ext cx="7429785" cy="1493999"/>
           </a:xfrm>
           <a:prstGeom prst="rect">
             <a:avLst/>
           </a:prstGeom>
         </p:spPr>
         <p:txBody>
-          <a:bodyPr anchor="t" rtlCol="false" tIns="0" lIns="0" bIns="0" rIns="0">
+          <a:bodyPr lIns="0" tIns="0" rIns="0" bIns="0" rtlCol="0" anchor="t">
             <a:spAutoFit/>
           </a:bodyPr>
           <a:lstStyle/>
           <a:p>
-            <a:pPr algn="l" marL="610031" indent="-305016" lvl="1">
+            <a:pPr marL="610031" lvl="1" indent="-305016" algn="l">
               <a:lnSpc>
                 <a:spcPts val="3955"/>
               </a:lnSpc>
@@ -6548,7 +6652,7 @@
               <a:buChar char="•"/>
             </a:pPr>
             <a:r>
-              <a:rPr lang="en-US" b="true" sz="2825">
+              <a:rPr lang="en-US" sz="2825" b="1" dirty="0">
                 <a:solidFill>
                   <a:srgbClr val="FFFFFF"/>
                 </a:solidFill>
@@ -6561,7 +6665,7 @@
             </a:r>
           </a:p>
           <a:p>
-            <a:pPr algn="l" marL="610031" indent="-305016" lvl="1">
+            <a:pPr marL="610031" lvl="1" indent="-305016" algn="l">
               <a:lnSpc>
                 <a:spcPts val="3955"/>
               </a:lnSpc>
@@ -6569,7 +6673,7 @@
               <a:buChar char="•"/>
             </a:pPr>
             <a:r>
-              <a:rPr lang="en-US" b="true" sz="2825">
+              <a:rPr lang="en-US" sz="2825" b="1" dirty="0">
                 <a:solidFill>
                   <a:srgbClr val="FFFFFF"/>
                 </a:solidFill>
@@ -6578,11 +6682,157 @@
                 <a:cs typeface="Aileron Bold"/>
                 <a:sym typeface="Aileron Bold"/>
               </a:rPr>
-              <a:t>No AI tools integrated</a:t>
-            </a:r>
-          </a:p>
-          <a:p>
-            <a:pPr algn="l" marL="610031" indent="-305016" lvl="1">
+              <a:t>No AI tools integration</a:t>
+            </a:r>
+          </a:p>
+        </p:txBody>
+      </p:sp>
+      <p:sp>
+        <p:nvSpPr>
+          <p:cNvPr id="14" name="TextBox 14"/>
+          <p:cNvSpPr txBox="1"/>
+          <p:nvPr/>
+        </p:nvSpPr>
+        <p:spPr>
+          <a:xfrm>
+            <a:off x="10032431" y="3940184"/>
+            <a:ext cx="4884666" cy="862322"/>
+          </a:xfrm>
+          <a:prstGeom prst="rect">
+            <a:avLst/>
+          </a:prstGeom>
+        </p:spPr>
+        <p:txBody>
+          <a:bodyPr lIns="0" tIns="0" rIns="0" bIns="0" rtlCol="0" anchor="t">
+            <a:spAutoFit/>
+          </a:bodyPr>
+          <a:lstStyle/>
+          <a:p>
+            <a:pPr marL="0" lvl="0" indent="0" algn="l">
+              <a:lnSpc>
+                <a:spcPts val="7070"/>
+              </a:lnSpc>
+            </a:pPr>
+            <a:r>
+              <a:rPr lang="en-US" sz="5050" b="1" dirty="0">
+                <a:solidFill>
+                  <a:srgbClr val="FFFFFF"/>
+                </a:solidFill>
+                <a:latin typeface="Clear Sans Bold"/>
+                <a:ea typeface="Clear Sans Bold"/>
+                <a:cs typeface="Clear Sans Bold"/>
+                <a:sym typeface="Clear Sans Bold"/>
+              </a:rPr>
+              <a:t>SCOPE</a:t>
+            </a:r>
+          </a:p>
+        </p:txBody>
+      </p:sp>
+      <p:sp>
+        <p:nvSpPr>
+          <p:cNvPr id="15" name="TextBox 15"/>
+          <p:cNvSpPr txBox="1"/>
+          <p:nvPr/>
+        </p:nvSpPr>
+        <p:spPr>
+          <a:xfrm>
+            <a:off x="9529762" y="3961862"/>
+            <a:ext cx="1049196" cy="862322"/>
+          </a:xfrm>
+          <a:prstGeom prst="rect">
+            <a:avLst/>
+          </a:prstGeom>
+        </p:spPr>
+        <p:txBody>
+          <a:bodyPr lIns="0" tIns="0" rIns="0" bIns="0" rtlCol="0" anchor="t">
+            <a:spAutoFit/>
+          </a:bodyPr>
+          <a:lstStyle/>
+          <a:p>
+            <a:pPr marL="0" lvl="0" indent="0" algn="ctr">
+              <a:lnSpc>
+                <a:spcPts val="7070"/>
+              </a:lnSpc>
+            </a:pPr>
+            <a:endParaRPr/>
+          </a:p>
+        </p:txBody>
+      </p:sp>
+      <p:sp>
+        <p:nvSpPr>
+          <p:cNvPr id="16" name="TextBox 14">
+            <a:extLst>
+              <a:ext uri="{FF2B5EF4-FFF2-40B4-BE49-F238E27FC236}">
+                <a16:creationId xmlns:a16="http://schemas.microsoft.com/office/drawing/2014/main" id="{D7EAF9FD-0835-4B3A-9942-949B2C5D6FAF}"/>
+              </a:ext>
+            </a:extLst>
+          </p:cNvPr>
+          <p:cNvSpPr txBox="1"/>
+          <p:nvPr/>
+        </p:nvSpPr>
+        <p:spPr>
+          <a:xfrm>
+            <a:off x="10032431" y="6517346"/>
+            <a:ext cx="4884666" cy="840936"/>
+          </a:xfrm>
+          <a:prstGeom prst="rect">
+            <a:avLst/>
+          </a:prstGeom>
+        </p:spPr>
+        <p:txBody>
+          <a:bodyPr lIns="0" tIns="0" rIns="0" bIns="0" rtlCol="0" anchor="t">
+            <a:spAutoFit/>
+          </a:bodyPr>
+          <a:lstStyle/>
+          <a:p>
+            <a:pPr marL="0" lvl="0" indent="0" algn="l">
+              <a:lnSpc>
+                <a:spcPts val="7070"/>
+              </a:lnSpc>
+            </a:pPr>
+            <a:r>
+              <a:rPr lang="en-US" sz="5050" b="1" dirty="0">
+                <a:solidFill>
+                  <a:srgbClr val="FFFFFF"/>
+                </a:solidFill>
+                <a:latin typeface="Clear Sans Bold"/>
+                <a:ea typeface="Clear Sans Bold"/>
+                <a:cs typeface="Clear Sans Bold"/>
+                <a:sym typeface="Clear Sans Bold"/>
+              </a:rPr>
+              <a:t>LIMITS</a:t>
+            </a:r>
+          </a:p>
+        </p:txBody>
+      </p:sp>
+      <p:sp>
+        <p:nvSpPr>
+          <p:cNvPr id="17" name="TextBox 13">
+            <a:extLst>
+              <a:ext uri="{FF2B5EF4-FFF2-40B4-BE49-F238E27FC236}">
+                <a16:creationId xmlns:a16="http://schemas.microsoft.com/office/drawing/2014/main" id="{C2B8E195-7542-44EC-99F7-0334B14F0766}"/>
+              </a:ext>
+            </a:extLst>
+          </p:cNvPr>
+          <p:cNvSpPr txBox="1"/>
+          <p:nvPr/>
+        </p:nvSpPr>
+        <p:spPr>
+          <a:xfrm>
+            <a:off x="9489888" y="7510281"/>
+            <a:ext cx="7429785" cy="981038"/>
+          </a:xfrm>
+          <a:prstGeom prst="rect">
+            <a:avLst/>
+          </a:prstGeom>
+        </p:spPr>
+        <p:txBody>
+          <a:bodyPr lIns="0" tIns="0" rIns="0" bIns="0" rtlCol="0" anchor="t">
+            <a:spAutoFit/>
+          </a:bodyPr>
+          <a:lstStyle/>
+          <a:p>
+            <a:pPr marL="610031" lvl="1" indent="-305016" algn="l">
               <a:lnSpc>
                 <a:spcPts val="3955"/>
               </a:lnSpc>
@@ -6590,7 +6840,7 @@
               <a:buChar char="•"/>
             </a:pPr>
             <a:r>
-              <a:rPr lang="en-US" b="true" sz="2825">
+              <a:rPr lang="en-US" sz="2825" b="1" dirty="0">
                 <a:solidFill>
                   <a:srgbClr val="FFFFFF"/>
                 </a:solidFill>
@@ -6603,7 +6853,7 @@
             </a:r>
           </a:p>
           <a:p>
-            <a:pPr algn="l" marL="610031" indent="-305016" lvl="1">
+            <a:pPr marL="610031" lvl="1" indent="-305016" algn="l">
               <a:lnSpc>
                 <a:spcPts val="3955"/>
               </a:lnSpc>
@@ -6611,7 +6861,7 @@
               <a:buChar char="•"/>
             </a:pPr>
             <a:r>
-              <a:rPr lang="en-US" b="true" sz="2825">
+              <a:rPr lang="en-US" sz="2825" b="1" dirty="0">
                 <a:solidFill>
                   <a:srgbClr val="FFFFFF"/>
                 </a:solidFill>
@@ -6622,76 +6872,6 @@
               </a:rPr>
               <a:t>Advanced features excluded</a:t>
             </a:r>
-          </a:p>
-        </p:txBody>
-      </p:sp>
-      <p:sp>
-        <p:nvSpPr>
-          <p:cNvPr name="TextBox 14" id="14"/>
-          <p:cNvSpPr txBox="true"/>
-          <p:nvPr/>
-        </p:nvSpPr>
-        <p:spPr>
-          <a:xfrm rot="0">
-            <a:off x="11290918" y="3961862"/>
-            <a:ext cx="4884666" cy="862322"/>
-          </a:xfrm>
-          <a:prstGeom prst="rect">
-            <a:avLst/>
-          </a:prstGeom>
-        </p:spPr>
-        <p:txBody>
-          <a:bodyPr anchor="t" rtlCol="false" tIns="0" lIns="0" bIns="0" rIns="0">
-            <a:spAutoFit/>
-          </a:bodyPr>
-          <a:lstStyle/>
-          <a:p>
-            <a:pPr algn="l" marL="0" indent="0" lvl="0">
-              <a:lnSpc>
-                <a:spcPts val="7070"/>
-              </a:lnSpc>
-            </a:pPr>
-            <a:r>
-              <a:rPr lang="en-US" b="true" sz="5050">
-                <a:solidFill>
-                  <a:srgbClr val="FFFFFF"/>
-                </a:solidFill>
-                <a:latin typeface="Clear Sans Bold"/>
-                <a:ea typeface="Clear Sans Bold"/>
-                <a:cs typeface="Clear Sans Bold"/>
-                <a:sym typeface="Clear Sans Bold"/>
-              </a:rPr>
-              <a:t>SCOPE &amp; LIMITS</a:t>
-            </a:r>
-          </a:p>
-        </p:txBody>
-      </p:sp>
-      <p:sp>
-        <p:nvSpPr>
-          <p:cNvPr name="TextBox 15" id="15"/>
-          <p:cNvSpPr txBox="true"/>
-          <p:nvPr/>
-        </p:nvSpPr>
-        <p:spPr>
-          <a:xfrm rot="0">
-            <a:off x="9529762" y="3961862"/>
-            <a:ext cx="1049196" cy="862322"/>
-          </a:xfrm>
-          <a:prstGeom prst="rect">
-            <a:avLst/>
-          </a:prstGeom>
-        </p:spPr>
-        <p:txBody>
-          <a:bodyPr anchor="t" rtlCol="false" tIns="0" lIns="0" bIns="0" rIns="0">
-            <a:spAutoFit/>
-          </a:bodyPr>
-          <a:lstStyle/>
-          <a:p>
-            <a:pPr algn="ctr" marL="0" indent="0" lvl="0">
-              <a:lnSpc>
-                <a:spcPts val="7070"/>
-              </a:lnSpc>
-            </a:pPr>
           </a:p>
         </p:txBody>
       </p:sp>
@@ -6704,13 +6884,14 @@
 </file>
 
 <file path=ppt/slides/slide5.xml><?xml version="1.0" encoding="utf-8"?>
-<p:sld xmlns:p="http://schemas.openxmlformats.org/presentationml/2006/main" xmlns:a="http://schemas.openxmlformats.org/drawingml/2006/main" xmlns:r="http://schemas.openxmlformats.org/officeDocument/2006/relationships">
+<p:sld xmlns:a="http://schemas.openxmlformats.org/drawingml/2006/main" xmlns:r="http://schemas.openxmlformats.org/officeDocument/2006/relationships" xmlns:p="http://schemas.openxmlformats.org/presentationml/2006/main">
   <p:cSld>
     <p:bg>
       <p:bgPr>
         <a:solidFill>
           <a:srgbClr val="26272B"/>
         </a:solidFill>
+        <a:effectLst/>
       </p:bgPr>
     </p:bg>
     <p:spTree>
@@ -6729,12 +6910,12 @@
       </p:grpSpPr>
       <p:sp>
         <p:nvSpPr>
-          <p:cNvPr name="Freeform 2" id="2"/>
+          <p:cNvPr id="2" name="Freeform 2"/>
           <p:cNvSpPr/>
           <p:nvPr/>
         </p:nvSpPr>
         <p:spPr>
-          <a:xfrm flipH="false" flipV="false" rot="-5400000">
+          <a:xfrm rot="-5400000">
             <a:off x="-3649725" y="8834213"/>
             <a:ext cx="7315200" cy="2025901"/>
           </a:xfrm>
@@ -6743,9 +6924,9 @@
             <a:gdLst/>
             <a:ahLst/>
             <a:cxnLst/>
-            <a:rect r="r" b="b" t="t" l="l"/>
+            <a:rect l="l" t="t" r="r" b="b"/>
             <a:pathLst>
-              <a:path h="2025901" w="7315200">
+              <a:path w="7315200" h="2025901">
                 <a:moveTo>
                   <a:pt x="0" y="0"/>
                 </a:moveTo>
@@ -6774,19 +6955,19 @@
               </a:extLst>
             </a:blip>
             <a:stretch>
-              <a:fillRect l="0" t="0" r="0" b="0"/>
+              <a:fillRect/>
             </a:stretch>
           </a:blipFill>
         </p:spPr>
       </p:sp>
       <p:sp>
         <p:nvSpPr>
-          <p:cNvPr name="Freeform 3" id="3"/>
+          <p:cNvPr id="3" name="Freeform 3"/>
           <p:cNvSpPr/>
           <p:nvPr/>
         </p:nvSpPr>
         <p:spPr>
-          <a:xfrm flipH="false" flipV="false" rot="-5400000">
+          <a:xfrm rot="-5400000">
             <a:off x="-3657600" y="-573114"/>
             <a:ext cx="7315200" cy="2025901"/>
           </a:xfrm>
@@ -6795,9 +6976,9 @@
             <a:gdLst/>
             <a:ahLst/>
             <a:cxnLst/>
-            <a:rect r="r" b="b" t="t" l="l"/>
+            <a:rect l="l" t="t" r="r" b="b"/>
             <a:pathLst>
-              <a:path h="2025901" w="7315200">
+              <a:path w="7315200" h="2025901">
                 <a:moveTo>
                   <a:pt x="0" y="0"/>
                 </a:moveTo>
@@ -6826,19 +7007,19 @@
               </a:extLst>
             </a:blip>
             <a:stretch>
-              <a:fillRect l="0" t="0" r="0" b="0"/>
+              <a:fillRect/>
             </a:stretch>
           </a:blipFill>
         </p:spPr>
       </p:sp>
       <p:sp>
         <p:nvSpPr>
-          <p:cNvPr name="Freeform 4" id="4"/>
+          <p:cNvPr id="4" name="Freeform 4"/>
           <p:cNvSpPr/>
           <p:nvPr/>
         </p:nvSpPr>
         <p:spPr>
-          <a:xfrm flipH="true" flipV="false" rot="0">
+          <a:xfrm flipH="1">
             <a:off x="-1590281" y="9258300"/>
             <a:ext cx="7315200" cy="3195406"/>
           </a:xfrm>
@@ -6847,9 +7028,9 @@
             <a:gdLst/>
             <a:ahLst/>
             <a:cxnLst/>
-            <a:rect r="r" b="b" t="t" l="l"/>
+            <a:rect l="l" t="t" r="r" b="b"/>
             <a:pathLst>
-              <a:path h="3195406" w="7315200">
+              <a:path w="7315200" h="3195406">
                 <a:moveTo>
                   <a:pt x="7315200" y="0"/>
                 </a:moveTo>
@@ -6878,19 +7059,19 @@
               </a:extLst>
             </a:blip>
             <a:stretch>
-              <a:fillRect l="0" t="0" r="0" b="0"/>
+              <a:fillRect/>
             </a:stretch>
           </a:blipFill>
         </p:spPr>
       </p:sp>
       <p:sp>
         <p:nvSpPr>
-          <p:cNvPr name="Freeform 5" id="5"/>
+          <p:cNvPr id="5" name="Freeform 5"/>
           <p:cNvSpPr/>
           <p:nvPr/>
         </p:nvSpPr>
         <p:spPr>
-          <a:xfrm flipH="false" flipV="false" rot="-5400000">
+          <a:xfrm rot="-5400000">
             <a:off x="14634337" y="8834213"/>
             <a:ext cx="7315200" cy="2025901"/>
           </a:xfrm>
@@ -6899,9 +7080,9 @@
             <a:gdLst/>
             <a:ahLst/>
             <a:cxnLst/>
-            <a:rect r="r" b="b" t="t" l="l"/>
+            <a:rect l="l" t="t" r="r" b="b"/>
             <a:pathLst>
-              <a:path h="2025901" w="7315200">
+              <a:path w="7315200" h="2025901">
                 <a:moveTo>
                   <a:pt x="0" y="0"/>
                 </a:moveTo>
@@ -6930,19 +7111,19 @@
               </a:extLst>
             </a:blip>
             <a:stretch>
-              <a:fillRect l="0" t="0" r="0" b="0"/>
+              <a:fillRect/>
             </a:stretch>
           </a:blipFill>
         </p:spPr>
       </p:sp>
       <p:sp>
         <p:nvSpPr>
-          <p:cNvPr name="Freeform 6" id="6"/>
+          <p:cNvPr id="6" name="Freeform 6"/>
           <p:cNvSpPr/>
           <p:nvPr/>
         </p:nvSpPr>
         <p:spPr>
-          <a:xfrm flipH="false" flipV="false" rot="-5400000">
+          <a:xfrm rot="-5400000">
             <a:off x="14626463" y="-573114"/>
             <a:ext cx="7315200" cy="2025901"/>
           </a:xfrm>
@@ -6951,9 +7132,9 @@
             <a:gdLst/>
             <a:ahLst/>
             <a:cxnLst/>
-            <a:rect r="r" b="b" t="t" l="l"/>
+            <a:rect l="l" t="t" r="r" b="b"/>
             <a:pathLst>
-              <a:path h="2025901" w="7315200">
+              <a:path w="7315200" h="2025901">
                 <a:moveTo>
                   <a:pt x="0" y="0"/>
                 </a:moveTo>
@@ -6982,19 +7163,19 @@
               </a:extLst>
             </a:blip>
             <a:stretch>
-              <a:fillRect l="0" t="0" r="0" b="0"/>
+              <a:fillRect/>
             </a:stretch>
           </a:blipFill>
         </p:spPr>
       </p:sp>
       <p:sp>
         <p:nvSpPr>
-          <p:cNvPr name="Freeform 7" id="7"/>
+          <p:cNvPr id="7" name="Freeform 7"/>
           <p:cNvSpPr/>
           <p:nvPr/>
         </p:nvSpPr>
         <p:spPr>
-          <a:xfrm flipH="false" flipV="true" rot="0">
+          <a:xfrm flipV="1">
             <a:off x="12563081" y="-2166706"/>
             <a:ext cx="7315200" cy="3195406"/>
           </a:xfrm>
@@ -7003,9 +7184,9 @@
             <a:gdLst/>
             <a:ahLst/>
             <a:cxnLst/>
-            <a:rect r="r" b="b" t="t" l="l"/>
+            <a:rect l="l" t="t" r="r" b="b"/>
             <a:pathLst>
-              <a:path h="3195406" w="7315200">
+              <a:path w="7315200" h="3195406">
                 <a:moveTo>
                   <a:pt x="0" y="3195406"/>
                 </a:moveTo>
@@ -7034,19 +7215,19 @@
               </a:extLst>
             </a:blip>
             <a:stretch>
-              <a:fillRect l="0" t="0" r="0" b="0"/>
+              <a:fillRect/>
             </a:stretch>
           </a:blipFill>
         </p:spPr>
       </p:sp>
       <p:sp>
         <p:nvSpPr>
-          <p:cNvPr name="TextBox 8" id="8"/>
-          <p:cNvSpPr txBox="true"/>
-          <p:nvPr/>
-        </p:nvSpPr>
-        <p:spPr>
-          <a:xfrm rot="0">
+          <p:cNvPr id="8" name="TextBox 8"/>
+          <p:cNvSpPr txBox="1"/>
+          <p:nvPr/>
+        </p:nvSpPr>
+        <p:spPr>
+          <a:xfrm>
             <a:off x="15481814" y="8708990"/>
             <a:ext cx="1477734" cy="993937"/>
           </a:xfrm>
@@ -7055,18 +7236,18 @@
           </a:prstGeom>
         </p:spPr>
         <p:txBody>
-          <a:bodyPr anchor="t" rtlCol="false" tIns="0" lIns="0" bIns="0" rIns="0">
+          <a:bodyPr lIns="0" tIns="0" rIns="0" bIns="0" rtlCol="0" anchor="t">
             <a:spAutoFit/>
           </a:bodyPr>
           <a:lstStyle/>
           <a:p>
-            <a:pPr algn="ctr" marL="0" indent="0" lvl="0">
+            <a:pPr marL="0" lvl="0" indent="0" algn="ctr">
               <a:lnSpc>
                 <a:spcPts val="8216"/>
               </a:lnSpc>
             </a:pPr>
             <a:r>
-              <a:rPr lang="en-US" b="true" sz="5868">
+              <a:rPr lang="en-US" sz="5868" b="1">
                 <a:solidFill>
                   <a:srgbClr val="26272B"/>
                 </a:solidFill>
@@ -7082,12 +7263,12 @@
       </p:sp>
       <p:sp>
         <p:nvSpPr>
-          <p:cNvPr name="TextBox 9" id="9"/>
-          <p:cNvSpPr txBox="true"/>
-          <p:nvPr/>
-        </p:nvSpPr>
-        <p:spPr>
-          <a:xfrm rot="0">
+          <p:cNvPr id="9" name="TextBox 9"/>
+          <p:cNvSpPr txBox="1"/>
+          <p:nvPr/>
+        </p:nvSpPr>
+        <p:spPr>
+          <a:xfrm>
             <a:off x="4554750" y="2215244"/>
             <a:ext cx="9178501" cy="1439361"/>
           </a:xfrm>
@@ -7096,18 +7277,18 @@
           </a:prstGeom>
         </p:spPr>
         <p:txBody>
-          <a:bodyPr anchor="t" rtlCol="false" tIns="0" lIns="0" bIns="0" rIns="0">
+          <a:bodyPr lIns="0" tIns="0" rIns="0" bIns="0" rtlCol="0" anchor="t">
             <a:spAutoFit/>
           </a:bodyPr>
           <a:lstStyle/>
           <a:p>
-            <a:pPr algn="ctr" marL="0" indent="0" lvl="0">
+            <a:pPr marL="0" lvl="0" indent="0" algn="ctr">
               <a:lnSpc>
                 <a:spcPts val="11863"/>
               </a:lnSpc>
             </a:pPr>
             <a:r>
-              <a:rPr lang="en-US" b="true" sz="8474">
+              <a:rPr lang="en-US" sz="8474" b="1">
                 <a:solidFill>
                   <a:srgbClr val="FFFFFF"/>
                 </a:solidFill>
@@ -7123,12 +7304,12 @@
       </p:sp>
       <p:sp>
         <p:nvSpPr>
-          <p:cNvPr name="TextBox 10" id="10"/>
-          <p:cNvSpPr txBox="true"/>
-          <p:nvPr/>
-        </p:nvSpPr>
-        <p:spPr>
-          <a:xfrm rot="0">
+          <p:cNvPr id="10" name="TextBox 10"/>
+          <p:cNvSpPr txBox="1"/>
+          <p:nvPr/>
+        </p:nvSpPr>
+        <p:spPr>
+          <a:xfrm>
             <a:off x="1755319" y="3942812"/>
             <a:ext cx="14777362" cy="4333594"/>
           </a:xfrm>
@@ -7137,7 +7318,7 @@
           </a:prstGeom>
         </p:spPr>
         <p:txBody>
-          <a:bodyPr anchor="t" rtlCol="false" tIns="0" lIns="0" bIns="0" rIns="0">
+          <a:bodyPr lIns="0" tIns="0" rIns="0" bIns="0" rtlCol="0" anchor="t">
             <a:spAutoFit/>
           </a:bodyPr>
           <a:lstStyle/>
@@ -7148,7 +7329,7 @@
               </a:lnSpc>
             </a:pPr>
             <a:r>
-              <a:rPr lang="en-US" b="true" sz="6201">
+              <a:rPr lang="en-US" sz="6201" b="1">
                 <a:solidFill>
                   <a:srgbClr val="FFFFFF"/>
                 </a:solidFill>
@@ -7167,7 +7348,7 @@
               </a:lnSpc>
             </a:pPr>
             <a:r>
-              <a:rPr lang="en-US" b="true" sz="6201">
+              <a:rPr lang="en-US" sz="6201" b="1">
                 <a:solidFill>
                   <a:srgbClr val="FFFFFF"/>
                 </a:solidFill>
@@ -7186,7 +7367,7 @@
               </a:lnSpc>
             </a:pPr>
             <a:r>
-              <a:rPr lang="en-US" b="true" sz="6201">
+              <a:rPr lang="en-US" sz="6201" b="1">
                 <a:solidFill>
                   <a:srgbClr val="FFFFFF"/>
                 </a:solidFill>
@@ -7199,13 +7380,13 @@
             </a:r>
           </a:p>
           <a:p>
-            <a:pPr algn="l" marL="0" indent="0" lvl="0">
+            <a:pPr marL="0" lvl="0" indent="0" algn="l">
               <a:lnSpc>
                 <a:spcPts val="8682"/>
               </a:lnSpc>
             </a:pPr>
             <a:r>
-              <a:rPr lang="en-US" b="true" sz="6201">
+              <a:rPr lang="en-US" sz="6201" b="1">
                 <a:solidFill>
                   <a:srgbClr val="FFFFFF"/>
                 </a:solidFill>
@@ -7221,12 +7402,12 @@
       </p:sp>
       <p:sp>
         <p:nvSpPr>
-          <p:cNvPr name="TextBox 11" id="11"/>
-          <p:cNvSpPr txBox="true"/>
-          <p:nvPr/>
-        </p:nvSpPr>
-        <p:spPr>
-          <a:xfrm rot="0">
+          <p:cNvPr id="11" name="TextBox 11"/>
+          <p:cNvSpPr txBox="1"/>
+          <p:nvPr/>
+        </p:nvSpPr>
+        <p:spPr>
+          <a:xfrm>
             <a:off x="1799275" y="3952337"/>
             <a:ext cx="1049196" cy="977227"/>
           </a:xfrm>
@@ -7235,27 +7416,28 @@
           </a:prstGeom>
         </p:spPr>
         <p:txBody>
-          <a:bodyPr anchor="t" rtlCol="false" tIns="0" lIns="0" bIns="0" rIns="0">
+          <a:bodyPr lIns="0" tIns="0" rIns="0" bIns="0" rtlCol="0" anchor="t">
             <a:spAutoFit/>
           </a:bodyPr>
           <a:lstStyle/>
           <a:p>
-            <a:pPr algn="ctr" marL="0" indent="0" lvl="0">
+            <a:pPr marL="0" lvl="0" indent="0" algn="ctr">
               <a:lnSpc>
                 <a:spcPts val="8087"/>
               </a:lnSpc>
             </a:pPr>
-          </a:p>
-        </p:txBody>
-      </p:sp>
-      <p:sp>
-        <p:nvSpPr>
-          <p:cNvPr name="TextBox 12" id="12"/>
-          <p:cNvSpPr txBox="true"/>
-          <p:nvPr/>
-        </p:nvSpPr>
-        <p:spPr>
-          <a:xfrm rot="0">
+            <a:endParaRPr/>
+          </a:p>
+        </p:txBody>
+      </p:sp>
+      <p:sp>
+        <p:nvSpPr>
+          <p:cNvPr id="12" name="TextBox 12"/>
+          <p:cNvSpPr txBox="1"/>
+          <p:nvPr/>
+        </p:nvSpPr>
+        <p:spPr>
+          <a:xfrm>
             <a:off x="8747375" y="3952337"/>
             <a:ext cx="1049196" cy="977227"/>
           </a:xfrm>
@@ -7264,16 +7446,17 @@
           </a:prstGeom>
         </p:spPr>
         <p:txBody>
-          <a:bodyPr anchor="t" rtlCol="false" tIns="0" lIns="0" bIns="0" rIns="0">
+          <a:bodyPr lIns="0" tIns="0" rIns="0" bIns="0" rtlCol="0" anchor="t">
             <a:spAutoFit/>
           </a:bodyPr>
           <a:lstStyle/>
           <a:p>
-            <a:pPr algn="ctr" marL="0" indent="0" lvl="0">
+            <a:pPr marL="0" lvl="0" indent="0" algn="ctr">
               <a:lnSpc>
                 <a:spcPts val="8087"/>
               </a:lnSpc>
             </a:pPr>
+            <a:endParaRPr/>
           </a:p>
         </p:txBody>
       </p:sp>
@@ -7286,13 +7469,14 @@
 </file>
 
 <file path=ppt/slides/slide6.xml><?xml version="1.0" encoding="utf-8"?>
-<p:sld xmlns:p="http://schemas.openxmlformats.org/presentationml/2006/main" xmlns:a="http://schemas.openxmlformats.org/drawingml/2006/main" xmlns:r="http://schemas.openxmlformats.org/officeDocument/2006/relationships">
+<p:sld xmlns:a="http://schemas.openxmlformats.org/drawingml/2006/main" xmlns:r="http://schemas.openxmlformats.org/officeDocument/2006/relationships" xmlns:p="http://schemas.openxmlformats.org/presentationml/2006/main">
   <p:cSld>
     <p:bg>
       <p:bgPr>
         <a:solidFill>
           <a:srgbClr val="26272B"/>
         </a:solidFill>
+        <a:effectLst/>
       </p:bgPr>
     </p:bg>
     <p:spTree>
@@ -7311,12 +7495,12 @@
       </p:grpSpPr>
       <p:sp>
         <p:nvSpPr>
-          <p:cNvPr name="Freeform 2" id="2"/>
+          <p:cNvPr id="2" name="Freeform 2"/>
           <p:cNvSpPr/>
           <p:nvPr/>
         </p:nvSpPr>
         <p:spPr>
-          <a:xfrm flipH="false" flipV="false" rot="-5400000">
+          <a:xfrm rot="-5400000">
             <a:off x="-3649725" y="8834213"/>
             <a:ext cx="7315200" cy="2025901"/>
           </a:xfrm>
@@ -7325,9 +7509,9 @@
             <a:gdLst/>
             <a:ahLst/>
             <a:cxnLst/>
-            <a:rect r="r" b="b" t="t" l="l"/>
+            <a:rect l="l" t="t" r="r" b="b"/>
             <a:pathLst>
-              <a:path h="2025901" w="7315200">
+              <a:path w="7315200" h="2025901">
                 <a:moveTo>
                   <a:pt x="0" y="0"/>
                 </a:moveTo>
@@ -7356,19 +7540,19 @@
               </a:extLst>
             </a:blip>
             <a:stretch>
-              <a:fillRect l="0" t="0" r="0" b="0"/>
+              <a:fillRect/>
             </a:stretch>
           </a:blipFill>
         </p:spPr>
       </p:sp>
       <p:sp>
         <p:nvSpPr>
-          <p:cNvPr name="Freeform 3" id="3"/>
+          <p:cNvPr id="3" name="Freeform 3"/>
           <p:cNvSpPr/>
           <p:nvPr/>
         </p:nvSpPr>
         <p:spPr>
-          <a:xfrm flipH="false" flipV="false" rot="-5400000">
+          <a:xfrm rot="-5400000">
             <a:off x="-3657600" y="-573114"/>
             <a:ext cx="7315200" cy="2025901"/>
           </a:xfrm>
@@ -7377,9 +7561,9 @@
             <a:gdLst/>
             <a:ahLst/>
             <a:cxnLst/>
-            <a:rect r="r" b="b" t="t" l="l"/>
+            <a:rect l="l" t="t" r="r" b="b"/>
             <a:pathLst>
-              <a:path h="2025901" w="7315200">
+              <a:path w="7315200" h="2025901">
                 <a:moveTo>
                   <a:pt x="0" y="0"/>
                 </a:moveTo>
@@ -7408,19 +7592,19 @@
               </a:extLst>
             </a:blip>
             <a:stretch>
-              <a:fillRect l="0" t="0" r="0" b="0"/>
+              <a:fillRect/>
             </a:stretch>
           </a:blipFill>
         </p:spPr>
       </p:sp>
       <p:sp>
         <p:nvSpPr>
-          <p:cNvPr name="Freeform 4" id="4"/>
+          <p:cNvPr id="4" name="Freeform 4"/>
           <p:cNvSpPr/>
           <p:nvPr/>
         </p:nvSpPr>
         <p:spPr>
-          <a:xfrm flipH="true" flipV="false" rot="0">
+          <a:xfrm flipH="1">
             <a:off x="-1590281" y="9258300"/>
             <a:ext cx="7315200" cy="3195406"/>
           </a:xfrm>
@@ -7429,9 +7613,9 @@
             <a:gdLst/>
             <a:ahLst/>
             <a:cxnLst/>
-            <a:rect r="r" b="b" t="t" l="l"/>
+            <a:rect l="l" t="t" r="r" b="b"/>
             <a:pathLst>
-              <a:path h="3195406" w="7315200">
+              <a:path w="7315200" h="3195406">
                 <a:moveTo>
                   <a:pt x="7315200" y="0"/>
                 </a:moveTo>
@@ -7460,19 +7644,19 @@
               </a:extLst>
             </a:blip>
             <a:stretch>
-              <a:fillRect l="0" t="0" r="0" b="0"/>
+              <a:fillRect/>
             </a:stretch>
           </a:blipFill>
         </p:spPr>
       </p:sp>
       <p:sp>
         <p:nvSpPr>
-          <p:cNvPr name="Freeform 5" id="5"/>
+          <p:cNvPr id="5" name="Freeform 5"/>
           <p:cNvSpPr/>
           <p:nvPr/>
         </p:nvSpPr>
         <p:spPr>
-          <a:xfrm flipH="false" flipV="false" rot="-5400000">
+          <a:xfrm rot="-5400000">
             <a:off x="14634337" y="8834213"/>
             <a:ext cx="7315200" cy="2025901"/>
           </a:xfrm>
@@ -7481,9 +7665,9 @@
             <a:gdLst/>
             <a:ahLst/>
             <a:cxnLst/>
-            <a:rect r="r" b="b" t="t" l="l"/>
+            <a:rect l="l" t="t" r="r" b="b"/>
             <a:pathLst>
-              <a:path h="2025901" w="7315200">
+              <a:path w="7315200" h="2025901">
                 <a:moveTo>
                   <a:pt x="0" y="0"/>
                 </a:moveTo>
@@ -7512,19 +7696,19 @@
               </a:extLst>
             </a:blip>
             <a:stretch>
-              <a:fillRect l="0" t="0" r="0" b="0"/>
+              <a:fillRect/>
             </a:stretch>
           </a:blipFill>
         </p:spPr>
       </p:sp>
       <p:sp>
         <p:nvSpPr>
-          <p:cNvPr name="Freeform 6" id="6"/>
+          <p:cNvPr id="6" name="Freeform 6"/>
           <p:cNvSpPr/>
           <p:nvPr/>
         </p:nvSpPr>
         <p:spPr>
-          <a:xfrm flipH="false" flipV="false" rot="-5400000">
+          <a:xfrm rot="-5400000">
             <a:off x="14626463" y="-573114"/>
             <a:ext cx="7315200" cy="2025901"/>
           </a:xfrm>
@@ -7533,9 +7717,9 @@
             <a:gdLst/>
             <a:ahLst/>
             <a:cxnLst/>
-            <a:rect r="r" b="b" t="t" l="l"/>
+            <a:rect l="l" t="t" r="r" b="b"/>
             <a:pathLst>
-              <a:path h="2025901" w="7315200">
+              <a:path w="7315200" h="2025901">
                 <a:moveTo>
                   <a:pt x="0" y="0"/>
                 </a:moveTo>
@@ -7564,19 +7748,19 @@
               </a:extLst>
             </a:blip>
             <a:stretch>
-              <a:fillRect l="0" t="0" r="0" b="0"/>
+              <a:fillRect/>
             </a:stretch>
           </a:blipFill>
         </p:spPr>
       </p:sp>
       <p:sp>
         <p:nvSpPr>
-          <p:cNvPr name="Freeform 7" id="7"/>
+          <p:cNvPr id="7" name="Freeform 7"/>
           <p:cNvSpPr/>
           <p:nvPr/>
         </p:nvSpPr>
         <p:spPr>
-          <a:xfrm flipH="false" flipV="true" rot="0">
+          <a:xfrm flipV="1">
             <a:off x="12563081" y="-2166706"/>
             <a:ext cx="7315200" cy="3195406"/>
           </a:xfrm>
@@ -7585,9 +7769,9 @@
             <a:gdLst/>
             <a:ahLst/>
             <a:cxnLst/>
-            <a:rect r="r" b="b" t="t" l="l"/>
+            <a:rect l="l" t="t" r="r" b="b"/>
             <a:pathLst>
-              <a:path h="3195406" w="7315200">
+              <a:path w="7315200" h="3195406">
                 <a:moveTo>
                   <a:pt x="0" y="3195406"/>
                 </a:moveTo>
@@ -7616,19 +7800,19 @@
               </a:extLst>
             </a:blip>
             <a:stretch>
-              <a:fillRect l="0" t="0" r="0" b="0"/>
+              <a:fillRect/>
             </a:stretch>
           </a:blipFill>
         </p:spPr>
       </p:sp>
       <p:sp>
         <p:nvSpPr>
-          <p:cNvPr name="TextBox 8" id="8"/>
-          <p:cNvSpPr txBox="true"/>
-          <p:nvPr/>
-        </p:nvSpPr>
-        <p:spPr>
-          <a:xfrm rot="0">
+          <p:cNvPr id="8" name="TextBox 8"/>
+          <p:cNvSpPr txBox="1"/>
+          <p:nvPr/>
+        </p:nvSpPr>
+        <p:spPr>
+          <a:xfrm>
             <a:off x="15481814" y="8708990"/>
             <a:ext cx="1477734" cy="993937"/>
           </a:xfrm>
@@ -7637,18 +7821,18 @@
           </a:prstGeom>
         </p:spPr>
         <p:txBody>
-          <a:bodyPr anchor="t" rtlCol="false" tIns="0" lIns="0" bIns="0" rIns="0">
+          <a:bodyPr lIns="0" tIns="0" rIns="0" bIns="0" rtlCol="0" anchor="t">
             <a:spAutoFit/>
           </a:bodyPr>
           <a:lstStyle/>
           <a:p>
-            <a:pPr algn="ctr" marL="0" indent="0" lvl="0">
+            <a:pPr marL="0" lvl="0" indent="0" algn="ctr">
               <a:lnSpc>
                 <a:spcPts val="8216"/>
               </a:lnSpc>
             </a:pPr>
             <a:r>
-              <a:rPr lang="en-US" b="true" sz="5868">
+              <a:rPr lang="en-US" sz="5868" b="1">
                 <a:solidFill>
                   <a:srgbClr val="26272B"/>
                 </a:solidFill>
@@ -7664,12 +7848,12 @@
       </p:sp>
       <p:grpSp>
         <p:nvGrpSpPr>
-          <p:cNvPr name="Group 9" id="9"/>
+          <p:cNvPr id="9" name="Group 9"/>
           <p:cNvGrpSpPr/>
           <p:nvPr/>
         </p:nvGrpSpPr>
         <p:grpSpPr>
-          <a:xfrm rot="0">
+          <a:xfrm>
             <a:off x="3325325" y="3819693"/>
             <a:ext cx="496986" cy="496986"/>
             <a:chOff x="0" y="0"/>
@@ -7678,12 +7862,12 @@
         </p:grpSpPr>
         <p:sp>
           <p:nvSpPr>
-            <p:cNvPr name="Freeform 10" id="10"/>
+            <p:cNvPr id="10" name="Freeform 10"/>
             <p:cNvSpPr/>
             <p:nvPr/>
           </p:nvSpPr>
           <p:spPr>
-            <a:xfrm flipH="false" flipV="false" rot="0">
+            <a:xfrm>
               <a:off x="0" y="0"/>
               <a:ext cx="812800" cy="812800"/>
             </a:xfrm>
@@ -7692,9 +7876,9 @@
               <a:gdLst/>
               <a:ahLst/>
               <a:cxnLst/>
-              <a:rect r="r" b="b" t="t" l="l"/>
+              <a:rect l="l" t="t" r="r" b="b"/>
               <a:pathLst>
-                <a:path h="812800" w="812800">
+                <a:path w="812800" h="812800">
                   <a:moveTo>
                     <a:pt x="406400" y="0"/>
                   </a:moveTo>
@@ -7729,8 +7913,8 @@
         </p:sp>
         <p:sp>
           <p:nvSpPr>
-            <p:cNvPr name="TextBox 11" id="11"/>
-            <p:cNvSpPr txBox="true"/>
+            <p:cNvPr id="11" name="TextBox 11"/>
+            <p:cNvSpPr txBox="1"/>
             <p:nvPr/>
           </p:nvSpPr>
           <p:spPr>
@@ -7743,26 +7927,27 @@
             </a:prstGeom>
           </p:spPr>
           <p:txBody>
-            <a:bodyPr anchor="ctr" rtlCol="false" tIns="50800" lIns="50800" bIns="50800" rIns="50800"/>
+            <a:bodyPr lIns="50800" tIns="50800" rIns="50800" bIns="50800" rtlCol="0" anchor="ctr"/>
             <a:lstStyle/>
             <a:p>
-              <a:pPr algn="ctr" marL="0" indent="0" lvl="0">
+              <a:pPr marL="0" lvl="0" indent="0" algn="ctr">
                 <a:lnSpc>
                   <a:spcPts val="2659"/>
                 </a:lnSpc>
               </a:pPr>
+              <a:endParaRPr/>
             </a:p>
           </p:txBody>
         </p:sp>
       </p:grpSp>
       <p:sp>
         <p:nvSpPr>
-          <p:cNvPr name="TextBox 12" id="12"/>
-          <p:cNvSpPr txBox="true"/>
-          <p:nvPr/>
-        </p:nvSpPr>
-        <p:spPr>
-          <a:xfrm rot="0">
+          <p:cNvPr id="12" name="TextBox 12"/>
+          <p:cNvSpPr txBox="1"/>
+          <p:nvPr/>
+        </p:nvSpPr>
+        <p:spPr>
+          <a:xfrm>
             <a:off x="4206302" y="3753018"/>
             <a:ext cx="10756372" cy="2123262"/>
           </a:xfrm>
@@ -7771,18 +7956,18 @@
           </a:prstGeom>
         </p:spPr>
         <p:txBody>
-          <a:bodyPr anchor="t" rtlCol="false" tIns="0" lIns="0" bIns="0" rIns="0">
+          <a:bodyPr lIns="0" tIns="0" rIns="0" bIns="0" rtlCol="0" anchor="t">
             <a:spAutoFit/>
           </a:bodyPr>
           <a:lstStyle/>
           <a:p>
-            <a:pPr algn="just" marL="0" indent="0" lvl="0">
+            <a:pPr marL="0" lvl="0" indent="0" algn="just">
               <a:lnSpc>
                 <a:spcPts val="4244"/>
               </a:lnSpc>
             </a:pPr>
             <a:r>
-              <a:rPr lang="en-US" b="true" sz="3031">
+              <a:rPr lang="en-US" sz="3031" b="1">
                 <a:solidFill>
                   <a:srgbClr val="FFFFFF"/>
                 </a:solidFill>
@@ -7798,12 +7983,12 @@
       </p:sp>
       <p:sp>
         <p:nvSpPr>
-          <p:cNvPr name="TextBox 13" id="13"/>
-          <p:cNvSpPr txBox="true"/>
-          <p:nvPr/>
-        </p:nvSpPr>
-        <p:spPr>
-          <a:xfrm rot="0">
+          <p:cNvPr id="13" name="TextBox 13"/>
+          <p:cNvSpPr txBox="1"/>
+          <p:nvPr/>
+        </p:nvSpPr>
+        <p:spPr>
+          <a:xfrm>
             <a:off x="4554750" y="1852873"/>
             <a:ext cx="9178501" cy="1439361"/>
           </a:xfrm>
@@ -7812,18 +7997,18 @@
           </a:prstGeom>
         </p:spPr>
         <p:txBody>
-          <a:bodyPr anchor="t" rtlCol="false" tIns="0" lIns="0" bIns="0" rIns="0">
+          <a:bodyPr lIns="0" tIns="0" rIns="0" bIns="0" rtlCol="0" anchor="t">
             <a:spAutoFit/>
           </a:bodyPr>
           <a:lstStyle/>
           <a:p>
-            <a:pPr algn="ctr" marL="0" indent="0" lvl="0">
+            <a:pPr marL="0" lvl="0" indent="0" algn="ctr">
               <a:lnSpc>
                 <a:spcPts val="11863"/>
               </a:lnSpc>
             </a:pPr>
             <a:r>
-              <a:rPr lang="en-US" b="true" sz="8474">
+              <a:rPr lang="en-US" sz="8474" b="1">
                 <a:solidFill>
                   <a:srgbClr val="FFFFFF"/>
                 </a:solidFill>
@@ -7839,12 +8024,12 @@
       </p:sp>
       <p:grpSp>
         <p:nvGrpSpPr>
-          <p:cNvPr name="Group 14" id="14"/>
+          <p:cNvPr id="14" name="Group 14"/>
           <p:cNvGrpSpPr/>
           <p:nvPr/>
         </p:nvGrpSpPr>
         <p:grpSpPr>
-          <a:xfrm rot="0">
+          <a:xfrm>
             <a:off x="3325325" y="6225244"/>
             <a:ext cx="496986" cy="496986"/>
             <a:chOff x="0" y="0"/>
@@ -7853,12 +8038,12 @@
         </p:grpSpPr>
         <p:sp>
           <p:nvSpPr>
-            <p:cNvPr name="Freeform 15" id="15"/>
+            <p:cNvPr id="15" name="Freeform 15"/>
             <p:cNvSpPr/>
             <p:nvPr/>
           </p:nvSpPr>
           <p:spPr>
-            <a:xfrm flipH="false" flipV="false" rot="0">
+            <a:xfrm>
               <a:off x="0" y="0"/>
               <a:ext cx="812800" cy="812800"/>
             </a:xfrm>
@@ -7867,9 +8052,9 @@
               <a:gdLst/>
               <a:ahLst/>
               <a:cxnLst/>
-              <a:rect r="r" b="b" t="t" l="l"/>
+              <a:rect l="l" t="t" r="r" b="b"/>
               <a:pathLst>
-                <a:path h="812800" w="812800">
+                <a:path w="812800" h="812800">
                   <a:moveTo>
                     <a:pt x="406400" y="0"/>
                   </a:moveTo>
@@ -7904,8 +8089,8 @@
         </p:sp>
         <p:sp>
           <p:nvSpPr>
-            <p:cNvPr name="TextBox 16" id="16"/>
-            <p:cNvSpPr txBox="true"/>
+            <p:cNvPr id="16" name="TextBox 16"/>
+            <p:cNvSpPr txBox="1"/>
             <p:nvPr/>
           </p:nvSpPr>
           <p:spPr>
@@ -7918,26 +8103,27 @@
             </a:prstGeom>
           </p:spPr>
           <p:txBody>
-            <a:bodyPr anchor="ctr" rtlCol="false" tIns="50800" lIns="50800" bIns="50800" rIns="50800"/>
+            <a:bodyPr lIns="50800" tIns="50800" rIns="50800" bIns="50800" rtlCol="0" anchor="ctr"/>
             <a:lstStyle/>
             <a:p>
-              <a:pPr algn="ctr" marL="0" indent="0" lvl="0">
+              <a:pPr marL="0" lvl="0" indent="0" algn="ctr">
                 <a:lnSpc>
                   <a:spcPts val="2659"/>
                 </a:lnSpc>
               </a:pPr>
+              <a:endParaRPr/>
             </a:p>
           </p:txBody>
         </p:sp>
       </p:grpSp>
       <p:sp>
         <p:nvSpPr>
-          <p:cNvPr name="TextBox 17" id="17"/>
-          <p:cNvSpPr txBox="true"/>
-          <p:nvPr/>
-        </p:nvSpPr>
-        <p:spPr>
-          <a:xfrm rot="0">
+          <p:cNvPr id="17" name="TextBox 17"/>
+          <p:cNvSpPr txBox="1"/>
+          <p:nvPr/>
+        </p:nvSpPr>
+        <p:spPr>
+          <a:xfrm>
             <a:off x="4206302" y="6158569"/>
             <a:ext cx="10756372" cy="2123262"/>
           </a:xfrm>
@@ -7946,18 +8132,18 @@
           </a:prstGeom>
         </p:spPr>
         <p:txBody>
-          <a:bodyPr anchor="t" rtlCol="false" tIns="0" lIns="0" bIns="0" rIns="0">
+          <a:bodyPr lIns="0" tIns="0" rIns="0" bIns="0" rtlCol="0" anchor="t">
             <a:spAutoFit/>
           </a:bodyPr>
           <a:lstStyle/>
           <a:p>
-            <a:pPr algn="just" marL="0" indent="0" lvl="0">
+            <a:pPr marL="0" lvl="0" indent="0" algn="just">
               <a:lnSpc>
                 <a:spcPts val="4244"/>
               </a:lnSpc>
             </a:pPr>
             <a:r>
-              <a:rPr lang="en-US" b="true" sz="3031">
+              <a:rPr lang="en-US" sz="3031" b="1">
                 <a:solidFill>
                   <a:srgbClr val="FFFFFF"/>
                 </a:solidFill>
@@ -7980,13 +8166,14 @@
 </file>
 
 <file path=ppt/slides/slide7.xml><?xml version="1.0" encoding="utf-8"?>
-<p:sld xmlns:p="http://schemas.openxmlformats.org/presentationml/2006/main" xmlns:a="http://schemas.openxmlformats.org/drawingml/2006/main" xmlns:r="http://schemas.openxmlformats.org/officeDocument/2006/relationships">
+<p:sld xmlns:a="http://schemas.openxmlformats.org/drawingml/2006/main" xmlns:r="http://schemas.openxmlformats.org/officeDocument/2006/relationships" xmlns:p="http://schemas.openxmlformats.org/presentationml/2006/main">
   <p:cSld>
     <p:bg>
       <p:bgPr>
         <a:solidFill>
           <a:srgbClr val="26272B"/>
         </a:solidFill>
+        <a:effectLst/>
       </p:bgPr>
     </p:bg>
     <p:spTree>
@@ -8005,12 +8192,12 @@
       </p:grpSpPr>
       <p:sp>
         <p:nvSpPr>
-          <p:cNvPr name="Freeform 2" id="2"/>
+          <p:cNvPr id="2" name="Freeform 2"/>
           <p:cNvSpPr/>
           <p:nvPr/>
         </p:nvSpPr>
         <p:spPr>
-          <a:xfrm flipH="false" flipV="false" rot="-5400000">
+          <a:xfrm rot="-5400000">
             <a:off x="-3649725" y="8834213"/>
             <a:ext cx="7315200" cy="2025901"/>
           </a:xfrm>
@@ -8019,9 +8206,9 @@
             <a:gdLst/>
             <a:ahLst/>
             <a:cxnLst/>
-            <a:rect r="r" b="b" t="t" l="l"/>
+            <a:rect l="l" t="t" r="r" b="b"/>
             <a:pathLst>
-              <a:path h="2025901" w="7315200">
+              <a:path w="7315200" h="2025901">
                 <a:moveTo>
                   <a:pt x="0" y="0"/>
                 </a:moveTo>
@@ -8050,19 +8237,19 @@
               </a:extLst>
             </a:blip>
             <a:stretch>
-              <a:fillRect l="0" t="0" r="0" b="0"/>
+              <a:fillRect/>
             </a:stretch>
           </a:blipFill>
         </p:spPr>
       </p:sp>
       <p:sp>
         <p:nvSpPr>
-          <p:cNvPr name="Freeform 3" id="3"/>
+          <p:cNvPr id="3" name="Freeform 3"/>
           <p:cNvSpPr/>
           <p:nvPr/>
         </p:nvSpPr>
         <p:spPr>
-          <a:xfrm flipH="false" flipV="false" rot="-5400000">
+          <a:xfrm rot="-5400000">
             <a:off x="-3657600" y="-573114"/>
             <a:ext cx="7315200" cy="2025901"/>
           </a:xfrm>
@@ -8071,9 +8258,9 @@
             <a:gdLst/>
             <a:ahLst/>
             <a:cxnLst/>
-            <a:rect r="r" b="b" t="t" l="l"/>
+            <a:rect l="l" t="t" r="r" b="b"/>
             <a:pathLst>
-              <a:path h="2025901" w="7315200">
+              <a:path w="7315200" h="2025901">
                 <a:moveTo>
                   <a:pt x="0" y="0"/>
                 </a:moveTo>
@@ -8102,19 +8289,19 @@
               </a:extLst>
             </a:blip>
             <a:stretch>
-              <a:fillRect l="0" t="0" r="0" b="0"/>
+              <a:fillRect/>
             </a:stretch>
           </a:blipFill>
         </p:spPr>
       </p:sp>
       <p:sp>
         <p:nvSpPr>
-          <p:cNvPr name="Freeform 4" id="4"/>
+          <p:cNvPr id="4" name="Freeform 4"/>
           <p:cNvSpPr/>
           <p:nvPr/>
         </p:nvSpPr>
         <p:spPr>
-          <a:xfrm flipH="true" flipV="false" rot="0">
+          <a:xfrm flipH="1">
             <a:off x="-1590281" y="9258300"/>
             <a:ext cx="7315200" cy="3195406"/>
           </a:xfrm>
@@ -8123,9 +8310,9 @@
             <a:gdLst/>
             <a:ahLst/>
             <a:cxnLst/>
-            <a:rect r="r" b="b" t="t" l="l"/>
+            <a:rect l="l" t="t" r="r" b="b"/>
             <a:pathLst>
-              <a:path h="3195406" w="7315200">
+              <a:path w="7315200" h="3195406">
                 <a:moveTo>
                   <a:pt x="7315200" y="0"/>
                 </a:moveTo>
@@ -8154,19 +8341,19 @@
               </a:extLst>
             </a:blip>
             <a:stretch>
-              <a:fillRect l="0" t="0" r="0" b="0"/>
+              <a:fillRect/>
             </a:stretch>
           </a:blipFill>
         </p:spPr>
       </p:sp>
       <p:sp>
         <p:nvSpPr>
-          <p:cNvPr name="Freeform 5" id="5"/>
+          <p:cNvPr id="5" name="Freeform 5"/>
           <p:cNvSpPr/>
           <p:nvPr/>
         </p:nvSpPr>
         <p:spPr>
-          <a:xfrm flipH="false" flipV="false" rot="-5400000">
+          <a:xfrm rot="-5400000">
             <a:off x="14634337" y="8834213"/>
             <a:ext cx="7315200" cy="2025901"/>
           </a:xfrm>
@@ -8175,9 +8362,9 @@
             <a:gdLst/>
             <a:ahLst/>
             <a:cxnLst/>
-            <a:rect r="r" b="b" t="t" l="l"/>
+            <a:rect l="l" t="t" r="r" b="b"/>
             <a:pathLst>
-              <a:path h="2025901" w="7315200">
+              <a:path w="7315200" h="2025901">
                 <a:moveTo>
                   <a:pt x="0" y="0"/>
                 </a:moveTo>
@@ -8206,19 +8393,19 @@
               </a:extLst>
             </a:blip>
             <a:stretch>
-              <a:fillRect l="0" t="0" r="0" b="0"/>
+              <a:fillRect/>
             </a:stretch>
           </a:blipFill>
         </p:spPr>
       </p:sp>
       <p:sp>
         <p:nvSpPr>
-          <p:cNvPr name="Freeform 6" id="6"/>
+          <p:cNvPr id="6" name="Freeform 6"/>
           <p:cNvSpPr/>
           <p:nvPr/>
         </p:nvSpPr>
         <p:spPr>
-          <a:xfrm flipH="false" flipV="false" rot="-5400000">
+          <a:xfrm rot="-5400000">
             <a:off x="14626463" y="-573114"/>
             <a:ext cx="7315200" cy="2025901"/>
           </a:xfrm>
@@ -8227,9 +8414,9 @@
             <a:gdLst/>
             <a:ahLst/>
             <a:cxnLst/>
-            <a:rect r="r" b="b" t="t" l="l"/>
+            <a:rect l="l" t="t" r="r" b="b"/>
             <a:pathLst>
-              <a:path h="2025901" w="7315200">
+              <a:path w="7315200" h="2025901">
                 <a:moveTo>
                   <a:pt x="0" y="0"/>
                 </a:moveTo>
@@ -8258,19 +8445,19 @@
               </a:extLst>
             </a:blip>
             <a:stretch>
-              <a:fillRect l="0" t="0" r="0" b="0"/>
+              <a:fillRect/>
             </a:stretch>
           </a:blipFill>
         </p:spPr>
       </p:sp>
       <p:sp>
         <p:nvSpPr>
-          <p:cNvPr name="Freeform 7" id="7"/>
+          <p:cNvPr id="7" name="Freeform 7"/>
           <p:cNvSpPr/>
           <p:nvPr/>
         </p:nvSpPr>
         <p:spPr>
-          <a:xfrm flipH="false" flipV="true" rot="0">
+          <a:xfrm flipV="1">
             <a:off x="12563081" y="-2166706"/>
             <a:ext cx="7315200" cy="3195406"/>
           </a:xfrm>
@@ -8279,9 +8466,9 @@
             <a:gdLst/>
             <a:ahLst/>
             <a:cxnLst/>
-            <a:rect r="r" b="b" t="t" l="l"/>
+            <a:rect l="l" t="t" r="r" b="b"/>
             <a:pathLst>
-              <a:path h="3195406" w="7315200">
+              <a:path w="7315200" h="3195406">
                 <a:moveTo>
                   <a:pt x="0" y="3195406"/>
                 </a:moveTo>
@@ -8310,19 +8497,19 @@
               </a:extLst>
             </a:blip>
             <a:stretch>
-              <a:fillRect l="0" t="0" r="0" b="0"/>
+              <a:fillRect/>
             </a:stretch>
           </a:blipFill>
         </p:spPr>
       </p:sp>
       <p:sp>
         <p:nvSpPr>
-          <p:cNvPr name="TextBox 8" id="8"/>
-          <p:cNvSpPr txBox="true"/>
-          <p:nvPr/>
-        </p:nvSpPr>
-        <p:spPr>
-          <a:xfrm rot="0">
+          <p:cNvPr id="8" name="TextBox 8"/>
+          <p:cNvSpPr txBox="1"/>
+          <p:nvPr/>
+        </p:nvSpPr>
+        <p:spPr>
+          <a:xfrm>
             <a:off x="15481814" y="8756615"/>
             <a:ext cx="1477734" cy="538772"/>
           </a:xfrm>
@@ -8331,18 +8518,18 @@
           </a:prstGeom>
         </p:spPr>
         <p:txBody>
-          <a:bodyPr anchor="t" rtlCol="false" tIns="0" lIns="0" bIns="0" rIns="0">
+          <a:bodyPr lIns="0" tIns="0" rIns="0" bIns="0" rtlCol="0" anchor="t">
             <a:spAutoFit/>
           </a:bodyPr>
           <a:lstStyle/>
           <a:p>
-            <a:pPr algn="ctr" marL="0" indent="0" lvl="0">
+            <a:pPr marL="0" lvl="0" indent="0" algn="ctr">
               <a:lnSpc>
                 <a:spcPts val="4428"/>
               </a:lnSpc>
             </a:pPr>
             <a:r>
-              <a:rPr lang="en-US" b="true" sz="3163">
+              <a:rPr lang="en-US" sz="3163" b="1">
                 <a:solidFill>
                   <a:srgbClr val="26272B"/>
                 </a:solidFill>
@@ -8358,12 +8545,12 @@
       </p:sp>
       <p:sp>
         <p:nvSpPr>
-          <p:cNvPr name="TextBox 9" id="9"/>
-          <p:cNvSpPr txBox="true"/>
-          <p:nvPr/>
-        </p:nvSpPr>
-        <p:spPr>
-          <a:xfrm rot="0">
+          <p:cNvPr id="9" name="TextBox 9"/>
+          <p:cNvSpPr txBox="1"/>
+          <p:nvPr/>
+        </p:nvSpPr>
+        <p:spPr>
+          <a:xfrm>
             <a:off x="3106260" y="2253344"/>
             <a:ext cx="12375554" cy="1036499"/>
           </a:xfrm>
@@ -8372,18 +8559,18 @@
           </a:prstGeom>
         </p:spPr>
         <p:txBody>
-          <a:bodyPr anchor="t" rtlCol="false" tIns="0" lIns="0" bIns="0" rIns="0">
+          <a:bodyPr lIns="0" tIns="0" rIns="0" bIns="0" rtlCol="0" anchor="t">
             <a:spAutoFit/>
           </a:bodyPr>
           <a:lstStyle/>
           <a:p>
-            <a:pPr algn="ctr" marL="0" indent="0" lvl="0">
+            <a:pPr marL="0" lvl="0" indent="0" algn="ctr">
               <a:lnSpc>
                 <a:spcPts val="8495"/>
               </a:lnSpc>
             </a:pPr>
             <a:r>
-              <a:rPr lang="en-US" b="true" sz="6067">
+              <a:rPr lang="en-US" sz="6067" b="1">
                 <a:solidFill>
                   <a:srgbClr val="FFFFFF"/>
                 </a:solidFill>
@@ -8399,12 +8586,12 @@
       </p:sp>
       <p:sp>
         <p:nvSpPr>
-          <p:cNvPr name="TextBox 10" id="10"/>
-          <p:cNvSpPr txBox="true"/>
-          <p:nvPr/>
-        </p:nvSpPr>
-        <p:spPr>
-          <a:xfrm rot="0">
+          <p:cNvPr id="10" name="TextBox 10"/>
+          <p:cNvSpPr txBox="1"/>
+          <p:nvPr/>
+        </p:nvSpPr>
+        <p:spPr>
+          <a:xfrm>
             <a:off x="2067319" y="4864468"/>
             <a:ext cx="5467331" cy="2508844"/>
           </a:xfrm>
@@ -8413,18 +8600,18 @@
           </a:prstGeom>
         </p:spPr>
         <p:txBody>
-          <a:bodyPr anchor="t" rtlCol="false" tIns="0" lIns="0" bIns="0" rIns="0">
+          <a:bodyPr lIns="0" tIns="0" rIns="0" bIns="0" rtlCol="0" anchor="t">
             <a:spAutoFit/>
           </a:bodyPr>
           <a:lstStyle/>
           <a:p>
-            <a:pPr algn="just" marL="0" indent="0" lvl="0">
+            <a:pPr marL="0" lvl="0" indent="0" algn="just">
               <a:lnSpc>
                 <a:spcPts val="3992"/>
               </a:lnSpc>
             </a:pPr>
             <a:r>
-              <a:rPr lang="en-US" b="true" sz="2851">
+              <a:rPr lang="en-US" sz="2851" b="1">
                 <a:solidFill>
                   <a:srgbClr val="FFFFFF"/>
                 </a:solidFill>
@@ -8440,12 +8627,12 @@
       </p:sp>
       <p:sp>
         <p:nvSpPr>
-          <p:cNvPr name="TextBox 11" id="11"/>
-          <p:cNvSpPr txBox="true"/>
-          <p:nvPr/>
-        </p:nvSpPr>
-        <p:spPr>
-          <a:xfrm rot="0">
+          <p:cNvPr id="11" name="TextBox 11"/>
+          <p:cNvSpPr txBox="1"/>
+          <p:nvPr/>
+        </p:nvSpPr>
+        <p:spPr>
+          <a:xfrm>
             <a:off x="2067319" y="3980912"/>
             <a:ext cx="4884666" cy="606074"/>
           </a:xfrm>
@@ -8454,18 +8641,18 @@
           </a:prstGeom>
         </p:spPr>
         <p:txBody>
-          <a:bodyPr anchor="t" rtlCol="false" tIns="0" lIns="0" bIns="0" rIns="0">
+          <a:bodyPr lIns="0" tIns="0" rIns="0" bIns="0" rtlCol="0" anchor="t">
             <a:spAutoFit/>
           </a:bodyPr>
           <a:lstStyle/>
           <a:p>
-            <a:pPr algn="l" marL="0" indent="0" lvl="0">
+            <a:pPr marL="0" lvl="0" indent="0" algn="l">
               <a:lnSpc>
                 <a:spcPts val="4919"/>
               </a:lnSpc>
             </a:pPr>
             <a:r>
-              <a:rPr lang="en-US" b="true" sz="3513">
+              <a:rPr lang="en-US" sz="3513" b="1">
                 <a:solidFill>
                   <a:srgbClr val="FFFFFF"/>
                 </a:solidFill>
@@ -8481,12 +8668,12 @@
       </p:sp>
       <p:sp>
         <p:nvSpPr>
-          <p:cNvPr name="TextBox 12" id="12"/>
-          <p:cNvSpPr txBox="true"/>
-          <p:nvPr/>
-        </p:nvSpPr>
-        <p:spPr>
-          <a:xfrm rot="0">
+          <p:cNvPr id="12" name="TextBox 12"/>
+          <p:cNvSpPr txBox="1"/>
+          <p:nvPr/>
+        </p:nvSpPr>
+        <p:spPr>
+          <a:xfrm>
             <a:off x="2581662" y="3999962"/>
             <a:ext cx="1049196" cy="530509"/>
           </a:xfrm>
@@ -8495,27 +8682,28 @@
           </a:prstGeom>
         </p:spPr>
         <p:txBody>
-          <a:bodyPr anchor="t" rtlCol="false" tIns="0" lIns="0" bIns="0" rIns="0">
+          <a:bodyPr lIns="0" tIns="0" rIns="0" bIns="0" rtlCol="0" anchor="t">
             <a:spAutoFit/>
           </a:bodyPr>
           <a:lstStyle/>
           <a:p>
-            <a:pPr algn="ctr" marL="0" indent="0" lvl="0">
+            <a:pPr marL="0" lvl="0" indent="0" algn="ctr">
               <a:lnSpc>
                 <a:spcPts val="4359"/>
               </a:lnSpc>
             </a:pPr>
-          </a:p>
-        </p:txBody>
-      </p:sp>
-      <p:sp>
-        <p:nvSpPr>
-          <p:cNvPr name="TextBox 13" id="13"/>
-          <p:cNvSpPr txBox="true"/>
-          <p:nvPr/>
-        </p:nvSpPr>
-        <p:spPr>
-          <a:xfrm rot="0">
+            <a:endParaRPr/>
+          </a:p>
+        </p:txBody>
+      </p:sp>
+      <p:sp>
+        <p:nvSpPr>
+          <p:cNvPr id="13" name="TextBox 13"/>
+          <p:cNvSpPr txBox="1"/>
+          <p:nvPr/>
+        </p:nvSpPr>
+        <p:spPr>
+          <a:xfrm>
             <a:off x="11031512" y="4864468"/>
             <a:ext cx="4450302" cy="2461643"/>
           </a:xfrm>
@@ -8524,18 +8712,18 @@
           </a:prstGeom>
         </p:spPr>
         <p:txBody>
-          <a:bodyPr anchor="t" rtlCol="false" tIns="0" lIns="0" bIns="0" rIns="0">
+          <a:bodyPr lIns="0" tIns="0" rIns="0" bIns="0" rtlCol="0" anchor="t">
             <a:spAutoFit/>
           </a:bodyPr>
           <a:lstStyle/>
           <a:p>
-            <a:pPr algn="just" marL="0" indent="0" lvl="0">
+            <a:pPr marL="0" lvl="0" indent="0" algn="just">
               <a:lnSpc>
                 <a:spcPts val="3968"/>
               </a:lnSpc>
             </a:pPr>
             <a:r>
-              <a:rPr lang="en-US" b="true" sz="2834">
+              <a:rPr lang="en-US" sz="2834" b="1">
                 <a:solidFill>
                   <a:srgbClr val="FFFFFF"/>
                 </a:solidFill>
@@ -8551,12 +8739,12 @@
       </p:sp>
       <p:sp>
         <p:nvSpPr>
-          <p:cNvPr name="TextBox 14" id="14"/>
-          <p:cNvSpPr txBox="true"/>
-          <p:nvPr/>
-        </p:nvSpPr>
-        <p:spPr>
-          <a:xfrm rot="0">
+          <p:cNvPr id="14" name="TextBox 14"/>
+          <p:cNvSpPr txBox="1"/>
+          <p:nvPr/>
+        </p:nvSpPr>
+        <p:spPr>
+          <a:xfrm>
             <a:off x="10821672" y="3980912"/>
             <a:ext cx="4884666" cy="606074"/>
           </a:xfrm>
@@ -8565,18 +8753,18 @@
           </a:prstGeom>
         </p:spPr>
         <p:txBody>
-          <a:bodyPr anchor="t" rtlCol="false" tIns="0" lIns="0" bIns="0" rIns="0">
+          <a:bodyPr lIns="0" tIns="0" rIns="0" bIns="0" rtlCol="0" anchor="t">
             <a:spAutoFit/>
           </a:bodyPr>
           <a:lstStyle/>
           <a:p>
-            <a:pPr algn="r" marL="0" indent="0" lvl="0">
+            <a:pPr marL="0" lvl="0" indent="0" algn="r">
               <a:lnSpc>
                 <a:spcPts val="4919"/>
               </a:lnSpc>
             </a:pPr>
             <a:r>
-              <a:rPr lang="en-US" b="true" sz="3513">
+              <a:rPr lang="en-US" sz="3513" b="1">
                 <a:solidFill>
                   <a:srgbClr val="FFFFFF"/>
                 </a:solidFill>
@@ -8592,12 +8780,12 @@
       </p:sp>
       <p:sp>
         <p:nvSpPr>
-          <p:cNvPr name="TextBox 15" id="15"/>
-          <p:cNvSpPr txBox="true"/>
-          <p:nvPr/>
-        </p:nvSpPr>
-        <p:spPr>
-          <a:xfrm rot="0">
+          <p:cNvPr id="15" name="TextBox 15"/>
+          <p:cNvSpPr txBox="1"/>
+          <p:nvPr/>
+        </p:nvSpPr>
+        <p:spPr>
+          <a:xfrm>
             <a:off x="9529762" y="3999962"/>
             <a:ext cx="1049196" cy="530509"/>
           </a:xfrm>
@@ -8606,16 +8794,17 @@
           </a:prstGeom>
         </p:spPr>
         <p:txBody>
-          <a:bodyPr anchor="t" rtlCol="false" tIns="0" lIns="0" bIns="0" rIns="0">
+          <a:bodyPr lIns="0" tIns="0" rIns="0" bIns="0" rtlCol="0" anchor="t">
             <a:spAutoFit/>
           </a:bodyPr>
           <a:lstStyle/>
           <a:p>
-            <a:pPr algn="ctr" marL="0" indent="0" lvl="0">
+            <a:pPr marL="0" lvl="0" indent="0" algn="ctr">
               <a:lnSpc>
                 <a:spcPts val="4359"/>
               </a:lnSpc>
             </a:pPr>
+            <a:endParaRPr/>
           </a:p>
         </p:txBody>
       </p:sp>
@@ -8628,13 +8817,14 @@
 </file>
 
 <file path=ppt/slides/slide8.xml><?xml version="1.0" encoding="utf-8"?>
-<p:sld xmlns:p="http://schemas.openxmlformats.org/presentationml/2006/main" xmlns:a="http://schemas.openxmlformats.org/drawingml/2006/main" xmlns:r="http://schemas.openxmlformats.org/officeDocument/2006/relationships">
+<p:sld xmlns:a="http://schemas.openxmlformats.org/drawingml/2006/main" xmlns:r="http://schemas.openxmlformats.org/officeDocument/2006/relationships" xmlns:p="http://schemas.openxmlformats.org/presentationml/2006/main">
   <p:cSld>
     <p:bg>
       <p:bgPr>
         <a:solidFill>
           <a:srgbClr val="26272B"/>
         </a:solidFill>
+        <a:effectLst/>
       </p:bgPr>
     </p:bg>
     <p:spTree>
@@ -8653,12 +8843,12 @@
       </p:grpSpPr>
       <p:sp>
         <p:nvSpPr>
-          <p:cNvPr name="Freeform 2" id="2"/>
+          <p:cNvPr id="2" name="Freeform 2"/>
           <p:cNvSpPr/>
           <p:nvPr/>
         </p:nvSpPr>
         <p:spPr>
-          <a:xfrm flipH="false" flipV="false" rot="-5400000">
+          <a:xfrm rot="-5400000">
             <a:off x="-3649725" y="8834213"/>
             <a:ext cx="7315200" cy="2025901"/>
           </a:xfrm>
@@ -8667,9 +8857,9 @@
             <a:gdLst/>
             <a:ahLst/>
             <a:cxnLst/>
-            <a:rect r="r" b="b" t="t" l="l"/>
+            <a:rect l="l" t="t" r="r" b="b"/>
             <a:pathLst>
-              <a:path h="2025901" w="7315200">
+              <a:path w="7315200" h="2025901">
                 <a:moveTo>
                   <a:pt x="0" y="0"/>
                 </a:moveTo>
@@ -8698,19 +8888,19 @@
               </a:extLst>
             </a:blip>
             <a:stretch>
-              <a:fillRect l="0" t="0" r="0" b="0"/>
+              <a:fillRect/>
             </a:stretch>
           </a:blipFill>
         </p:spPr>
       </p:sp>
       <p:sp>
         <p:nvSpPr>
-          <p:cNvPr name="Freeform 3" id="3"/>
+          <p:cNvPr id="3" name="Freeform 3"/>
           <p:cNvSpPr/>
           <p:nvPr/>
         </p:nvSpPr>
         <p:spPr>
-          <a:xfrm flipH="false" flipV="false" rot="-5400000">
+          <a:xfrm rot="-5400000">
             <a:off x="-3657600" y="-573114"/>
             <a:ext cx="7315200" cy="2025901"/>
           </a:xfrm>
@@ -8719,9 +8909,9 @@
             <a:gdLst/>
             <a:ahLst/>
             <a:cxnLst/>
-            <a:rect r="r" b="b" t="t" l="l"/>
+            <a:rect l="l" t="t" r="r" b="b"/>
             <a:pathLst>
-              <a:path h="2025901" w="7315200">
+              <a:path w="7315200" h="2025901">
                 <a:moveTo>
                   <a:pt x="0" y="0"/>
                 </a:moveTo>
@@ -8750,19 +8940,19 @@
               </a:extLst>
             </a:blip>
             <a:stretch>
-              <a:fillRect l="0" t="0" r="0" b="0"/>
+              <a:fillRect/>
             </a:stretch>
           </a:blipFill>
         </p:spPr>
       </p:sp>
       <p:sp>
         <p:nvSpPr>
-          <p:cNvPr name="Freeform 4" id="4"/>
+          <p:cNvPr id="4" name="Freeform 4"/>
           <p:cNvSpPr/>
           <p:nvPr/>
         </p:nvSpPr>
         <p:spPr>
-          <a:xfrm flipH="true" flipV="false" rot="0">
+          <a:xfrm flipH="1">
             <a:off x="-1590281" y="9258300"/>
             <a:ext cx="7315200" cy="3195406"/>
           </a:xfrm>
@@ -8771,9 +8961,9 @@
             <a:gdLst/>
             <a:ahLst/>
             <a:cxnLst/>
-            <a:rect r="r" b="b" t="t" l="l"/>
+            <a:rect l="l" t="t" r="r" b="b"/>
             <a:pathLst>
-              <a:path h="3195406" w="7315200">
+              <a:path w="7315200" h="3195406">
                 <a:moveTo>
                   <a:pt x="7315200" y="0"/>
                 </a:moveTo>
@@ -8802,19 +8992,19 @@
               </a:extLst>
             </a:blip>
             <a:stretch>
-              <a:fillRect l="0" t="0" r="0" b="0"/>
+              <a:fillRect/>
             </a:stretch>
           </a:blipFill>
         </p:spPr>
       </p:sp>
       <p:sp>
         <p:nvSpPr>
-          <p:cNvPr name="Freeform 5" id="5"/>
+          <p:cNvPr id="5" name="Freeform 5"/>
           <p:cNvSpPr/>
           <p:nvPr/>
         </p:nvSpPr>
         <p:spPr>
-          <a:xfrm flipH="false" flipV="false" rot="-5400000">
+          <a:xfrm rot="-5400000">
             <a:off x="14634337" y="8834213"/>
             <a:ext cx="7315200" cy="2025901"/>
           </a:xfrm>
@@ -8823,9 +9013,9 @@
             <a:gdLst/>
             <a:ahLst/>
             <a:cxnLst/>
-            <a:rect r="r" b="b" t="t" l="l"/>
+            <a:rect l="l" t="t" r="r" b="b"/>
             <a:pathLst>
-              <a:path h="2025901" w="7315200">
+              <a:path w="7315200" h="2025901">
                 <a:moveTo>
                   <a:pt x="0" y="0"/>
                 </a:moveTo>
@@ -8854,19 +9044,19 @@
               </a:extLst>
             </a:blip>
             <a:stretch>
-              <a:fillRect l="0" t="0" r="0" b="0"/>
+              <a:fillRect/>
             </a:stretch>
           </a:blipFill>
         </p:spPr>
       </p:sp>
       <p:sp>
         <p:nvSpPr>
-          <p:cNvPr name="Freeform 6" id="6"/>
+          <p:cNvPr id="6" name="Freeform 6"/>
           <p:cNvSpPr/>
           <p:nvPr/>
         </p:nvSpPr>
         <p:spPr>
-          <a:xfrm flipH="false" flipV="false" rot="-5400000">
+          <a:xfrm rot="-5400000">
             <a:off x="14626463" y="-573114"/>
             <a:ext cx="7315200" cy="2025901"/>
           </a:xfrm>
@@ -8875,9 +9065,9 @@
             <a:gdLst/>
             <a:ahLst/>
             <a:cxnLst/>
-            <a:rect r="r" b="b" t="t" l="l"/>
+            <a:rect l="l" t="t" r="r" b="b"/>
             <a:pathLst>
-              <a:path h="2025901" w="7315200">
+              <a:path w="7315200" h="2025901">
                 <a:moveTo>
                   <a:pt x="0" y="0"/>
                 </a:moveTo>
@@ -8906,19 +9096,19 @@
               </a:extLst>
             </a:blip>
             <a:stretch>
-              <a:fillRect l="0" t="0" r="0" b="0"/>
+              <a:fillRect/>
             </a:stretch>
           </a:blipFill>
         </p:spPr>
       </p:sp>
       <p:sp>
         <p:nvSpPr>
-          <p:cNvPr name="Freeform 7" id="7"/>
+          <p:cNvPr id="7" name="Freeform 7"/>
           <p:cNvSpPr/>
           <p:nvPr/>
         </p:nvSpPr>
         <p:spPr>
-          <a:xfrm flipH="false" flipV="true" rot="0">
+          <a:xfrm flipV="1">
             <a:off x="12563081" y="-2166706"/>
             <a:ext cx="7315200" cy="3195406"/>
           </a:xfrm>
@@ -8927,9 +9117,9 @@
             <a:gdLst/>
             <a:ahLst/>
             <a:cxnLst/>
-            <a:rect r="r" b="b" t="t" l="l"/>
+            <a:rect l="l" t="t" r="r" b="b"/>
             <a:pathLst>
-              <a:path h="3195406" w="7315200">
+              <a:path w="7315200" h="3195406">
                 <a:moveTo>
                   <a:pt x="0" y="3195406"/>
                 </a:moveTo>
@@ -8958,19 +9148,19 @@
               </a:extLst>
             </a:blip>
             <a:stretch>
-              <a:fillRect l="0" t="0" r="0" b="0"/>
+              <a:fillRect/>
             </a:stretch>
           </a:blipFill>
         </p:spPr>
       </p:sp>
       <p:sp>
         <p:nvSpPr>
-          <p:cNvPr name="TextBox 8" id="8"/>
-          <p:cNvSpPr txBox="true"/>
-          <p:nvPr/>
-        </p:nvSpPr>
-        <p:spPr>
-          <a:xfrm rot="0">
+          <p:cNvPr id="8" name="TextBox 8"/>
+          <p:cNvSpPr txBox="1"/>
+          <p:nvPr/>
+        </p:nvSpPr>
+        <p:spPr>
+          <a:xfrm>
             <a:off x="15481814" y="8756615"/>
             <a:ext cx="1477734" cy="506138"/>
           </a:xfrm>
@@ -8979,18 +9169,18 @@
           </a:prstGeom>
         </p:spPr>
         <p:txBody>
-          <a:bodyPr anchor="t" rtlCol="false" tIns="0" lIns="0" bIns="0" rIns="0">
+          <a:bodyPr lIns="0" tIns="0" rIns="0" bIns="0" rtlCol="0" anchor="t">
             <a:spAutoFit/>
           </a:bodyPr>
           <a:lstStyle/>
           <a:p>
-            <a:pPr algn="ctr" marL="0" indent="0" lvl="0">
+            <a:pPr marL="0" lvl="0" indent="0" algn="ctr">
               <a:lnSpc>
                 <a:spcPts val="4127"/>
               </a:lnSpc>
             </a:pPr>
             <a:r>
-              <a:rPr lang="en-US" b="true" sz="2948">
+              <a:rPr lang="en-US" sz="2948" b="1">
                 <a:solidFill>
                   <a:srgbClr val="26272B"/>
                 </a:solidFill>
@@ -9006,12 +9196,12 @@
       </p:sp>
       <p:sp>
         <p:nvSpPr>
-          <p:cNvPr name="TextBox 9" id="9"/>
-          <p:cNvSpPr txBox="true"/>
-          <p:nvPr/>
-        </p:nvSpPr>
-        <p:spPr>
-          <a:xfrm rot="0">
+          <p:cNvPr id="9" name="TextBox 9"/>
+          <p:cNvSpPr txBox="1"/>
+          <p:nvPr/>
+        </p:nvSpPr>
+        <p:spPr>
+          <a:xfrm>
             <a:off x="5088353" y="2869927"/>
             <a:ext cx="11132328" cy="845635"/>
           </a:xfrm>
@@ -9020,18 +9210,18 @@
           </a:prstGeom>
         </p:spPr>
         <p:txBody>
-          <a:bodyPr anchor="t" rtlCol="false" tIns="0" lIns="0" bIns="0" rIns="0">
+          <a:bodyPr lIns="0" tIns="0" rIns="0" bIns="0" rtlCol="0" anchor="t">
             <a:spAutoFit/>
           </a:bodyPr>
           <a:lstStyle/>
           <a:p>
-            <a:pPr algn="ctr" marL="0" indent="0" lvl="0">
+            <a:pPr marL="0" lvl="0" indent="0" algn="ctr">
               <a:lnSpc>
                 <a:spcPts val="6940"/>
               </a:lnSpc>
             </a:pPr>
             <a:r>
-              <a:rPr lang="en-US" b="true" sz="4957">
+              <a:rPr lang="en-US" sz="4957" b="1">
                 <a:solidFill>
                   <a:srgbClr val="FFFFFF"/>
                 </a:solidFill>
@@ -9047,32 +9237,32 @@
       </p:sp>
       <p:sp>
         <p:nvSpPr>
-          <p:cNvPr name="TextBox 10" id="10"/>
-          <p:cNvSpPr txBox="true"/>
-          <p:nvPr/>
-        </p:nvSpPr>
-        <p:spPr>
-          <a:xfrm rot="0">
+          <p:cNvPr id="10" name="TextBox 10"/>
+          <p:cNvSpPr txBox="1"/>
+          <p:nvPr/>
+        </p:nvSpPr>
+        <p:spPr>
+          <a:xfrm>
             <a:off x="1502914" y="4360322"/>
-            <a:ext cx="13455389" cy="3190286"/>
+            <a:ext cx="13455389" cy="3724802"/>
           </a:xfrm>
           <a:prstGeom prst="rect">
             <a:avLst/>
           </a:prstGeom>
         </p:spPr>
         <p:txBody>
-          <a:bodyPr anchor="t" rtlCol="false" tIns="0" lIns="0" bIns="0" rIns="0">
+          <a:bodyPr lIns="0" tIns="0" rIns="0" bIns="0" rtlCol="0" anchor="t">
             <a:spAutoFit/>
           </a:bodyPr>
           <a:lstStyle/>
           <a:p>
-            <a:pPr algn="just" marL="0" indent="0" lvl="0">
+            <a:pPr marL="0" lvl="0" indent="0" algn="just">
               <a:lnSpc>
                 <a:spcPts val="4232"/>
               </a:lnSpc>
             </a:pPr>
             <a:r>
-              <a:rPr lang="en-US" b="true" sz="3023">
+              <a:rPr lang="en-US" sz="3023" b="1" dirty="0">
                 <a:solidFill>
                   <a:srgbClr val="FFFFFF"/>
                 </a:solidFill>
@@ -9085,13 +9275,13 @@
             </a:r>
           </a:p>
           <a:p>
-            <a:pPr algn="just" marL="0" indent="0" lvl="0">
+            <a:pPr marL="0" lvl="0" indent="0" algn="just">
               <a:lnSpc>
                 <a:spcPts val="4232"/>
               </a:lnSpc>
             </a:pPr>
             <a:r>
-              <a:rPr lang="en-US" b="true" sz="3023">
+              <a:rPr lang="en-US" sz="3023" b="1" dirty="0">
                 <a:solidFill>
                   <a:srgbClr val="FFFFFF"/>
                 </a:solidFill>
@@ -9104,13 +9294,32 @@
             </a:r>
           </a:p>
           <a:p>
-            <a:pPr algn="just" marL="0" indent="0" lvl="0">
+            <a:pPr marL="0" lvl="0" indent="0" algn="just">
               <a:lnSpc>
                 <a:spcPts val="4232"/>
               </a:lnSpc>
             </a:pPr>
             <a:r>
-              <a:rPr lang="en-US" b="true" sz="3023">
+              <a:rPr lang="en-US" sz="3023" b="1" dirty="0">
+                <a:solidFill>
+                  <a:srgbClr val="FFFFFF"/>
+                </a:solidFill>
+                <a:latin typeface="Aileron Bold"/>
+                <a:ea typeface="Aileron Bold"/>
+                <a:cs typeface="Aileron Bold"/>
+                <a:sym typeface="Aileron Bold"/>
+              </a:rPr>
+              <a:t>• SHA1 hashing for separating, handle &amp; storing commits</a:t>
+            </a:r>
+          </a:p>
+          <a:p>
+            <a:pPr marL="0" lvl="0" indent="0" algn="just">
+              <a:lnSpc>
+                <a:spcPts val="4232"/>
+              </a:lnSpc>
+            </a:pPr>
+            <a:r>
+              <a:rPr lang="en-US" sz="3023" b="1" dirty="0">
                 <a:solidFill>
                   <a:srgbClr val="FFFFFF"/>
                 </a:solidFill>
@@ -9123,13 +9332,13 @@
             </a:r>
           </a:p>
           <a:p>
-            <a:pPr algn="just" marL="0" indent="0" lvl="0">
+            <a:pPr marL="0" lvl="0" indent="0" algn="just">
               <a:lnSpc>
                 <a:spcPts val="4232"/>
               </a:lnSpc>
             </a:pPr>
             <a:r>
-              <a:rPr lang="en-US" b="true" sz="3023">
+              <a:rPr lang="en-US" sz="3023" b="1" dirty="0">
                 <a:solidFill>
                   <a:srgbClr val="FFFFFF"/>
                 </a:solidFill>
@@ -9138,17 +9347,41 @@
                 <a:cs typeface="Aileron Bold"/>
                 <a:sym typeface="Aileron Bold"/>
               </a:rPr>
-              <a:t>• zlib compression for optimized storage</a:t>
-            </a:r>
-          </a:p>
-          <a:p>
-            <a:pPr algn="just" marL="0" indent="0" lvl="0">
+              <a:t>• </a:t>
+            </a:r>
+            <a:r>
+              <a:rPr lang="en-US" sz="3023" b="1" dirty="0" err="1">
+                <a:solidFill>
+                  <a:srgbClr val="FFFFFF"/>
+                </a:solidFill>
+                <a:latin typeface="Aileron Bold"/>
+                <a:ea typeface="Aileron Bold"/>
+                <a:cs typeface="Aileron Bold"/>
+                <a:sym typeface="Aileron Bold"/>
+              </a:rPr>
+              <a:t>zlib</a:t>
+            </a:r>
+            <a:r>
+              <a:rPr lang="en-US" sz="3023" b="1" dirty="0">
+                <a:solidFill>
+                  <a:srgbClr val="FFFFFF"/>
+                </a:solidFill>
+                <a:latin typeface="Aileron Bold"/>
+                <a:ea typeface="Aileron Bold"/>
+                <a:cs typeface="Aileron Bold"/>
+                <a:sym typeface="Aileron Bold"/>
+              </a:rPr>
+              <a:t> compression for optimized storage</a:t>
+            </a:r>
+          </a:p>
+          <a:p>
+            <a:pPr marL="0" lvl="0" indent="0" algn="just">
               <a:lnSpc>
                 <a:spcPts val="4232"/>
               </a:lnSpc>
             </a:pPr>
             <a:r>
-              <a:rPr lang="en-US" b="true" sz="3023">
+              <a:rPr lang="en-US" sz="3023" b="1" dirty="0">
                 <a:solidFill>
                   <a:srgbClr val="FFFFFF"/>
                 </a:solidFill>
@@ -9161,13 +9394,13 @@
             </a:r>
           </a:p>
           <a:p>
-            <a:pPr algn="just" marL="0" indent="0" lvl="0">
+            <a:pPr marL="0" lvl="0" indent="0" algn="just">
               <a:lnSpc>
                 <a:spcPts val="4232"/>
               </a:lnSpc>
             </a:pPr>
             <a:r>
-              <a:rPr lang="en-US" b="true" sz="3023">
+              <a:rPr lang="en-US" sz="3023" b="1" dirty="0">
                 <a:solidFill>
                   <a:srgbClr val="FFFFFF"/>
                 </a:solidFill>
@@ -9190,13 +9423,14 @@
 </file>
 
 <file path=ppt/slides/slide9.xml><?xml version="1.0" encoding="utf-8"?>
-<p:sld xmlns:p="http://schemas.openxmlformats.org/presentationml/2006/main" xmlns:a="http://schemas.openxmlformats.org/drawingml/2006/main" xmlns:r="http://schemas.openxmlformats.org/officeDocument/2006/relationships">
+<p:sld xmlns:a="http://schemas.openxmlformats.org/drawingml/2006/main" xmlns:r="http://schemas.openxmlformats.org/officeDocument/2006/relationships" xmlns:p="http://schemas.openxmlformats.org/presentationml/2006/main">
   <p:cSld>
     <p:bg>
       <p:bgPr>
         <a:solidFill>
           <a:srgbClr val="26272B"/>
         </a:solidFill>
+        <a:effectLst/>
       </p:bgPr>
     </p:bg>
     <p:spTree>
@@ -9215,12 +9449,12 @@
       </p:grpSpPr>
       <p:sp>
         <p:nvSpPr>
-          <p:cNvPr name="Freeform 2" id="2"/>
+          <p:cNvPr id="2" name="Freeform 2"/>
           <p:cNvSpPr/>
           <p:nvPr/>
         </p:nvSpPr>
         <p:spPr>
-          <a:xfrm flipH="false" flipV="false" rot="-5400000">
+          <a:xfrm rot="-5400000">
             <a:off x="-3649725" y="8834213"/>
             <a:ext cx="7315200" cy="2025901"/>
           </a:xfrm>
@@ -9229,9 +9463,9 @@
             <a:gdLst/>
             <a:ahLst/>
             <a:cxnLst/>
-            <a:rect r="r" b="b" t="t" l="l"/>
+            <a:rect l="l" t="t" r="r" b="b"/>
             <a:pathLst>
-              <a:path h="2025901" w="7315200">
+              <a:path w="7315200" h="2025901">
                 <a:moveTo>
                   <a:pt x="0" y="0"/>
                 </a:moveTo>
@@ -9260,19 +9494,19 @@
               </a:extLst>
             </a:blip>
             <a:stretch>
-              <a:fillRect l="0" t="0" r="0" b="0"/>
+              <a:fillRect/>
             </a:stretch>
           </a:blipFill>
         </p:spPr>
       </p:sp>
       <p:sp>
         <p:nvSpPr>
-          <p:cNvPr name="Freeform 3" id="3"/>
+          <p:cNvPr id="3" name="Freeform 3"/>
           <p:cNvSpPr/>
           <p:nvPr/>
         </p:nvSpPr>
         <p:spPr>
-          <a:xfrm flipH="false" flipV="false" rot="-5400000">
+          <a:xfrm rot="-5400000">
             <a:off x="-3657600" y="-573114"/>
             <a:ext cx="7315200" cy="2025901"/>
           </a:xfrm>
@@ -9281,9 +9515,9 @@
             <a:gdLst/>
             <a:ahLst/>
             <a:cxnLst/>
-            <a:rect r="r" b="b" t="t" l="l"/>
+            <a:rect l="l" t="t" r="r" b="b"/>
             <a:pathLst>
-              <a:path h="2025901" w="7315200">
+              <a:path w="7315200" h="2025901">
                 <a:moveTo>
                   <a:pt x="0" y="0"/>
                 </a:moveTo>
@@ -9312,19 +9546,19 @@
               </a:extLst>
             </a:blip>
             <a:stretch>
-              <a:fillRect l="0" t="0" r="0" b="0"/>
+              <a:fillRect/>
             </a:stretch>
           </a:blipFill>
         </p:spPr>
       </p:sp>
       <p:sp>
         <p:nvSpPr>
-          <p:cNvPr name="Freeform 4" id="4"/>
+          <p:cNvPr id="4" name="Freeform 4"/>
           <p:cNvSpPr/>
           <p:nvPr/>
         </p:nvSpPr>
         <p:spPr>
-          <a:xfrm flipH="true" flipV="false" rot="0">
+          <a:xfrm flipH="1">
             <a:off x="-1590281" y="9258300"/>
             <a:ext cx="7315200" cy="3195406"/>
           </a:xfrm>
@@ -9333,9 +9567,9 @@
             <a:gdLst/>
             <a:ahLst/>
             <a:cxnLst/>
-            <a:rect r="r" b="b" t="t" l="l"/>
+            <a:rect l="l" t="t" r="r" b="b"/>
             <a:pathLst>
-              <a:path h="3195406" w="7315200">
+              <a:path w="7315200" h="3195406">
                 <a:moveTo>
                   <a:pt x="7315200" y="0"/>
                 </a:moveTo>
@@ -9364,19 +9598,19 @@
               </a:extLst>
             </a:blip>
             <a:stretch>
-              <a:fillRect l="0" t="0" r="0" b="0"/>
+              <a:fillRect/>
             </a:stretch>
           </a:blipFill>
         </p:spPr>
       </p:sp>
       <p:sp>
         <p:nvSpPr>
-          <p:cNvPr name="Freeform 5" id="5"/>
+          <p:cNvPr id="5" name="Freeform 5"/>
           <p:cNvSpPr/>
           <p:nvPr/>
         </p:nvSpPr>
         <p:spPr>
-          <a:xfrm flipH="false" flipV="false" rot="-5400000">
+          <a:xfrm rot="-5400000">
             <a:off x="14634337" y="8834213"/>
             <a:ext cx="7315200" cy="2025901"/>
           </a:xfrm>
@@ -9385,9 +9619,9 @@
             <a:gdLst/>
             <a:ahLst/>
             <a:cxnLst/>
-            <a:rect r="r" b="b" t="t" l="l"/>
+            <a:rect l="l" t="t" r="r" b="b"/>
             <a:pathLst>
-              <a:path h="2025901" w="7315200">
+              <a:path w="7315200" h="2025901">
                 <a:moveTo>
                   <a:pt x="0" y="0"/>
                 </a:moveTo>
@@ -9416,19 +9650,19 @@
               </a:extLst>
             </a:blip>
             <a:stretch>
-              <a:fillRect l="0" t="0" r="0" b="0"/>
+              <a:fillRect/>
             </a:stretch>
           </a:blipFill>
         </p:spPr>
       </p:sp>
       <p:sp>
         <p:nvSpPr>
-          <p:cNvPr name="Freeform 6" id="6"/>
+          <p:cNvPr id="6" name="Freeform 6"/>
           <p:cNvSpPr/>
           <p:nvPr/>
         </p:nvSpPr>
         <p:spPr>
-          <a:xfrm flipH="false" flipV="false" rot="-5400000">
+          <a:xfrm rot="-5400000">
             <a:off x="14626463" y="-573114"/>
             <a:ext cx="7315200" cy="2025901"/>
           </a:xfrm>
@@ -9437,9 +9671,9 @@
             <a:gdLst/>
             <a:ahLst/>
             <a:cxnLst/>
-            <a:rect r="r" b="b" t="t" l="l"/>
+            <a:rect l="l" t="t" r="r" b="b"/>
             <a:pathLst>
-              <a:path h="2025901" w="7315200">
+              <a:path w="7315200" h="2025901">
                 <a:moveTo>
                   <a:pt x="0" y="0"/>
                 </a:moveTo>
@@ -9468,19 +9702,19 @@
               </a:extLst>
             </a:blip>
             <a:stretch>
-              <a:fillRect l="0" t="0" r="0" b="0"/>
+              <a:fillRect/>
             </a:stretch>
           </a:blipFill>
         </p:spPr>
       </p:sp>
       <p:sp>
         <p:nvSpPr>
-          <p:cNvPr name="Freeform 7" id="7"/>
+          <p:cNvPr id="7" name="Freeform 7"/>
           <p:cNvSpPr/>
           <p:nvPr/>
         </p:nvSpPr>
         <p:spPr>
-          <a:xfrm flipH="false" flipV="true" rot="0">
+          <a:xfrm flipV="1">
             <a:off x="12563081" y="-2166706"/>
             <a:ext cx="7315200" cy="3195406"/>
           </a:xfrm>
@@ -9489,9 +9723,9 @@
             <a:gdLst/>
             <a:ahLst/>
             <a:cxnLst/>
-            <a:rect r="r" b="b" t="t" l="l"/>
+            <a:rect l="l" t="t" r="r" b="b"/>
             <a:pathLst>
-              <a:path h="3195406" w="7315200">
+              <a:path w="7315200" h="3195406">
                 <a:moveTo>
                   <a:pt x="0" y="3195406"/>
                 </a:moveTo>
@@ -9520,19 +9754,19 @@
               </a:extLst>
             </a:blip>
             <a:stretch>
-              <a:fillRect l="0" t="0" r="0" b="0"/>
+              <a:fillRect/>
             </a:stretch>
           </a:blipFill>
         </p:spPr>
       </p:sp>
       <p:sp>
         <p:nvSpPr>
-          <p:cNvPr name="TextBox 8" id="8"/>
-          <p:cNvSpPr txBox="true"/>
-          <p:nvPr/>
-        </p:nvSpPr>
-        <p:spPr>
-          <a:xfrm rot="0">
+          <p:cNvPr id="8" name="TextBox 8"/>
+          <p:cNvSpPr txBox="1"/>
+          <p:nvPr/>
+        </p:nvSpPr>
+        <p:spPr>
+          <a:xfrm>
             <a:off x="15481814" y="8756615"/>
             <a:ext cx="1477734" cy="506138"/>
           </a:xfrm>
@@ -9541,18 +9775,18 @@
           </a:prstGeom>
         </p:spPr>
         <p:txBody>
-          <a:bodyPr anchor="t" rtlCol="false" tIns="0" lIns="0" bIns="0" rIns="0">
+          <a:bodyPr lIns="0" tIns="0" rIns="0" bIns="0" rtlCol="0" anchor="t">
             <a:spAutoFit/>
           </a:bodyPr>
           <a:lstStyle/>
           <a:p>
-            <a:pPr algn="ctr" marL="0" indent="0" lvl="0">
+            <a:pPr marL="0" lvl="0" indent="0" algn="ctr">
               <a:lnSpc>
                 <a:spcPts val="4127"/>
               </a:lnSpc>
             </a:pPr>
             <a:r>
-              <a:rPr lang="en-US" b="true" sz="2948">
+              <a:rPr lang="en-US" sz="2948" b="1">
                 <a:solidFill>
                   <a:srgbClr val="26272B"/>
                 </a:solidFill>
@@ -9568,12 +9802,12 @@
       </p:sp>
       <p:sp>
         <p:nvSpPr>
-          <p:cNvPr name="TextBox 9" id="9"/>
-          <p:cNvSpPr txBox="true"/>
-          <p:nvPr/>
-        </p:nvSpPr>
-        <p:spPr>
-          <a:xfrm rot="0">
+          <p:cNvPr id="9" name="TextBox 9"/>
+          <p:cNvSpPr txBox="1"/>
+          <p:nvPr/>
+        </p:nvSpPr>
+        <p:spPr>
+          <a:xfrm>
             <a:off x="1221852" y="933450"/>
             <a:ext cx="11132328" cy="845635"/>
           </a:xfrm>
@@ -9582,18 +9816,18 @@
           </a:prstGeom>
         </p:spPr>
         <p:txBody>
-          <a:bodyPr anchor="t" rtlCol="false" tIns="0" lIns="0" bIns="0" rIns="0">
+          <a:bodyPr lIns="0" tIns="0" rIns="0" bIns="0" rtlCol="0" anchor="t">
             <a:spAutoFit/>
           </a:bodyPr>
           <a:lstStyle/>
           <a:p>
-            <a:pPr algn="l" marL="0" indent="0" lvl="0">
+            <a:pPr marL="0" lvl="0" indent="0" algn="l">
               <a:lnSpc>
                 <a:spcPts val="6940"/>
               </a:lnSpc>
             </a:pPr>
             <a:r>
-              <a:rPr lang="en-US" b="true" sz="4957">
+              <a:rPr lang="en-US" sz="4957" b="1">
                 <a:solidFill>
                   <a:srgbClr val="FFFFFF"/>
                 </a:solidFill>
@@ -9609,26 +9843,26 @@
       </p:sp>
       <p:sp>
         <p:nvSpPr>
-          <p:cNvPr name="TextBox 10" id="10"/>
-          <p:cNvSpPr txBox="true"/>
-          <p:nvPr/>
-        </p:nvSpPr>
-        <p:spPr>
-          <a:xfrm rot="0">
+          <p:cNvPr id="10" name="TextBox 10"/>
+          <p:cNvSpPr txBox="1"/>
+          <p:nvPr/>
+        </p:nvSpPr>
+        <p:spPr>
+          <a:xfrm>
             <a:off x="1526454" y="1972264"/>
-            <a:ext cx="13455389" cy="2266996"/>
+            <a:ext cx="13455389" cy="2331216"/>
           </a:xfrm>
           <a:prstGeom prst="rect">
             <a:avLst/>
           </a:prstGeom>
         </p:spPr>
         <p:txBody>
-          <a:bodyPr anchor="t" rtlCol="false" tIns="0" lIns="0" bIns="0" rIns="0">
+          <a:bodyPr lIns="0" tIns="0" rIns="0" bIns="0" rtlCol="0" anchor="t">
             <a:spAutoFit/>
           </a:bodyPr>
           <a:lstStyle/>
           <a:p>
-            <a:pPr algn="l" marL="566349" indent="-283174" lvl="1">
+            <a:pPr marL="566349" lvl="1" indent="-283174" algn="l">
               <a:lnSpc>
                 <a:spcPts val="3672"/>
               </a:lnSpc>
@@ -9636,7 +9870,7 @@
               <a:buChar char="•"/>
             </a:pPr>
             <a:r>
-              <a:rPr lang="en-US" b="true" sz="2623">
+              <a:rPr lang="en-US" sz="2623" b="1" dirty="0">
                 <a:solidFill>
                   <a:srgbClr val="FFFFFF"/>
                 </a:solidFill>
@@ -9645,11 +9879,11 @@
                 <a:cs typeface="Aileron Bold"/>
                 <a:sym typeface="Aileron Bold"/>
               </a:rPr>
-              <a:t>Bilal: Fetch, Add, Clone and Main Front-End</a:t>
-            </a:r>
-          </a:p>
-          <a:p>
-            <a:pPr algn="l" marL="566349" indent="-283174" lvl="1">
+              <a:t>Bilal: Fetch, Add, Clone &amp; Main Front-End</a:t>
+            </a:r>
+          </a:p>
+          <a:p>
+            <a:pPr marL="566349" lvl="1" indent="-283174" algn="l">
               <a:lnSpc>
                 <a:spcPts val="3672"/>
               </a:lnSpc>
@@ -9657,7 +9891,7 @@
               <a:buChar char="•"/>
             </a:pPr>
             <a:r>
-              <a:rPr lang="en-US" b="true" sz="2623">
+              <a:rPr lang="en-US" sz="2623" b="1" dirty="0">
                 <a:solidFill>
                   <a:srgbClr val="FFFFFF"/>
                 </a:solidFill>
@@ -9666,11 +9900,11 @@
                 <a:cs typeface="Aileron Bold"/>
                 <a:sym typeface="Aileron Bold"/>
               </a:rPr>
-              <a:t>Patrick:  Tag, Status, Checkout and Support Front-End</a:t>
-            </a:r>
-          </a:p>
-          <a:p>
-            <a:pPr algn="l" marL="566349" indent="-283174" lvl="1">
+              <a:t>Patrick:  Tag, Status, Checkout &amp; Support Front-End</a:t>
+            </a:r>
+          </a:p>
+          <a:p>
+            <a:pPr marL="566349" lvl="1" indent="-283174" algn="l">
               <a:lnSpc>
                 <a:spcPts val="3672"/>
               </a:lnSpc>
@@ -9678,7 +9912,7 @@
               <a:buChar char="•"/>
             </a:pPr>
             <a:r>
-              <a:rPr lang="en-US" b="true" sz="2623">
+              <a:rPr lang="en-US" sz="2623" b="1" dirty="0">
                 <a:solidFill>
                   <a:srgbClr val="FFFFFF"/>
                 </a:solidFill>
@@ -9687,11 +9921,11 @@
                 <a:cs typeface="Aileron Bold"/>
                 <a:sym typeface="Aileron Bold"/>
               </a:rPr>
-              <a:t>Omar: Init, Push, Pull, Log, Database and Support Back-End</a:t>
-            </a:r>
-          </a:p>
-          <a:p>
-            <a:pPr algn="l" marL="566349" indent="-283174" lvl="1">
+              <a:t>Omar: Init, Push, Pull, Log, Database &amp; Support Back-End</a:t>
+            </a:r>
+          </a:p>
+          <a:p>
+            <a:pPr marL="566349" lvl="1" indent="-283174" algn="l">
               <a:lnSpc>
                 <a:spcPts val="3672"/>
               </a:lnSpc>
@@ -9699,7 +9933,7 @@
               <a:buChar char="•"/>
             </a:pPr>
             <a:r>
-              <a:rPr lang="en-US" b="true" sz="2623">
+              <a:rPr lang="en-US" sz="2623" b="1" dirty="0">
                 <a:solidFill>
                   <a:srgbClr val="FFFFFF"/>
                 </a:solidFill>
@@ -9708,11 +9942,11 @@
                 <a:cs typeface="Aileron Bold"/>
                 <a:sym typeface="Aileron Bold"/>
               </a:rPr>
-              <a:t>Charbel: Init, Commit and Main Back-End</a:t>
-            </a:r>
-          </a:p>
-          <a:p>
-            <a:pPr algn="l" marL="566349" indent="-283174" lvl="1">
+              <a:t>Charbel: Init, Commit, LCS &amp; Main Back-End</a:t>
+            </a:r>
+          </a:p>
+          <a:p>
+            <a:pPr marL="566349" lvl="1" indent="-283174" algn="l">
               <a:lnSpc>
                 <a:spcPts val="3672"/>
               </a:lnSpc>
@@ -9720,7 +9954,7 @@
               <a:buChar char="•"/>
             </a:pPr>
             <a:r>
-              <a:rPr lang="en-US" b="true" sz="2623">
+              <a:rPr lang="en-US" sz="2623" b="1" dirty="0">
                 <a:solidFill>
                   <a:srgbClr val="FFFFFF"/>
                 </a:solidFill>
@@ -9729,19 +9963,19 @@
                 <a:cs typeface="Aileron Bold"/>
                 <a:sym typeface="Aileron Bold"/>
               </a:rPr>
-              <a:t>Team: Merge and Branch</a:t>
-            </a:r>
-          </a:p>
-        </p:txBody>
-      </p:sp>
-      <p:sp>
-        <p:nvSpPr>
-          <p:cNvPr name="TextBox 11" id="11"/>
-          <p:cNvSpPr txBox="true"/>
-          <p:nvPr/>
-        </p:nvSpPr>
-        <p:spPr>
-          <a:xfrm rot="0">
+              <a:t>Team: Merge &amp; Branch</a:t>
+            </a:r>
+          </a:p>
+        </p:txBody>
+      </p:sp>
+      <p:sp>
+        <p:nvSpPr>
+          <p:cNvPr id="11" name="TextBox 11"/>
+          <p:cNvSpPr txBox="1"/>
+          <p:nvPr/>
+        </p:nvSpPr>
+        <p:spPr>
+          <a:xfrm>
             <a:off x="1221852" y="5343928"/>
             <a:ext cx="11132328" cy="845635"/>
           </a:xfrm>
@@ -9750,18 +9984,18 @@
           </a:prstGeom>
         </p:spPr>
         <p:txBody>
-          <a:bodyPr anchor="t" rtlCol="false" tIns="0" lIns="0" bIns="0" rIns="0">
+          <a:bodyPr lIns="0" tIns="0" rIns="0" bIns="0" rtlCol="0" anchor="t">
             <a:spAutoFit/>
           </a:bodyPr>
           <a:lstStyle/>
           <a:p>
-            <a:pPr algn="l" marL="0" indent="0" lvl="0">
+            <a:pPr marL="0" lvl="0" indent="0" algn="l">
               <a:lnSpc>
                 <a:spcPts val="6940"/>
               </a:lnSpc>
             </a:pPr>
             <a:r>
-              <a:rPr lang="en-US" b="true" sz="4957">
+              <a:rPr lang="en-US" sz="4957" b="1" dirty="0">
                 <a:solidFill>
                   <a:srgbClr val="FFFFFF"/>
                 </a:solidFill>
@@ -9777,26 +10011,26 @@
       </p:sp>
       <p:sp>
         <p:nvSpPr>
-          <p:cNvPr name="TextBox 12" id="12"/>
-          <p:cNvSpPr txBox="true"/>
-          <p:nvPr/>
-        </p:nvSpPr>
-        <p:spPr>
-          <a:xfrm rot="0">
+          <p:cNvPr id="12" name="TextBox 12"/>
+          <p:cNvSpPr txBox="1"/>
+          <p:nvPr/>
+        </p:nvSpPr>
+        <p:spPr>
+          <a:xfrm>
             <a:off x="1221852" y="6643114"/>
-            <a:ext cx="13455389" cy="1352596"/>
+            <a:ext cx="13455389" cy="1382238"/>
           </a:xfrm>
           <a:prstGeom prst="rect">
             <a:avLst/>
           </a:prstGeom>
         </p:spPr>
         <p:txBody>
-          <a:bodyPr anchor="t" rtlCol="false" tIns="0" lIns="0" bIns="0" rIns="0">
+          <a:bodyPr lIns="0" tIns="0" rIns="0" bIns="0" rtlCol="0" anchor="t">
             <a:spAutoFit/>
           </a:bodyPr>
           <a:lstStyle/>
           <a:p>
-            <a:pPr algn="l" marL="566349" indent="-283174" lvl="1">
+            <a:pPr marL="566349" lvl="1" indent="-283174" algn="l">
               <a:lnSpc>
                 <a:spcPts val="3672"/>
               </a:lnSpc>
@@ -9804,7 +10038,7 @@
               <a:buChar char="•"/>
             </a:pPr>
             <a:r>
-              <a:rPr lang="en-US" b="true" sz="2623">
+              <a:rPr lang="en-US" sz="2623" b="1" dirty="0">
                 <a:solidFill>
                   <a:srgbClr val="FFFFFF"/>
                 </a:solidFill>
@@ -9817,7 +10051,7 @@
             </a:r>
           </a:p>
           <a:p>
-            <a:pPr algn="l" marL="566349" indent="-283174" lvl="1">
+            <a:pPr marL="566349" lvl="1" indent="-283174" algn="l">
               <a:lnSpc>
                 <a:spcPts val="3672"/>
               </a:lnSpc>
@@ -9825,7 +10059,7 @@
               <a:buChar char="•"/>
             </a:pPr>
             <a:r>
-              <a:rPr lang="en-US" b="true" sz="2623">
+              <a:rPr lang="en-US" sz="2623" b="1" dirty="0">
                 <a:solidFill>
                   <a:srgbClr val="FFFFFF"/>
                 </a:solidFill>
@@ -9838,7 +10072,7 @@
             </a:r>
           </a:p>
           <a:p>
-            <a:pPr algn="l" marL="566349" indent="-283174" lvl="1">
+            <a:pPr marL="566349" lvl="1" indent="-283174" algn="l">
               <a:lnSpc>
                 <a:spcPts val="3672"/>
               </a:lnSpc>
@@ -9846,7 +10080,7 @@
               <a:buChar char="•"/>
             </a:pPr>
             <a:r>
-              <a:rPr lang="en-US" b="true" sz="2623">
+              <a:rPr lang="en-US" sz="2623" b="1" dirty="0">
                 <a:solidFill>
                   <a:srgbClr val="FFFFFF"/>
                 </a:solidFill>
@@ -9855,7 +10089,7 @@
                 <a:cs typeface="Aileron Bold"/>
                 <a:sym typeface="Aileron Bold"/>
               </a:rPr>
-              <a:t>Database fully configured using Supabase. </a:t>
+              <a:t>Database fully configured as of current progress. </a:t>
             </a:r>
           </a:p>
         </p:txBody>

--- a/docs/FYP Presentation.pptx
+++ b/docs/FYP Presentation.pptx
@@ -3987,7 +3987,7 @@
         </p:nvSpPr>
         <p:spPr>
           <a:xfrm>
-            <a:off x="1502914" y="1604634"/>
+            <a:off x="1531217" y="779429"/>
             <a:ext cx="11132328" cy="845635"/>
           </a:xfrm>
           <a:prstGeom prst="rect">
@@ -4006,7 +4006,7 @@
               </a:lnSpc>
             </a:pPr>
             <a:r>
-              <a:rPr lang="en-US" sz="4957" b="1">
+              <a:rPr lang="en-US" sz="4957" b="1" dirty="0">
                 <a:solidFill>
                   <a:srgbClr val="FFFFFF"/>
                 </a:solidFill>
@@ -4028,7 +4028,7 @@
         </p:nvSpPr>
         <p:spPr>
           <a:xfrm>
-            <a:off x="1502914" y="2624988"/>
+            <a:off x="1461707" y="1796514"/>
             <a:ext cx="13455389" cy="1856727"/>
           </a:xfrm>
           <a:prstGeom prst="rect">
@@ -4134,7 +4134,7 @@
         </p:nvSpPr>
         <p:spPr>
           <a:xfrm>
-            <a:off x="1502914" y="5566132"/>
+            <a:off x="1502914" y="4522422"/>
             <a:ext cx="11132328" cy="845635"/>
           </a:xfrm>
           <a:prstGeom prst="rect">
@@ -4153,7 +4153,7 @@
               </a:lnSpc>
             </a:pPr>
             <a:r>
-              <a:rPr lang="en-US" sz="4957" b="1">
+              <a:rPr lang="en-US" sz="4957" b="1" dirty="0">
                 <a:solidFill>
                   <a:srgbClr val="FFFFFF"/>
                 </a:solidFill>
@@ -4175,7 +4175,7 @@
         </p:nvSpPr>
         <p:spPr>
           <a:xfrm>
-            <a:off x="1502914" y="6583217"/>
+            <a:off x="1535571" y="5620319"/>
             <a:ext cx="13455389" cy="2331216"/>
           </a:xfrm>
           <a:prstGeom prst="rect">
